--- a/Bus_Sathi_Trace_Intelligence_Briefing.pptx
+++ b/Bus_Sathi_Trace_Intelligence_Briefing.pptx
@@ -15,6 +15,9 @@
     <p:sldId id="263" r:id="rId14"/>
     <p:sldId id="264" r:id="rId15"/>
     <p:sldId id="265" r:id="rId16"/>
+    <p:sldId id="266" r:id="rId17"/>
+    <p:sldId id="267" r:id="rId18"/>
+    <p:sldId id="268" r:id="rId19"/>
   </p:sldIdLst>
   <p:sldSz cx="12191695" cy="6858000" type="screen4x3"/>
   <p:notesSz cx="6858000" cy="9144000"/>
@@ -3364,6 +3367,2609 @@
                 </a:solidFill>
                 <a:latin typeface="Calibri"/>
               </a:rPr>
+              <a:t>CLOSING THE LOOP</a:t>
+            </a:r>
+          </a:p>
+          <a:p>
+            <a:pPr algn="l">
+              <a:spcAft>
+                <a:spcPts val="200"/>
+              </a:spcAft>
+            </a:pPr>
+            <a:r>
+              <a:rPr sz="3100" b="1" i="0">
+                <a:solidFill>
+                  <a:srgbClr val="102A2E"/>
+                </a:solidFill>
+                <a:latin typeface="Cambria"/>
+              </a:rPr>
+              <a:t>Measurement corrected the plan: v3.4.5</a:t>
+            </a:r>
+          </a:p>
+          <a:p>
+            <a:pPr algn="l">
+              <a:spcAft>
+                <a:spcPts val="0"/>
+              </a:spcAft>
+            </a:pPr>
+            <a:r>
+              <a:rPr sz="1300" b="0" i="0">
+                <a:solidFill>
+                  <a:srgbClr val="5B6B6B"/>
+                </a:solidFill>
+                <a:latin typeface="Calibri"/>
+              </a:rPr>
+              <a:t>Five plan routes were confidently matched to observed corridors — enough evidence to re-anchor their cycle times to measured bus physics.</a:t>
+            </a:r>
+          </a:p>
+        </p:txBody>
+      </p:sp>
+      <p:sp>
+        <p:nvSpPr>
+          <p:cNvPr id="4" name="TextBox 3"/>
+          <p:cNvSpPr txBox="1"/>
+          <p:nvPr/>
+        </p:nvSpPr>
+        <p:spPr>
+          <a:xfrm>
+            <a:off x="502920" y="1783080"/>
+            <a:ext cx="6675120" cy="365760"/>
+          </a:xfrm>
+          <a:prstGeom prst="rect">
+            <a:avLst/>
+          </a:prstGeom>
+          <a:noFill/>
+        </p:spPr>
+        <p:txBody>
+          <a:bodyPr wrap="square" lIns="0" rIns="0" tIns="0" bIns="0">
+            <a:spAutoFit/>
+          </a:bodyPr>
+          <a:lstStyle/>
+          <a:p>
+            <a:pPr algn="l">
+              <a:spcAft>
+                <a:spcPts val="400"/>
+              </a:spcAft>
+            </a:pPr>
+            <a:r>
+              <a:rPr sz="1450" b="1" i="0">
+                <a:solidFill>
+                  <a:srgbClr val="102A2E"/>
+                </a:solidFill>
+                <a:latin typeface="Cambria"/>
+              </a:rPr>
+              <a:t>Planned one-way time ÷ measured one-way time</a:t>
+            </a:r>
+          </a:p>
+        </p:txBody>
+      </p:sp>
+      <p:sp>
+        <p:nvSpPr>
+          <p:cNvPr id="5" name="Rounded Rectangle 4"/>
+          <p:cNvSpPr/>
+          <p:nvPr/>
+        </p:nvSpPr>
+        <p:spPr>
+          <a:xfrm>
+            <a:off x="502920" y="2240280"/>
+            <a:ext cx="6675120" cy="676656"/>
+          </a:xfrm>
+          <a:prstGeom prst="roundRect">
+            <a:avLst>
+              <a:gd name="adj" fmla="val 6000"/>
+            </a:avLst>
+          </a:prstGeom>
+          <a:solidFill>
+            <a:srgbClr val="E9F2EE"/>
+          </a:solidFill>
+          <a:ln>
+            <a:noFill/>
+          </a:ln>
+          <a:effectLst/>
+        </p:spPr>
+        <p:style>
+          <a:lnRef idx="1">
+            <a:schemeClr val="accent1"/>
+          </a:lnRef>
+          <a:fillRef idx="3">
+            <a:schemeClr val="accent1"/>
+          </a:fillRef>
+          <a:effectRef idx="2">
+            <a:schemeClr val="accent1"/>
+          </a:effectRef>
+          <a:fontRef idx="minor">
+            <a:schemeClr val="lt1"/>
+          </a:fontRef>
+        </p:style>
+        <p:txBody>
+          <a:bodyPr rtlCol="0" anchor="ctr"/>
+          <a:lstStyle/>
+          <a:p>
+            <a:pPr algn="ctr"/>
+          </a:p>
+        </p:txBody>
+      </p:sp>
+      <p:sp>
+        <p:nvSpPr>
+          <p:cNvPr id="6" name="TextBox 5"/>
+          <p:cNvSpPr txBox="1"/>
+          <p:nvPr/>
+        </p:nvSpPr>
+        <p:spPr>
+          <a:xfrm>
+            <a:off x="731520" y="2350008"/>
+            <a:ext cx="4206240" cy="457200"/>
+          </a:xfrm>
+          <a:prstGeom prst="rect">
+            <a:avLst/>
+          </a:prstGeom>
+          <a:noFill/>
+        </p:spPr>
+        <p:txBody>
+          <a:bodyPr wrap="square" lIns="0" rIns="0" tIns="0" bIns="0">
+            <a:spAutoFit/>
+          </a:bodyPr>
+          <a:lstStyle/>
+          <a:p>
+            <a:pPr algn="l">
+              <a:spcAft>
+                <a:spcPts val="0"/>
+              </a:spcAft>
+            </a:pPr>
+            <a:r>
+              <a:rPr sz="1200" b="1" i="0">
+                <a:solidFill>
+                  <a:srgbClr val="102A2E"/>
+                </a:solidFill>
+                <a:latin typeface="Calibri"/>
+              </a:rPr>
+              <a:t>Soura – Lal Chowk (FDR-050)</a:t>
+            </a:r>
+          </a:p>
+          <a:p>
+            <a:pPr algn="l">
+              <a:spcAft>
+                <a:spcPts val="0"/>
+              </a:spcAft>
+            </a:pPr>
+            <a:r>
+              <a:rPr sz="1000" b="0" i="0">
+                <a:solidFill>
+                  <a:srgbClr val="5B6B6B"/>
+                </a:solidFill>
+                <a:latin typeface="Calibri"/>
+              </a:rPr>
+              <a:t>211 runs observed</a:t>
+            </a:r>
+          </a:p>
+        </p:txBody>
+      </p:sp>
+      <p:sp>
+        <p:nvSpPr>
+          <p:cNvPr id="7" name="TextBox 6"/>
+          <p:cNvSpPr txBox="1"/>
+          <p:nvPr/>
+        </p:nvSpPr>
+        <p:spPr>
+          <a:xfrm>
+            <a:off x="5029200" y="2386584"/>
+            <a:ext cx="1005840" cy="411480"/>
+          </a:xfrm>
+          <a:prstGeom prst="rect">
+            <a:avLst/>
+          </a:prstGeom>
+          <a:noFill/>
+        </p:spPr>
+        <p:txBody>
+          <a:bodyPr wrap="square" lIns="0" rIns="0" tIns="0" bIns="0">
+            <a:spAutoFit/>
+          </a:bodyPr>
+          <a:lstStyle/>
+          <a:p>
+            <a:pPr algn="ctr">
+              <a:spcAft>
+                <a:spcPts val="0"/>
+              </a:spcAft>
+            </a:pPr>
+            <a:r>
+              <a:rPr sz="1600" b="1" i="0">
+                <a:solidFill>
+                  <a:srgbClr val="B0432F"/>
+                </a:solidFill>
+                <a:latin typeface="Cambria"/>
+              </a:rPr>
+              <a:t>0.50</a:t>
+            </a:r>
+          </a:p>
+        </p:txBody>
+      </p:sp>
+      <p:sp>
+        <p:nvSpPr>
+          <p:cNvPr id="8" name="TextBox 7"/>
+          <p:cNvSpPr txBox="1"/>
+          <p:nvPr/>
+        </p:nvSpPr>
+        <p:spPr>
+          <a:xfrm>
+            <a:off x="6126480" y="2386584"/>
+            <a:ext cx="914400" cy="411480"/>
+          </a:xfrm>
+          <a:prstGeom prst="rect">
+            <a:avLst/>
+          </a:prstGeom>
+          <a:noFill/>
+        </p:spPr>
+        <p:txBody>
+          <a:bodyPr wrap="square" lIns="0" rIns="0" tIns="0" bIns="0">
+            <a:spAutoFit/>
+          </a:bodyPr>
+          <a:lstStyle/>
+          <a:p>
+            <a:pPr algn="ctr">
+              <a:spcAft>
+                <a:spcPts val="0"/>
+              </a:spcAft>
+            </a:pPr>
+            <a:r>
+              <a:rPr sz="1300" b="1" i="0">
+                <a:solidFill>
+                  <a:srgbClr val="0F6E56"/>
+                </a:solidFill>
+                <a:latin typeface="Calibri"/>
+              </a:rPr>
+              <a:t>5 → 7</a:t>
+            </a:r>
+          </a:p>
+        </p:txBody>
+      </p:sp>
+      <p:sp>
+        <p:nvSpPr>
+          <p:cNvPr id="9" name="Rounded Rectangle 8"/>
+          <p:cNvSpPr/>
+          <p:nvPr/>
+        </p:nvSpPr>
+        <p:spPr>
+          <a:xfrm>
+            <a:off x="502920" y="3026664"/>
+            <a:ext cx="6675120" cy="676656"/>
+          </a:xfrm>
+          <a:prstGeom prst="roundRect">
+            <a:avLst>
+              <a:gd name="adj" fmla="val 6000"/>
+            </a:avLst>
+          </a:prstGeom>
+          <a:solidFill>
+            <a:srgbClr val="E9F2EE"/>
+          </a:solidFill>
+          <a:ln>
+            <a:noFill/>
+          </a:ln>
+          <a:effectLst/>
+        </p:spPr>
+        <p:style>
+          <a:lnRef idx="1">
+            <a:schemeClr val="accent1"/>
+          </a:lnRef>
+          <a:fillRef idx="3">
+            <a:schemeClr val="accent1"/>
+          </a:fillRef>
+          <a:effectRef idx="2">
+            <a:schemeClr val="accent1"/>
+          </a:effectRef>
+          <a:fontRef idx="minor">
+            <a:schemeClr val="lt1"/>
+          </a:fontRef>
+        </p:style>
+        <p:txBody>
+          <a:bodyPr rtlCol="0" anchor="ctr"/>
+          <a:lstStyle/>
+          <a:p>
+            <a:pPr algn="ctr"/>
+          </a:p>
+        </p:txBody>
+      </p:sp>
+      <p:sp>
+        <p:nvSpPr>
+          <p:cNvPr id="10" name="TextBox 9"/>
+          <p:cNvSpPr txBox="1"/>
+          <p:nvPr/>
+        </p:nvSpPr>
+        <p:spPr>
+          <a:xfrm>
+            <a:off x="731520" y="3136392"/>
+            <a:ext cx="4206240" cy="457200"/>
+          </a:xfrm>
+          <a:prstGeom prst="rect">
+            <a:avLst/>
+          </a:prstGeom>
+          <a:noFill/>
+        </p:spPr>
+        <p:txBody>
+          <a:bodyPr wrap="square" lIns="0" rIns="0" tIns="0" bIns="0">
+            <a:spAutoFit/>
+          </a:bodyPr>
+          <a:lstStyle/>
+          <a:p>
+            <a:pPr algn="l">
+              <a:spcAft>
+                <a:spcPts val="0"/>
+              </a:spcAft>
+            </a:pPr>
+            <a:r>
+              <a:rPr sz="1200" b="1" i="0">
+                <a:solidFill>
+                  <a:srgbClr val="102A2E"/>
+                </a:solidFill>
+                <a:latin typeface="Calibri"/>
+              </a:rPr>
+              <a:t>Soura – Railway Stn (FDR-262)</a:t>
+            </a:r>
+          </a:p>
+          <a:p>
+            <a:pPr algn="l">
+              <a:spcAft>
+                <a:spcPts val="0"/>
+              </a:spcAft>
+            </a:pPr>
+            <a:r>
+              <a:rPr sz="1000" b="0" i="0">
+                <a:solidFill>
+                  <a:srgbClr val="5B6B6B"/>
+                </a:solidFill>
+                <a:latin typeface="Calibri"/>
+              </a:rPr>
+              <a:t>93 runs observed</a:t>
+            </a:r>
+          </a:p>
+        </p:txBody>
+      </p:sp>
+      <p:sp>
+        <p:nvSpPr>
+          <p:cNvPr id="11" name="TextBox 10"/>
+          <p:cNvSpPr txBox="1"/>
+          <p:nvPr/>
+        </p:nvSpPr>
+        <p:spPr>
+          <a:xfrm>
+            <a:off x="5029200" y="3172968"/>
+            <a:ext cx="1005840" cy="411480"/>
+          </a:xfrm>
+          <a:prstGeom prst="rect">
+            <a:avLst/>
+          </a:prstGeom>
+          <a:noFill/>
+        </p:spPr>
+        <p:txBody>
+          <a:bodyPr wrap="square" lIns="0" rIns="0" tIns="0" bIns="0">
+            <a:spAutoFit/>
+          </a:bodyPr>
+          <a:lstStyle/>
+          <a:p>
+            <a:pPr algn="ctr">
+              <a:spcAft>
+                <a:spcPts val="0"/>
+              </a:spcAft>
+            </a:pPr>
+            <a:r>
+              <a:rPr sz="1600" b="1" i="0">
+                <a:solidFill>
+                  <a:srgbClr val="B0432F"/>
+                </a:solidFill>
+                <a:latin typeface="Cambria"/>
+              </a:rPr>
+              <a:t>0.55</a:t>
+            </a:r>
+          </a:p>
+        </p:txBody>
+      </p:sp>
+      <p:sp>
+        <p:nvSpPr>
+          <p:cNvPr id="12" name="TextBox 11"/>
+          <p:cNvSpPr txBox="1"/>
+          <p:nvPr/>
+        </p:nvSpPr>
+        <p:spPr>
+          <a:xfrm>
+            <a:off x="6126480" y="3172968"/>
+            <a:ext cx="914400" cy="411480"/>
+          </a:xfrm>
+          <a:prstGeom prst="rect">
+            <a:avLst/>
+          </a:prstGeom>
+          <a:noFill/>
+        </p:spPr>
+        <p:txBody>
+          <a:bodyPr wrap="square" lIns="0" rIns="0" tIns="0" bIns="0">
+            <a:spAutoFit/>
+          </a:bodyPr>
+          <a:lstStyle/>
+          <a:p>
+            <a:pPr algn="ctr">
+              <a:spcAft>
+                <a:spcPts val="0"/>
+              </a:spcAft>
+            </a:pPr>
+            <a:r>
+              <a:rPr sz="1300" b="1" i="0">
+                <a:solidFill>
+                  <a:srgbClr val="0F6E56"/>
+                </a:solidFill>
+                <a:latin typeface="Calibri"/>
+              </a:rPr>
+              <a:t>4 → 7</a:t>
+            </a:r>
+          </a:p>
+        </p:txBody>
+      </p:sp>
+      <p:sp>
+        <p:nvSpPr>
+          <p:cNvPr id="13" name="Rounded Rectangle 12"/>
+          <p:cNvSpPr/>
+          <p:nvPr/>
+        </p:nvSpPr>
+        <p:spPr>
+          <a:xfrm>
+            <a:off x="502920" y="3813048"/>
+            <a:ext cx="6675120" cy="676656"/>
+          </a:xfrm>
+          <a:prstGeom prst="roundRect">
+            <a:avLst>
+              <a:gd name="adj" fmla="val 6000"/>
+            </a:avLst>
+          </a:prstGeom>
+          <a:solidFill>
+            <a:srgbClr val="E9F2EE"/>
+          </a:solidFill>
+          <a:ln>
+            <a:noFill/>
+          </a:ln>
+          <a:effectLst/>
+        </p:spPr>
+        <p:style>
+          <a:lnRef idx="1">
+            <a:schemeClr val="accent1"/>
+          </a:lnRef>
+          <a:fillRef idx="3">
+            <a:schemeClr val="accent1"/>
+          </a:fillRef>
+          <a:effectRef idx="2">
+            <a:schemeClr val="accent1"/>
+          </a:effectRef>
+          <a:fontRef idx="minor">
+            <a:schemeClr val="lt1"/>
+          </a:fontRef>
+        </p:style>
+        <p:txBody>
+          <a:bodyPr rtlCol="0" anchor="ctr"/>
+          <a:lstStyle/>
+          <a:p>
+            <a:pPr algn="ctr"/>
+          </a:p>
+        </p:txBody>
+      </p:sp>
+      <p:sp>
+        <p:nvSpPr>
+          <p:cNvPr id="14" name="TextBox 13"/>
+          <p:cNvSpPr txBox="1"/>
+          <p:nvPr/>
+        </p:nvSpPr>
+        <p:spPr>
+          <a:xfrm>
+            <a:off x="731520" y="3922776"/>
+            <a:ext cx="4206240" cy="457200"/>
+          </a:xfrm>
+          <a:prstGeom prst="rect">
+            <a:avLst/>
+          </a:prstGeom>
+          <a:noFill/>
+        </p:spPr>
+        <p:txBody>
+          <a:bodyPr wrap="square" lIns="0" rIns="0" tIns="0" bIns="0">
+            <a:spAutoFit/>
+          </a:bodyPr>
+          <a:lstStyle/>
+          <a:p>
+            <a:pPr algn="l">
+              <a:spcAft>
+                <a:spcPts val="0"/>
+              </a:spcAft>
+            </a:pPr>
+            <a:r>
+              <a:rPr sz="1200" b="1" i="0">
+                <a:solidFill>
+                  <a:srgbClr val="102A2E"/>
+                </a:solidFill>
+                <a:latin typeface="Calibri"/>
+              </a:rPr>
+              <a:t>Srinagar – Pampore (FDR-370)</a:t>
+            </a:r>
+          </a:p>
+          <a:p>
+            <a:pPr algn="l">
+              <a:spcAft>
+                <a:spcPts val="0"/>
+              </a:spcAft>
+            </a:pPr>
+            <a:r>
+              <a:rPr sz="1000" b="0" i="0">
+                <a:solidFill>
+                  <a:srgbClr val="5B6B6B"/>
+                </a:solidFill>
+                <a:latin typeface="Calibri"/>
+              </a:rPr>
+              <a:t>79 runs observed</a:t>
+            </a:r>
+          </a:p>
+        </p:txBody>
+      </p:sp>
+      <p:sp>
+        <p:nvSpPr>
+          <p:cNvPr id="15" name="TextBox 14"/>
+          <p:cNvSpPr txBox="1"/>
+          <p:nvPr/>
+        </p:nvSpPr>
+        <p:spPr>
+          <a:xfrm>
+            <a:off x="5029200" y="3959352"/>
+            <a:ext cx="1005840" cy="411480"/>
+          </a:xfrm>
+          <a:prstGeom prst="rect">
+            <a:avLst/>
+          </a:prstGeom>
+          <a:noFill/>
+        </p:spPr>
+        <p:txBody>
+          <a:bodyPr wrap="square" lIns="0" rIns="0" tIns="0" bIns="0">
+            <a:spAutoFit/>
+          </a:bodyPr>
+          <a:lstStyle/>
+          <a:p>
+            <a:pPr algn="ctr">
+              <a:spcAft>
+                <a:spcPts val="0"/>
+              </a:spcAft>
+            </a:pPr>
+            <a:r>
+              <a:rPr sz="1600" b="1" i="0">
+                <a:solidFill>
+                  <a:srgbClr val="B0432F"/>
+                </a:solidFill>
+                <a:latin typeface="Cambria"/>
+              </a:rPr>
+              <a:t>0.51</a:t>
+            </a:r>
+          </a:p>
+        </p:txBody>
+      </p:sp>
+      <p:sp>
+        <p:nvSpPr>
+          <p:cNvPr id="16" name="TextBox 15"/>
+          <p:cNvSpPr txBox="1"/>
+          <p:nvPr/>
+        </p:nvSpPr>
+        <p:spPr>
+          <a:xfrm>
+            <a:off x="6126480" y="3959352"/>
+            <a:ext cx="914400" cy="411480"/>
+          </a:xfrm>
+          <a:prstGeom prst="rect">
+            <a:avLst/>
+          </a:prstGeom>
+          <a:noFill/>
+        </p:spPr>
+        <p:txBody>
+          <a:bodyPr wrap="square" lIns="0" rIns="0" tIns="0" bIns="0">
+            <a:spAutoFit/>
+          </a:bodyPr>
+          <a:lstStyle/>
+          <a:p>
+            <a:pPr algn="ctr">
+              <a:spcAft>
+                <a:spcPts val="0"/>
+              </a:spcAft>
+            </a:pPr>
+            <a:r>
+              <a:rPr sz="1300" b="1" i="0">
+                <a:solidFill>
+                  <a:srgbClr val="0F6E56"/>
+                </a:solidFill>
+                <a:latin typeface="Calibri"/>
+              </a:rPr>
+              <a:t>4 → 5</a:t>
+            </a:r>
+          </a:p>
+        </p:txBody>
+      </p:sp>
+      <p:sp>
+        <p:nvSpPr>
+          <p:cNvPr id="17" name="Rounded Rectangle 16"/>
+          <p:cNvSpPr/>
+          <p:nvPr/>
+        </p:nvSpPr>
+        <p:spPr>
+          <a:xfrm>
+            <a:off x="502920" y="4599432"/>
+            <a:ext cx="6675120" cy="676656"/>
+          </a:xfrm>
+          <a:prstGeom prst="roundRect">
+            <a:avLst>
+              <a:gd name="adj" fmla="val 6000"/>
+            </a:avLst>
+          </a:prstGeom>
+          <a:solidFill>
+            <a:srgbClr val="E9F2EE"/>
+          </a:solidFill>
+          <a:ln>
+            <a:noFill/>
+          </a:ln>
+          <a:effectLst/>
+        </p:spPr>
+        <p:style>
+          <a:lnRef idx="1">
+            <a:schemeClr val="accent1"/>
+          </a:lnRef>
+          <a:fillRef idx="3">
+            <a:schemeClr val="accent1"/>
+          </a:fillRef>
+          <a:effectRef idx="2">
+            <a:schemeClr val="accent1"/>
+          </a:effectRef>
+          <a:fontRef idx="minor">
+            <a:schemeClr val="lt1"/>
+          </a:fontRef>
+        </p:style>
+        <p:txBody>
+          <a:bodyPr rtlCol="0" anchor="ctr"/>
+          <a:lstStyle/>
+          <a:p>
+            <a:pPr algn="ctr"/>
+          </a:p>
+        </p:txBody>
+      </p:sp>
+      <p:sp>
+        <p:nvSpPr>
+          <p:cNvPr id="18" name="TextBox 17"/>
+          <p:cNvSpPr txBox="1"/>
+          <p:nvPr/>
+        </p:nvSpPr>
+        <p:spPr>
+          <a:xfrm>
+            <a:off x="731520" y="4709160"/>
+            <a:ext cx="4206240" cy="457200"/>
+          </a:xfrm>
+          <a:prstGeom prst="rect">
+            <a:avLst/>
+          </a:prstGeom>
+          <a:noFill/>
+        </p:spPr>
+        <p:txBody>
+          <a:bodyPr wrap="square" lIns="0" rIns="0" tIns="0" bIns="0">
+            <a:spAutoFit/>
+          </a:bodyPr>
+          <a:lstStyle/>
+          <a:p>
+            <a:pPr algn="l">
+              <a:spcAft>
+                <a:spcPts val="0"/>
+              </a:spcAft>
+            </a:pPr>
+            <a:r>
+              <a:rPr sz="1200" b="1" i="0">
+                <a:solidFill>
+                  <a:srgbClr val="102A2E"/>
+                </a:solidFill>
+                <a:latin typeface="Calibri"/>
+              </a:rPr>
+              <a:t>Soura – Qamarwari (FDR-270)</a:t>
+            </a:r>
+          </a:p>
+          <a:p>
+            <a:pPr algn="l">
+              <a:spcAft>
+                <a:spcPts val="0"/>
+              </a:spcAft>
+            </a:pPr>
+            <a:r>
+              <a:rPr sz="1000" b="0" i="0">
+                <a:solidFill>
+                  <a:srgbClr val="5B6B6B"/>
+                </a:solidFill>
+                <a:latin typeface="Calibri"/>
+              </a:rPr>
+              <a:t>47 runs observed</a:t>
+            </a:r>
+          </a:p>
+        </p:txBody>
+      </p:sp>
+      <p:sp>
+        <p:nvSpPr>
+          <p:cNvPr id="19" name="TextBox 18"/>
+          <p:cNvSpPr txBox="1"/>
+          <p:nvPr/>
+        </p:nvSpPr>
+        <p:spPr>
+          <a:xfrm>
+            <a:off x="5029200" y="4745736"/>
+            <a:ext cx="1005840" cy="411480"/>
+          </a:xfrm>
+          <a:prstGeom prst="rect">
+            <a:avLst/>
+          </a:prstGeom>
+          <a:noFill/>
+        </p:spPr>
+        <p:txBody>
+          <a:bodyPr wrap="square" lIns="0" rIns="0" tIns="0" bIns="0">
+            <a:spAutoFit/>
+          </a:bodyPr>
+          <a:lstStyle/>
+          <a:p>
+            <a:pPr algn="ctr">
+              <a:spcAft>
+                <a:spcPts val="0"/>
+              </a:spcAft>
+            </a:pPr>
+            <a:r>
+              <a:rPr sz="1600" b="1" i="0">
+                <a:solidFill>
+                  <a:srgbClr val="B0432F"/>
+                </a:solidFill>
+                <a:latin typeface="Cambria"/>
+              </a:rPr>
+              <a:t>0.58</a:t>
+            </a:r>
+          </a:p>
+        </p:txBody>
+      </p:sp>
+      <p:sp>
+        <p:nvSpPr>
+          <p:cNvPr id="20" name="TextBox 19"/>
+          <p:cNvSpPr txBox="1"/>
+          <p:nvPr/>
+        </p:nvSpPr>
+        <p:spPr>
+          <a:xfrm>
+            <a:off x="6126480" y="4745736"/>
+            <a:ext cx="914400" cy="411480"/>
+          </a:xfrm>
+          <a:prstGeom prst="rect">
+            <a:avLst/>
+          </a:prstGeom>
+          <a:noFill/>
+        </p:spPr>
+        <p:txBody>
+          <a:bodyPr wrap="square" lIns="0" rIns="0" tIns="0" bIns="0">
+            <a:spAutoFit/>
+          </a:bodyPr>
+          <a:lstStyle/>
+          <a:p>
+            <a:pPr algn="ctr">
+              <a:spcAft>
+                <a:spcPts val="0"/>
+              </a:spcAft>
+            </a:pPr>
+            <a:r>
+              <a:rPr sz="1300" b="1" i="0">
+                <a:solidFill>
+                  <a:srgbClr val="0F6E56"/>
+                </a:solidFill>
+                <a:latin typeface="Calibri"/>
+              </a:rPr>
+              <a:t>4 → 5</a:t>
+            </a:r>
+          </a:p>
+        </p:txBody>
+      </p:sp>
+      <p:sp>
+        <p:nvSpPr>
+          <p:cNvPr id="21" name="Rounded Rectangle 20"/>
+          <p:cNvSpPr/>
+          <p:nvPr/>
+        </p:nvSpPr>
+        <p:spPr>
+          <a:xfrm>
+            <a:off x="502920" y="5385816"/>
+            <a:ext cx="6675120" cy="676656"/>
+          </a:xfrm>
+          <a:prstGeom prst="roundRect">
+            <a:avLst>
+              <a:gd name="adj" fmla="val 6000"/>
+            </a:avLst>
+          </a:prstGeom>
+          <a:solidFill>
+            <a:srgbClr val="E9F2EE"/>
+          </a:solidFill>
+          <a:ln>
+            <a:noFill/>
+          </a:ln>
+          <a:effectLst/>
+        </p:spPr>
+        <p:style>
+          <a:lnRef idx="1">
+            <a:schemeClr val="accent1"/>
+          </a:lnRef>
+          <a:fillRef idx="3">
+            <a:schemeClr val="accent1"/>
+          </a:fillRef>
+          <a:effectRef idx="2">
+            <a:schemeClr val="accent1"/>
+          </a:effectRef>
+          <a:fontRef idx="minor">
+            <a:schemeClr val="lt1"/>
+          </a:fontRef>
+        </p:style>
+        <p:txBody>
+          <a:bodyPr rtlCol="0" anchor="ctr"/>
+          <a:lstStyle/>
+          <a:p>
+            <a:pPr algn="ctr"/>
+          </a:p>
+        </p:txBody>
+      </p:sp>
+      <p:sp>
+        <p:nvSpPr>
+          <p:cNvPr id="22" name="TextBox 21"/>
+          <p:cNvSpPr txBox="1"/>
+          <p:nvPr/>
+        </p:nvSpPr>
+        <p:spPr>
+          <a:xfrm>
+            <a:off x="731520" y="5495544"/>
+            <a:ext cx="4206240" cy="457200"/>
+          </a:xfrm>
+          <a:prstGeom prst="rect">
+            <a:avLst/>
+          </a:prstGeom>
+          <a:noFill/>
+        </p:spPr>
+        <p:txBody>
+          <a:bodyPr wrap="square" lIns="0" rIns="0" tIns="0" bIns="0">
+            <a:spAutoFit/>
+          </a:bodyPr>
+          <a:lstStyle/>
+          <a:p>
+            <a:pPr algn="l">
+              <a:spcAft>
+                <a:spcPts val="0"/>
+              </a:spcAft>
+            </a:pPr>
+            <a:r>
+              <a:rPr sz="1200" b="1" i="0">
+                <a:solidFill>
+                  <a:srgbClr val="102A2E"/>
+                </a:solidFill>
+                <a:latin typeface="Calibri"/>
+              </a:rPr>
+              <a:t>Safakadal – Jehangir Chowk (FDR-575)</a:t>
+            </a:r>
+          </a:p>
+          <a:p>
+            <a:pPr algn="l">
+              <a:spcAft>
+                <a:spcPts val="0"/>
+              </a:spcAft>
+            </a:pPr>
+            <a:r>
+              <a:rPr sz="1000" b="0" i="0">
+                <a:solidFill>
+                  <a:srgbClr val="5B6B6B"/>
+                </a:solidFill>
+                <a:latin typeface="Calibri"/>
+              </a:rPr>
+              <a:t>40 runs observed</a:t>
+            </a:r>
+          </a:p>
+        </p:txBody>
+      </p:sp>
+      <p:sp>
+        <p:nvSpPr>
+          <p:cNvPr id="23" name="TextBox 22"/>
+          <p:cNvSpPr txBox="1"/>
+          <p:nvPr/>
+        </p:nvSpPr>
+        <p:spPr>
+          <a:xfrm>
+            <a:off x="5029200" y="5532120"/>
+            <a:ext cx="1005840" cy="411480"/>
+          </a:xfrm>
+          <a:prstGeom prst="rect">
+            <a:avLst/>
+          </a:prstGeom>
+          <a:noFill/>
+        </p:spPr>
+        <p:txBody>
+          <a:bodyPr wrap="square" lIns="0" rIns="0" tIns="0" bIns="0">
+            <a:spAutoFit/>
+          </a:bodyPr>
+          <a:lstStyle/>
+          <a:p>
+            <a:pPr algn="ctr">
+              <a:spcAft>
+                <a:spcPts val="0"/>
+              </a:spcAft>
+            </a:pPr>
+            <a:r>
+              <a:rPr sz="1600" b="1" i="0">
+                <a:solidFill>
+                  <a:srgbClr val="B0432F"/>
+                </a:solidFill>
+                <a:latin typeface="Cambria"/>
+              </a:rPr>
+              <a:t>0.47</a:t>
+            </a:r>
+          </a:p>
+        </p:txBody>
+      </p:sp>
+      <p:sp>
+        <p:nvSpPr>
+          <p:cNvPr id="24" name="TextBox 23"/>
+          <p:cNvSpPr txBox="1"/>
+          <p:nvPr/>
+        </p:nvSpPr>
+        <p:spPr>
+          <a:xfrm>
+            <a:off x="6126480" y="5532120"/>
+            <a:ext cx="914400" cy="411480"/>
+          </a:xfrm>
+          <a:prstGeom prst="rect">
+            <a:avLst/>
+          </a:prstGeom>
+          <a:noFill/>
+        </p:spPr>
+        <p:txBody>
+          <a:bodyPr wrap="square" lIns="0" rIns="0" tIns="0" bIns="0">
+            <a:spAutoFit/>
+          </a:bodyPr>
+          <a:lstStyle/>
+          <a:p>
+            <a:pPr algn="ctr">
+              <a:spcAft>
+                <a:spcPts val="0"/>
+              </a:spcAft>
+            </a:pPr>
+            <a:r>
+              <a:rPr sz="1300" b="1" i="0">
+                <a:solidFill>
+                  <a:srgbClr val="0F6E56"/>
+                </a:solidFill>
+                <a:latin typeface="Calibri"/>
+              </a:rPr>
+              <a:t>3 → 3</a:t>
+            </a:r>
+          </a:p>
+        </p:txBody>
+      </p:sp>
+      <p:sp>
+        <p:nvSpPr>
+          <p:cNvPr id="25" name="Rounded Rectangle 24"/>
+          <p:cNvSpPr/>
+          <p:nvPr/>
+        </p:nvSpPr>
+        <p:spPr>
+          <a:xfrm>
+            <a:off x="7498079" y="1783080"/>
+            <a:ext cx="4160520" cy="4434840"/>
+          </a:xfrm>
+          <a:prstGeom prst="roundRect">
+            <a:avLst>
+              <a:gd name="adj" fmla="val 6000"/>
+            </a:avLst>
+          </a:prstGeom>
+          <a:solidFill>
+            <a:srgbClr val="0A3D33"/>
+          </a:solidFill>
+          <a:ln>
+            <a:noFill/>
+          </a:ln>
+          <a:effectLst/>
+        </p:spPr>
+        <p:style>
+          <a:lnRef idx="1">
+            <a:schemeClr val="accent1"/>
+          </a:lnRef>
+          <a:fillRef idx="3">
+            <a:schemeClr val="accent1"/>
+          </a:fillRef>
+          <a:effectRef idx="2">
+            <a:schemeClr val="accent1"/>
+          </a:effectRef>
+          <a:fontRef idx="minor">
+            <a:schemeClr val="lt1"/>
+          </a:fontRef>
+        </p:style>
+        <p:txBody>
+          <a:bodyPr rtlCol="0" anchor="ctr"/>
+          <a:lstStyle/>
+          <a:p>
+            <a:pPr algn="ctr"/>
+          </a:p>
+        </p:txBody>
+      </p:sp>
+      <p:sp>
+        <p:nvSpPr>
+          <p:cNvPr id="26" name="TextBox 25"/>
+          <p:cNvSpPr txBox="1"/>
+          <p:nvPr/>
+        </p:nvSpPr>
+        <p:spPr>
+          <a:xfrm>
+            <a:off x="7772400" y="2011680"/>
+            <a:ext cx="3611880" cy="4023360"/>
+          </a:xfrm>
+          <a:prstGeom prst="rect">
+            <a:avLst/>
+          </a:prstGeom>
+          <a:noFill/>
+        </p:spPr>
+        <p:txBody>
+          <a:bodyPr wrap="square" lIns="0" rIns="0" tIns="0" bIns="0">
+            <a:spAutoFit/>
+          </a:bodyPr>
+          <a:lstStyle/>
+          <a:p>
+            <a:pPr algn="l">
+              <a:spcAft>
+                <a:spcPts val="600"/>
+              </a:spcAft>
+            </a:pPr>
+            <a:r>
+              <a:rPr sz="1500" b="1" i="0">
+                <a:solidFill>
+                  <a:srgbClr val="FFFFFF"/>
+                </a:solidFill>
+                <a:latin typeface="Cambria"/>
+              </a:rPr>
+              <a:t>What was hiding it</a:t>
+            </a:r>
+          </a:p>
+          <a:p>
+            <a:pPr algn="l">
+              <a:spcAft>
+                <a:spcPts val="800"/>
+              </a:spcAft>
+            </a:pPr>
+            <a:r>
+              <a:rPr sz="1200" b="0" i="0">
+                <a:solidFill>
+                  <a:srgbClr val="D5E8DF"/>
+                </a:solidFill>
+                <a:latin typeface="Calibri"/>
+              </a:rPr>
+              <a:t>4 of the 5 routes were pinned at the engine's per-km cycle CAP — a safety heuristic that quietly clamped their cycle times below what buses measurably need.</a:t>
+            </a:r>
+          </a:p>
+          <a:p>
+            <a:pPr algn="l">
+              <a:spcAft>
+                <a:spcPts val="1000"/>
+              </a:spcAft>
+            </a:pPr>
+            <a:r>
+              <a:rPr sz="1200" b="0" i="0">
+                <a:solidFill>
+                  <a:srgbClr val="D5E8DF"/>
+                </a:solidFill>
+                <a:latin typeface="Calibri"/>
+              </a:rPr>
+              <a:t>The fix: on directly-measured corridors, the measured moving speed replaces the car-model estimate, and the cap no longer clamps. Only those 5 routes changed.</a:t>
+            </a:r>
+          </a:p>
+          <a:p>
+            <a:pPr algn="l">
+              <a:spcAft>
+                <a:spcPts val="200"/>
+              </a:spcAft>
+            </a:pPr>
+            <a:r>
+              <a:rPr sz="2400" b="1" i="0">
+                <a:solidFill>
+                  <a:srgbClr val="FFFFFF"/>
+                </a:solidFill>
+                <a:latin typeface="Cambria"/>
+              </a:rPr>
+              <a:t>Fleet 1,004 → 1,011</a:t>
+            </a:r>
+          </a:p>
+          <a:p>
+            <a:pPr algn="l">
+              <a:spcAft>
+                <a:spcPts val="0"/>
+              </a:spcAft>
+            </a:pPr>
+            <a:r>
+              <a:rPr sz="1150" b="0" i="0">
+                <a:solidFill>
+                  <a:srgbClr val="9FBFB3"/>
+                </a:solidFill>
+                <a:latin typeface="Calibri"/>
+              </a:rPr>
+              <a:t>+7 buses, all on GPS-verified core corridors</a:t>
+            </a:r>
+          </a:p>
+        </p:txBody>
+      </p:sp>
+    </p:spTree>
+  </p:cSld>
+  <p:clrMapOvr>
+    <a:masterClrMapping/>
+  </p:clrMapOvr>
+</p:sld>
+</file>
+
+<file path=ppt/slides/slide11.xml><?xml version="1.0" encoding="utf-8"?>
+<p:sld xmlns:a="http://schemas.openxmlformats.org/drawingml/2006/main" xmlns:p="http://schemas.openxmlformats.org/presentationml/2006/main" xmlns:r="http://schemas.openxmlformats.org/officeDocument/2006/relationships">
+  <p:cSld>
+    <p:spTree>
+      <p:nvGrpSpPr>
+        <p:cNvPr id="1" name=""/>
+        <p:cNvGrpSpPr/>
+        <p:nvPr/>
+      </p:nvGrpSpPr>
+      <p:grpSpPr/>
+      <p:sp>
+        <p:nvSpPr>
+          <p:cNvPr id="2" name="Rectangle 1"/>
+          <p:cNvSpPr/>
+          <p:nvPr/>
+        </p:nvSpPr>
+        <p:spPr>
+          <a:xfrm>
+            <a:off x="0" y="0"/>
+            <a:ext cx="12191695" cy="6858000"/>
+          </a:xfrm>
+          <a:prstGeom prst="rect">
+            <a:avLst/>
+          </a:prstGeom>
+          <a:solidFill>
+            <a:srgbClr val="FFFFFF"/>
+          </a:solidFill>
+          <a:ln>
+            <a:noFill/>
+          </a:ln>
+          <a:effectLst/>
+        </p:spPr>
+        <p:style>
+          <a:lnRef idx="1">
+            <a:schemeClr val="accent1"/>
+          </a:lnRef>
+          <a:fillRef idx="3">
+            <a:schemeClr val="accent1"/>
+          </a:fillRef>
+          <a:effectRef idx="2">
+            <a:schemeClr val="accent1"/>
+          </a:effectRef>
+          <a:fontRef idx="minor">
+            <a:schemeClr val="lt1"/>
+          </a:fontRef>
+        </p:style>
+        <p:txBody>
+          <a:bodyPr rtlCol="0" anchor="ctr"/>
+          <a:lstStyle/>
+          <a:p>
+            <a:pPr algn="ctr"/>
+          </a:p>
+        </p:txBody>
+      </p:sp>
+      <p:sp>
+        <p:nvSpPr>
+          <p:cNvPr id="3" name="TextBox 2"/>
+          <p:cNvSpPr txBox="1"/>
+          <p:nvPr/>
+        </p:nvSpPr>
+        <p:spPr>
+          <a:xfrm>
+            <a:off x="502920" y="292608"/>
+            <a:ext cx="11155680" cy="1188720"/>
+          </a:xfrm>
+          <a:prstGeom prst="rect">
+            <a:avLst/>
+          </a:prstGeom>
+          <a:noFill/>
+        </p:spPr>
+        <p:txBody>
+          <a:bodyPr wrap="square" lIns="0" rIns="0" tIns="0" bIns="0">
+            <a:spAutoFit/>
+          </a:bodyPr>
+          <a:lstStyle/>
+          <a:p>
+            <a:pPr algn="l">
+              <a:spcAft>
+                <a:spcPts val="400"/>
+              </a:spcAft>
+            </a:pPr>
+            <a:r>
+              <a:rPr sz="1200" b="1" i="0">
+                <a:solidFill>
+                  <a:srgbClr val="0F6E56"/>
+                </a:solidFill>
+                <a:latin typeface="Calibri"/>
+              </a:rPr>
+              <a:t>BONUS LAYER</a:t>
+            </a:r>
+          </a:p>
+          <a:p>
+            <a:pPr algn="l">
+              <a:spcAft>
+                <a:spcPts val="200"/>
+              </a:spcAft>
+            </a:pPr>
+            <a:r>
+              <a:rPr sz="3100" b="1" i="0">
+                <a:solidFill>
+                  <a:srgbClr val="102A2E"/>
+                </a:solidFill>
+                <a:latin typeface="Cambria"/>
+              </a:rPr>
+              <a:t>An evidence-based stop inventory</a:t>
+            </a:r>
+          </a:p>
+          <a:p>
+            <a:pPr algn="l">
+              <a:spcAft>
+                <a:spcPts val="0"/>
+              </a:spcAft>
+            </a:pPr>
+            <a:r>
+              <a:rPr sz="1300" b="0" i="0">
+                <a:solidFill>
+                  <a:srgbClr val="5B6B6B"/>
+                </a:solidFill>
+                <a:latin typeface="Calibri"/>
+              </a:rPr>
+              <a:t>Every 40 s – 12 min dwell is a vote for a real stopping place. Clustered, they map where buses actually stop.</a:t>
+            </a:r>
+          </a:p>
+        </p:txBody>
+      </p:sp>
+      <p:sp>
+        <p:nvSpPr>
+          <p:cNvPr id="4" name="Rounded Rectangle 3"/>
+          <p:cNvSpPr/>
+          <p:nvPr/>
+        </p:nvSpPr>
+        <p:spPr>
+          <a:xfrm>
+            <a:off x="502920" y="1691640"/>
+            <a:ext cx="3154680" cy="1481328"/>
+          </a:xfrm>
+          <a:prstGeom prst="roundRect">
+            <a:avLst>
+              <a:gd name="adj" fmla="val 6000"/>
+            </a:avLst>
+          </a:prstGeom>
+          <a:solidFill>
+            <a:srgbClr val="E9F2EE"/>
+          </a:solidFill>
+          <a:ln>
+            <a:noFill/>
+          </a:ln>
+          <a:effectLst/>
+        </p:spPr>
+        <p:style>
+          <a:lnRef idx="1">
+            <a:schemeClr val="accent1"/>
+          </a:lnRef>
+          <a:fillRef idx="3">
+            <a:schemeClr val="accent1"/>
+          </a:fillRef>
+          <a:effectRef idx="2">
+            <a:schemeClr val="accent1"/>
+          </a:effectRef>
+          <a:fontRef idx="minor">
+            <a:schemeClr val="lt1"/>
+          </a:fontRef>
+        </p:style>
+        <p:txBody>
+          <a:bodyPr rtlCol="0" anchor="ctr"/>
+          <a:lstStyle/>
+          <a:p>
+            <a:pPr algn="ctr"/>
+          </a:p>
+        </p:txBody>
+      </p:sp>
+      <p:sp>
+        <p:nvSpPr>
+          <p:cNvPr id="5" name="TextBox 4"/>
+          <p:cNvSpPr txBox="1"/>
+          <p:nvPr/>
+        </p:nvSpPr>
+        <p:spPr>
+          <a:xfrm>
+            <a:off x="667512" y="1819656"/>
+            <a:ext cx="2825496" cy="1243584"/>
+          </a:xfrm>
+          <a:prstGeom prst="rect">
+            <a:avLst/>
+          </a:prstGeom>
+          <a:noFill/>
+        </p:spPr>
+        <p:txBody>
+          <a:bodyPr wrap="square" lIns="0" rIns="0" tIns="0" bIns="0">
+            <a:spAutoFit/>
+          </a:bodyPr>
+          <a:lstStyle/>
+          <a:p>
+            <a:pPr algn="l">
+              <a:spcAft>
+                <a:spcPts val="400"/>
+              </a:spcAft>
+            </a:pPr>
+            <a:r>
+              <a:rPr sz="3000" b="1" i="0">
+                <a:solidFill>
+                  <a:srgbClr val="0F6E56"/>
+                </a:solidFill>
+                <a:latin typeface="Cambria"/>
+              </a:rPr>
+              <a:t>352</a:t>
+            </a:r>
+          </a:p>
+          <a:p>
+            <a:pPr algn="l">
+              <a:spcAft>
+                <a:spcPts val="400"/>
+              </a:spcAft>
+            </a:pPr>
+            <a:r>
+              <a:rPr sz="1250" b="1" i="0">
+                <a:solidFill>
+                  <a:srgbClr val="102A2E"/>
+                </a:solidFill>
+                <a:latin typeface="Calibri"/>
+              </a:rPr>
+              <a:t>candidate stops</a:t>
+            </a:r>
+          </a:p>
+          <a:p>
+            <a:pPr algn="l">
+              <a:spcAft>
+                <a:spcPts val="0"/>
+              </a:spcAft>
+            </a:pPr>
+            <a:r>
+              <a:rPr sz="1000" b="0" i="0">
+                <a:solidFill>
+                  <a:srgbClr val="5B6B6B"/>
+                </a:solidFill>
+                <a:latin typeface="Calibri"/>
+              </a:rPr>
+              <a:t>from 38,431 observed dwell events</a:t>
+            </a:r>
+          </a:p>
+        </p:txBody>
+      </p:sp>
+      <p:sp>
+        <p:nvSpPr>
+          <p:cNvPr id="6" name="Rounded Rectangle 5"/>
+          <p:cNvSpPr/>
+          <p:nvPr/>
+        </p:nvSpPr>
+        <p:spPr>
+          <a:xfrm>
+            <a:off x="3840480" y="1691640"/>
+            <a:ext cx="3154680" cy="1481328"/>
+          </a:xfrm>
+          <a:prstGeom prst="roundRect">
+            <a:avLst>
+              <a:gd name="adj" fmla="val 6000"/>
+            </a:avLst>
+          </a:prstGeom>
+          <a:solidFill>
+            <a:srgbClr val="E9F2EE"/>
+          </a:solidFill>
+          <a:ln>
+            <a:noFill/>
+          </a:ln>
+          <a:effectLst/>
+        </p:spPr>
+        <p:style>
+          <a:lnRef idx="1">
+            <a:schemeClr val="accent1"/>
+          </a:lnRef>
+          <a:fillRef idx="3">
+            <a:schemeClr val="accent1"/>
+          </a:fillRef>
+          <a:effectRef idx="2">
+            <a:schemeClr val="accent1"/>
+          </a:effectRef>
+          <a:fontRef idx="minor">
+            <a:schemeClr val="lt1"/>
+          </a:fontRef>
+        </p:style>
+        <p:txBody>
+          <a:bodyPr rtlCol="0" anchor="ctr"/>
+          <a:lstStyle/>
+          <a:p>
+            <a:pPr algn="ctr"/>
+          </a:p>
+        </p:txBody>
+      </p:sp>
+      <p:sp>
+        <p:nvSpPr>
+          <p:cNvPr id="7" name="TextBox 6"/>
+          <p:cNvSpPr txBox="1"/>
+          <p:nvPr/>
+        </p:nvSpPr>
+        <p:spPr>
+          <a:xfrm>
+            <a:off x="4005072" y="1819656"/>
+            <a:ext cx="2825496" cy="1243584"/>
+          </a:xfrm>
+          <a:prstGeom prst="rect">
+            <a:avLst/>
+          </a:prstGeom>
+          <a:noFill/>
+        </p:spPr>
+        <p:txBody>
+          <a:bodyPr wrap="square" lIns="0" rIns="0" tIns="0" bIns="0">
+            <a:spAutoFit/>
+          </a:bodyPr>
+          <a:lstStyle/>
+          <a:p>
+            <a:pPr algn="l">
+              <a:spcAft>
+                <a:spcPts val="400"/>
+              </a:spcAft>
+            </a:pPr>
+            <a:r>
+              <a:rPr sz="3000" b="1" i="0">
+                <a:solidFill>
+                  <a:srgbClr val="0F6E56"/>
+                </a:solidFill>
+                <a:latin typeface="Cambria"/>
+              </a:rPr>
+              <a:t>215</a:t>
+            </a:r>
+          </a:p>
+          <a:p>
+            <a:pPr algn="l">
+              <a:spcAft>
+                <a:spcPts val="400"/>
+              </a:spcAft>
+            </a:pPr>
+            <a:r>
+              <a:rPr sz="1250" b="1" i="0">
+                <a:solidFill>
+                  <a:srgbClr val="102A2E"/>
+                </a:solidFill>
+                <a:latin typeface="Calibri"/>
+              </a:rPr>
+              <a:t>strong stops</a:t>
+            </a:r>
+          </a:p>
+          <a:p>
+            <a:pPr algn="l">
+              <a:spcAft>
+                <a:spcPts val="0"/>
+              </a:spcAft>
+            </a:pPr>
+            <a:r>
+              <a:rPr sz="1000" b="0" i="0">
+                <a:solidFill>
+                  <a:srgbClr val="5B6B6B"/>
+                </a:solidFill>
+                <a:latin typeface="Calibri"/>
+              </a:rPr>
+              <a:t>≥3 distinct drivers and ≥10 visits</a:t>
+            </a:r>
+          </a:p>
+        </p:txBody>
+      </p:sp>
+      <p:sp>
+        <p:nvSpPr>
+          <p:cNvPr id="8" name="Rounded Rectangle 7"/>
+          <p:cNvSpPr/>
+          <p:nvPr/>
+        </p:nvSpPr>
+        <p:spPr>
+          <a:xfrm>
+            <a:off x="502920" y="3310128"/>
+            <a:ext cx="3154680" cy="1481328"/>
+          </a:xfrm>
+          <a:prstGeom prst="roundRect">
+            <a:avLst>
+              <a:gd name="adj" fmla="val 6000"/>
+            </a:avLst>
+          </a:prstGeom>
+          <a:solidFill>
+            <a:srgbClr val="E9F2EE"/>
+          </a:solidFill>
+          <a:ln>
+            <a:noFill/>
+          </a:ln>
+          <a:effectLst/>
+        </p:spPr>
+        <p:style>
+          <a:lnRef idx="1">
+            <a:schemeClr val="accent1"/>
+          </a:lnRef>
+          <a:fillRef idx="3">
+            <a:schemeClr val="accent1"/>
+          </a:fillRef>
+          <a:effectRef idx="2">
+            <a:schemeClr val="accent1"/>
+          </a:effectRef>
+          <a:fontRef idx="minor">
+            <a:schemeClr val="lt1"/>
+          </a:fontRef>
+        </p:style>
+        <p:txBody>
+          <a:bodyPr rtlCol="0" anchor="ctr"/>
+          <a:lstStyle/>
+          <a:p>
+            <a:pPr algn="ctr"/>
+          </a:p>
+        </p:txBody>
+      </p:sp>
+      <p:sp>
+        <p:nvSpPr>
+          <p:cNvPr id="9" name="TextBox 8"/>
+          <p:cNvSpPr txBox="1"/>
+          <p:nvPr/>
+        </p:nvSpPr>
+        <p:spPr>
+          <a:xfrm>
+            <a:off x="667512" y="3438144"/>
+            <a:ext cx="2825496" cy="1243584"/>
+          </a:xfrm>
+          <a:prstGeom prst="rect">
+            <a:avLst/>
+          </a:prstGeom>
+          <a:noFill/>
+        </p:spPr>
+        <p:txBody>
+          <a:bodyPr wrap="square" lIns="0" rIns="0" tIns="0" bIns="0">
+            <a:spAutoFit/>
+          </a:bodyPr>
+          <a:lstStyle/>
+          <a:p>
+            <a:pPr algn="l">
+              <a:spcAft>
+                <a:spcPts val="400"/>
+              </a:spcAft>
+            </a:pPr>
+            <a:r>
+              <a:rPr sz="3000" b="1" i="0">
+                <a:solidFill>
+                  <a:srgbClr val="0F6E56"/>
+                </a:solidFill>
+                <a:latin typeface="Cambria"/>
+              </a:rPr>
+              <a:t>30%</a:t>
+            </a:r>
+          </a:p>
+          <a:p>
+            <a:pPr algn="l">
+              <a:spcAft>
+                <a:spcPts val="400"/>
+              </a:spcAft>
+            </a:pPr>
+            <a:r>
+              <a:rPr sz="1250" b="1" i="0">
+                <a:solidFill>
+                  <a:srgbClr val="102A2E"/>
+                </a:solidFill>
+                <a:latin typeface="Calibri"/>
+              </a:rPr>
+              <a:t>register corroboration</a:t>
+            </a:r>
+          </a:p>
+          <a:p>
+            <a:pPr algn="l">
+              <a:spcAft>
+                <a:spcPts val="0"/>
+              </a:spcAft>
+            </a:pPr>
+            <a:r>
+              <a:rPr sz="1000" b="0" i="0">
+                <a:solidFill>
+                  <a:srgbClr val="5B6B6B"/>
+                </a:solidFill>
+                <a:latin typeface="Calibri"/>
+              </a:rPr>
+              <a:t>of official stops in the observed footprint</a:t>
+            </a:r>
+          </a:p>
+        </p:txBody>
+      </p:sp>
+      <p:sp>
+        <p:nvSpPr>
+          <p:cNvPr id="10" name="Rounded Rectangle 9"/>
+          <p:cNvSpPr/>
+          <p:nvPr/>
+        </p:nvSpPr>
+        <p:spPr>
+          <a:xfrm>
+            <a:off x="3840480" y="3310128"/>
+            <a:ext cx="3154680" cy="1481328"/>
+          </a:xfrm>
+          <a:prstGeom prst="roundRect">
+            <a:avLst>
+              <a:gd name="adj" fmla="val 6000"/>
+            </a:avLst>
+          </a:prstGeom>
+          <a:solidFill>
+            <a:srgbClr val="E9F2EE"/>
+          </a:solidFill>
+          <a:ln>
+            <a:noFill/>
+          </a:ln>
+          <a:effectLst/>
+        </p:spPr>
+        <p:style>
+          <a:lnRef idx="1">
+            <a:schemeClr val="accent1"/>
+          </a:lnRef>
+          <a:fillRef idx="3">
+            <a:schemeClr val="accent1"/>
+          </a:fillRef>
+          <a:effectRef idx="2">
+            <a:schemeClr val="accent1"/>
+          </a:effectRef>
+          <a:fontRef idx="minor">
+            <a:schemeClr val="lt1"/>
+          </a:fontRef>
+        </p:style>
+        <p:txBody>
+          <a:bodyPr rtlCol="0" anchor="ctr"/>
+          <a:lstStyle/>
+          <a:p>
+            <a:pPr algn="ctr"/>
+          </a:p>
+        </p:txBody>
+      </p:sp>
+      <p:sp>
+        <p:nvSpPr>
+          <p:cNvPr id="11" name="TextBox 10"/>
+          <p:cNvSpPr txBox="1"/>
+          <p:nvPr/>
+        </p:nvSpPr>
+        <p:spPr>
+          <a:xfrm>
+            <a:off x="4005072" y="3438144"/>
+            <a:ext cx="2825496" cy="1243584"/>
+          </a:xfrm>
+          <a:prstGeom prst="rect">
+            <a:avLst/>
+          </a:prstGeom>
+          <a:noFill/>
+        </p:spPr>
+        <p:txBody>
+          <a:bodyPr wrap="square" lIns="0" rIns="0" tIns="0" bIns="0">
+            <a:spAutoFit/>
+          </a:bodyPr>
+          <a:lstStyle/>
+          <a:p>
+            <a:pPr algn="l">
+              <a:spcAft>
+                <a:spcPts val="400"/>
+              </a:spcAft>
+            </a:pPr>
+            <a:r>
+              <a:rPr sz="3000" b="1" i="0">
+                <a:solidFill>
+                  <a:srgbClr val="0F6E56"/>
+                </a:solidFill>
+                <a:latin typeface="Cambria"/>
+              </a:rPr>
+              <a:t>135</a:t>
+            </a:r>
+          </a:p>
+          <a:p>
+            <a:pPr algn="l">
+              <a:spcAft>
+                <a:spcPts val="400"/>
+              </a:spcAft>
+            </a:pPr>
+            <a:r>
+              <a:rPr sz="1250" b="1" i="0">
+                <a:solidFill>
+                  <a:srgbClr val="102A2E"/>
+                </a:solidFill>
+                <a:latin typeface="Calibri"/>
+              </a:rPr>
+              <a:t>enrichment candidates</a:t>
+            </a:r>
+          </a:p>
+          <a:p>
+            <a:pPr algn="l">
+              <a:spcAft>
+                <a:spcPts val="0"/>
+              </a:spcAft>
+            </a:pPr>
+            <a:r>
+              <a:rPr sz="1000" b="0" i="0">
+                <a:solidFill>
+                  <a:srgbClr val="5B6B6B"/>
+                </a:solidFill>
+                <a:latin typeface="Calibri"/>
+              </a:rPr>
+              <a:t>observed stops the register doesn't list</a:t>
+            </a:r>
+          </a:p>
+        </p:txBody>
+      </p:sp>
+      <p:sp>
+        <p:nvSpPr>
+          <p:cNvPr id="12" name="Rounded Rectangle 11"/>
+          <p:cNvSpPr/>
+          <p:nvPr/>
+        </p:nvSpPr>
+        <p:spPr>
+          <a:xfrm>
+            <a:off x="502920" y="4983480"/>
+            <a:ext cx="6492240" cy="1417320"/>
+          </a:xfrm>
+          <a:prstGeom prst="roundRect">
+            <a:avLst>
+              <a:gd name="adj" fmla="val 6000"/>
+            </a:avLst>
+          </a:prstGeom>
+          <a:solidFill>
+            <a:srgbClr val="E9F2EE"/>
+          </a:solidFill>
+          <a:ln>
+            <a:noFill/>
+          </a:ln>
+          <a:effectLst/>
+        </p:spPr>
+        <p:style>
+          <a:lnRef idx="1">
+            <a:schemeClr val="accent1"/>
+          </a:lnRef>
+          <a:fillRef idx="3">
+            <a:schemeClr val="accent1"/>
+          </a:fillRef>
+          <a:effectRef idx="2">
+            <a:schemeClr val="accent1"/>
+          </a:effectRef>
+          <a:fontRef idx="minor">
+            <a:schemeClr val="lt1"/>
+          </a:fontRef>
+        </p:style>
+        <p:txBody>
+          <a:bodyPr rtlCol="0" anchor="ctr"/>
+          <a:lstStyle/>
+          <a:p>
+            <a:pPr algn="ctr"/>
+          </a:p>
+        </p:txBody>
+      </p:sp>
+      <p:sp>
+        <p:nvSpPr>
+          <p:cNvPr id="13" name="TextBox 12"/>
+          <p:cNvSpPr txBox="1"/>
+          <p:nvPr/>
+        </p:nvSpPr>
+        <p:spPr>
+          <a:xfrm>
+            <a:off x="731520" y="5120640"/>
+            <a:ext cx="6035040" cy="1188720"/>
+          </a:xfrm>
+          <a:prstGeom prst="rect">
+            <a:avLst/>
+          </a:prstGeom>
+          <a:noFill/>
+        </p:spPr>
+        <p:txBody>
+          <a:bodyPr wrap="square" lIns="0" rIns="0" tIns="0" bIns="0">
+            <a:spAutoFit/>
+          </a:bodyPr>
+          <a:lstStyle/>
+          <a:p>
+            <a:pPr algn="l">
+              <a:spcAft>
+                <a:spcPts val="300"/>
+              </a:spcAft>
+            </a:pPr>
+            <a:r>
+              <a:rPr sz="1300" b="1" i="0">
+                <a:solidFill>
+                  <a:srgbClr val="0F6E56"/>
+                </a:solidFill>
+                <a:latin typeface="Cambria"/>
+              </a:rPr>
+              <a:t>Enrichment, not indictment</a:t>
+            </a:r>
+          </a:p>
+          <a:p>
+            <a:pPr algn="l">
+              <a:spcAft>
+                <a:spcPts val="0"/>
+              </a:spcAft>
+            </a:pPr>
+            <a:r>
+              <a:rPr sz="1150" b="0" i="0">
+                <a:solidFill>
+                  <a:srgbClr val="102A2E"/>
+                </a:solidFill>
+                <a:latin typeface="Calibri"/>
+              </a:rPr>
+              <a:t>The register is endpoint-oriented, so mid-route stops are “new” by construction. Each candidate ships with coordinates, visits and driver support — ready for field validation.</a:t>
+            </a:r>
+          </a:p>
+        </p:txBody>
+      </p:sp>
+      <p:pic>
+        <p:nvPicPr>
+          <p:cNvPr id="14" name="Picture 13" descr="stops_vs_register.png"/>
+          <p:cNvPicPr>
+            <a:picLocks noChangeAspect="1"/>
+          </p:cNvPicPr>
+          <p:nvPr/>
+        </p:nvPicPr>
+        <p:blipFill>
+          <a:blip r:embed="rId2"/>
+          <a:stretch>
+            <a:fillRect/>
+          </a:stretch>
+        </p:blipFill>
+        <p:spPr>
+          <a:xfrm>
+            <a:off x="7269480" y="1417320"/>
+            <a:ext cx="4975487" cy="4983480"/>
+          </a:xfrm>
+          <a:prstGeom prst="rect">
+            <a:avLst/>
+          </a:prstGeom>
+        </p:spPr>
+      </p:pic>
+      <p:sp>
+        <p:nvSpPr>
+          <p:cNvPr id="15" name="TextBox 14"/>
+          <p:cNvSpPr txBox="1"/>
+          <p:nvPr/>
+        </p:nvSpPr>
+        <p:spPr>
+          <a:xfrm>
+            <a:off x="7269480" y="6437376"/>
+            <a:ext cx="4572000" cy="457200"/>
+          </a:xfrm>
+          <a:prstGeom prst="rect">
+            <a:avLst/>
+          </a:prstGeom>
+          <a:noFill/>
+        </p:spPr>
+        <p:txBody>
+          <a:bodyPr wrap="square" lIns="0" rIns="0" tIns="0" bIns="0">
+            <a:spAutoFit/>
+          </a:bodyPr>
+          <a:lstStyle/>
+          <a:p>
+            <a:pPr algn="ctr">
+              <a:spcAft>
+                <a:spcPts val="0"/>
+              </a:spcAft>
+            </a:pPr>
+            <a:r>
+              <a:rPr sz="1150" b="0" i="1">
+                <a:solidFill>
+                  <a:srgbClr val="5B6B6B"/>
+                </a:solidFill>
+                <a:latin typeface="Calibri"/>
+              </a:rPr>
+              <a:t>Register (blue) vs observed stops — red = candidates.</a:t>
+            </a:r>
+          </a:p>
+        </p:txBody>
+      </p:sp>
+    </p:spTree>
+  </p:cSld>
+  <p:clrMapOvr>
+    <a:masterClrMapping/>
+  </p:clrMapOvr>
+</p:sld>
+</file>
+
+<file path=ppt/slides/slide12.xml><?xml version="1.0" encoding="utf-8"?>
+<p:sld xmlns:a="http://schemas.openxmlformats.org/drawingml/2006/main" xmlns:p="http://schemas.openxmlformats.org/presentationml/2006/main" xmlns:r="http://schemas.openxmlformats.org/officeDocument/2006/relationships">
+  <p:cSld>
+    <p:spTree>
+      <p:nvGrpSpPr>
+        <p:cNvPr id="1" name=""/>
+        <p:cNvGrpSpPr/>
+        <p:nvPr/>
+      </p:nvGrpSpPr>
+      <p:grpSpPr/>
+      <p:sp>
+        <p:nvSpPr>
+          <p:cNvPr id="2" name="Rectangle 1"/>
+          <p:cNvSpPr/>
+          <p:nvPr/>
+        </p:nvSpPr>
+        <p:spPr>
+          <a:xfrm>
+            <a:off x="0" y="0"/>
+            <a:ext cx="12191695" cy="6858000"/>
+          </a:xfrm>
+          <a:prstGeom prst="rect">
+            <a:avLst/>
+          </a:prstGeom>
+          <a:solidFill>
+            <a:srgbClr val="0A3D33"/>
+          </a:solidFill>
+          <a:ln>
+            <a:noFill/>
+          </a:ln>
+          <a:effectLst/>
+        </p:spPr>
+        <p:style>
+          <a:lnRef idx="1">
+            <a:schemeClr val="accent1"/>
+          </a:lnRef>
+          <a:fillRef idx="3">
+            <a:schemeClr val="accent1"/>
+          </a:fillRef>
+          <a:effectRef idx="2">
+            <a:schemeClr val="accent1"/>
+          </a:effectRef>
+          <a:fontRef idx="minor">
+            <a:schemeClr val="lt1"/>
+          </a:fontRef>
+        </p:style>
+        <p:txBody>
+          <a:bodyPr rtlCol="0" anchor="ctr"/>
+          <a:lstStyle/>
+          <a:p>
+            <a:pPr algn="ctr"/>
+          </a:p>
+        </p:txBody>
+      </p:sp>
+      <p:sp>
+        <p:nvSpPr>
+          <p:cNvPr id="3" name="TextBox 2"/>
+          <p:cNvSpPr txBox="1"/>
+          <p:nvPr/>
+        </p:nvSpPr>
+        <p:spPr>
+          <a:xfrm>
+            <a:off x="502920" y="365760"/>
+            <a:ext cx="11155680" cy="1005840"/>
+          </a:xfrm>
+          <a:prstGeom prst="rect">
+            <a:avLst/>
+          </a:prstGeom>
+          <a:noFill/>
+        </p:spPr>
+        <p:txBody>
+          <a:bodyPr wrap="square" lIns="0" rIns="0" tIns="0" bIns="0">
+            <a:spAutoFit/>
+          </a:bodyPr>
+          <a:lstStyle/>
+          <a:p>
+            <a:pPr algn="l">
+              <a:spcAft>
+                <a:spcPts val="400"/>
+              </a:spcAft>
+            </a:pPr>
+            <a:r>
+              <a:rPr sz="1200" b="1" i="0">
+                <a:solidFill>
+                  <a:srgbClr val="7FC8AF"/>
+                </a:solidFill>
+                <a:latin typeface="Calibri"/>
+              </a:rPr>
+              <a:t>READ BEFORE CITING</a:t>
+            </a:r>
+          </a:p>
+          <a:p>
+            <a:pPr algn="l">
+              <a:spcAft>
+                <a:spcPts val="200"/>
+              </a:spcAft>
+            </a:pPr>
+            <a:r>
+              <a:rPr sz="3100" b="1" i="0">
+                <a:solidFill>
+                  <a:srgbClr val="FFFFFF"/>
+                </a:solidFill>
+                <a:latin typeface="Cambria"/>
+              </a:rPr>
+              <a:t>What this data cannot tell us</a:t>
+            </a:r>
+          </a:p>
+        </p:txBody>
+      </p:sp>
+      <p:sp>
+        <p:nvSpPr>
+          <p:cNvPr id="4" name="Rounded Rectangle 3"/>
+          <p:cNvSpPr/>
+          <p:nvPr/>
+        </p:nvSpPr>
+        <p:spPr>
+          <a:xfrm>
+            <a:off x="502920" y="1600200"/>
+            <a:ext cx="11155680" cy="841248"/>
+          </a:xfrm>
+          <a:prstGeom prst="roundRect">
+            <a:avLst>
+              <a:gd name="adj" fmla="val 6000"/>
+            </a:avLst>
+          </a:prstGeom>
+          <a:solidFill>
+            <a:srgbClr val="0E4A3E"/>
+          </a:solidFill>
+          <a:ln>
+            <a:noFill/>
+          </a:ln>
+          <a:effectLst/>
+        </p:spPr>
+        <p:style>
+          <a:lnRef idx="1">
+            <a:schemeClr val="accent1"/>
+          </a:lnRef>
+          <a:fillRef idx="3">
+            <a:schemeClr val="accent1"/>
+          </a:fillRef>
+          <a:effectRef idx="2">
+            <a:schemeClr val="accent1"/>
+          </a:effectRef>
+          <a:fontRef idx="minor">
+            <a:schemeClr val="lt1"/>
+          </a:fontRef>
+        </p:style>
+        <p:txBody>
+          <a:bodyPr rtlCol="0" anchor="ctr"/>
+          <a:lstStyle/>
+          <a:p>
+            <a:pPr algn="ctr"/>
+          </a:p>
+        </p:txBody>
+      </p:sp>
+      <p:sp>
+        <p:nvSpPr>
+          <p:cNvPr id="5" name="TextBox 4"/>
+          <p:cNvSpPr txBox="1"/>
+          <p:nvPr/>
+        </p:nvSpPr>
+        <p:spPr>
+          <a:xfrm>
+            <a:off x="777240" y="1691640"/>
+            <a:ext cx="10607040" cy="676656"/>
+          </a:xfrm>
+          <a:prstGeom prst="rect">
+            <a:avLst/>
+          </a:prstGeom>
+          <a:noFill/>
+        </p:spPr>
+        <p:txBody>
+          <a:bodyPr wrap="square" lIns="0" rIns="0" tIns="0" bIns="0">
+            <a:spAutoFit/>
+          </a:bodyPr>
+          <a:lstStyle/>
+          <a:p>
+            <a:pPr algn="l">
+              <a:spcAft>
+                <a:spcPts val="100"/>
+              </a:spcAft>
+            </a:pPr>
+            <a:r>
+              <a:rPr sz="1350" b="1" i="0">
+                <a:solidFill>
+                  <a:srgbClr val="FFFFFF"/>
+                </a:solidFill>
+                <a:latin typeface="Calibri"/>
+              </a:rPr>
+              <a:t>Partial, self-selected adoption</a:t>
+            </a:r>
+          </a:p>
+          <a:p>
+            <a:pPr algn="l">
+              <a:spcAft>
+                <a:spcPts val="0"/>
+              </a:spcAft>
+            </a:pPr>
+            <a:r>
+              <a:rPr sz="1150" b="0" i="0">
+                <a:solidFill>
+                  <a:srgbClr val="C9E2D8"/>
+                </a:solidFill>
+                <a:latin typeface="Calibri"/>
+              </a:rPr>
+              <a:t>~157 active drivers, Srinagar-concentrated. “No app data on a route” does NOT mean “no service”.</a:t>
+            </a:r>
+          </a:p>
+        </p:txBody>
+      </p:sp>
+      <p:sp>
+        <p:nvSpPr>
+          <p:cNvPr id="6" name="Rounded Rectangle 5"/>
+          <p:cNvSpPr/>
+          <p:nvPr/>
+        </p:nvSpPr>
+        <p:spPr>
+          <a:xfrm>
+            <a:off x="502920" y="2569464"/>
+            <a:ext cx="11155680" cy="841248"/>
+          </a:xfrm>
+          <a:prstGeom prst="roundRect">
+            <a:avLst>
+              <a:gd name="adj" fmla="val 6000"/>
+            </a:avLst>
+          </a:prstGeom>
+          <a:solidFill>
+            <a:srgbClr val="0E4A3E"/>
+          </a:solidFill>
+          <a:ln>
+            <a:noFill/>
+          </a:ln>
+          <a:effectLst/>
+        </p:spPr>
+        <p:style>
+          <a:lnRef idx="1">
+            <a:schemeClr val="accent1"/>
+          </a:lnRef>
+          <a:fillRef idx="3">
+            <a:schemeClr val="accent1"/>
+          </a:fillRef>
+          <a:effectRef idx="2">
+            <a:schemeClr val="accent1"/>
+          </a:effectRef>
+          <a:fontRef idx="minor">
+            <a:schemeClr val="lt1"/>
+          </a:fontRef>
+        </p:style>
+        <p:txBody>
+          <a:bodyPr rtlCol="0" anchor="ctr"/>
+          <a:lstStyle/>
+          <a:p>
+            <a:pPr algn="ctr"/>
+          </a:p>
+        </p:txBody>
+      </p:sp>
+      <p:sp>
+        <p:nvSpPr>
+          <p:cNvPr id="7" name="TextBox 6"/>
+          <p:cNvSpPr txBox="1"/>
+          <p:nvPr/>
+        </p:nvSpPr>
+        <p:spPr>
+          <a:xfrm>
+            <a:off x="777240" y="2660904"/>
+            <a:ext cx="10607040" cy="676656"/>
+          </a:xfrm>
+          <a:prstGeom prst="rect">
+            <a:avLst/>
+          </a:prstGeom>
+          <a:noFill/>
+        </p:spPr>
+        <p:txBody>
+          <a:bodyPr wrap="square" lIns="0" rIns="0" tIns="0" bIns="0">
+            <a:spAutoFit/>
+          </a:bodyPr>
+          <a:lstStyle/>
+          <a:p>
+            <a:pPr algn="l">
+              <a:spcAft>
+                <a:spcPts val="100"/>
+              </a:spcAft>
+            </a:pPr>
+            <a:r>
+              <a:rPr sz="1350" b="1" i="0">
+                <a:solidFill>
+                  <a:srgbClr val="FFFFFF"/>
+                </a:solidFill>
+                <a:latin typeface="Calibri"/>
+              </a:rPr>
+              <a:t>No demand, no ridership, no frequency</a:t>
+            </a:r>
+          </a:p>
+          <a:p>
+            <a:pPr algn="l">
+              <a:spcAft>
+                <a:spcPts val="0"/>
+              </a:spcAft>
+            </a:pPr>
+            <a:r>
+              <a:rPr sz="1150" b="0" i="0">
+                <a:solidFill>
+                  <a:srgbClr val="C9E2D8"/>
+                </a:solidFill>
+                <a:latin typeface="Calibri"/>
+              </a:rPr>
+              <a:t>The app sees vehicles, not passengers. Observed run counts reflect who installed the app — never cited as service frequency.</a:t>
+            </a:r>
+          </a:p>
+        </p:txBody>
+      </p:sp>
+      <p:sp>
+        <p:nvSpPr>
+          <p:cNvPr id="8" name="Rounded Rectangle 7"/>
+          <p:cNvSpPr/>
+          <p:nvPr/>
+        </p:nvSpPr>
+        <p:spPr>
+          <a:xfrm>
+            <a:off x="502920" y="3538728"/>
+            <a:ext cx="11155680" cy="841248"/>
+          </a:xfrm>
+          <a:prstGeom prst="roundRect">
+            <a:avLst>
+              <a:gd name="adj" fmla="val 6000"/>
+            </a:avLst>
+          </a:prstGeom>
+          <a:solidFill>
+            <a:srgbClr val="0E4A3E"/>
+          </a:solidFill>
+          <a:ln>
+            <a:noFill/>
+          </a:ln>
+          <a:effectLst/>
+        </p:spPr>
+        <p:style>
+          <a:lnRef idx="1">
+            <a:schemeClr val="accent1"/>
+          </a:lnRef>
+          <a:fillRef idx="3">
+            <a:schemeClr val="accent1"/>
+          </a:fillRef>
+          <a:effectRef idx="2">
+            <a:schemeClr val="accent1"/>
+          </a:effectRef>
+          <a:fontRef idx="minor">
+            <a:schemeClr val="lt1"/>
+          </a:fontRef>
+        </p:style>
+        <p:txBody>
+          <a:bodyPr rtlCol="0" anchor="ctr"/>
+          <a:lstStyle/>
+          <a:p>
+            <a:pPr algn="ctr"/>
+          </a:p>
+        </p:txBody>
+      </p:sp>
+      <p:sp>
+        <p:nvSpPr>
+          <p:cNvPr id="9" name="TextBox 8"/>
+          <p:cNvSpPr txBox="1"/>
+          <p:nvPr/>
+        </p:nvSpPr>
+        <p:spPr>
+          <a:xfrm>
+            <a:off x="777240" y="3630168"/>
+            <a:ext cx="10607040" cy="676656"/>
+          </a:xfrm>
+          <a:prstGeom prst="rect">
+            <a:avLst/>
+          </a:prstGeom>
+          <a:noFill/>
+        </p:spPr>
+        <p:txBody>
+          <a:bodyPr wrap="square" lIns="0" rIns="0" tIns="0" bIns="0">
+            <a:spAutoFit/>
+          </a:bodyPr>
+          <a:lstStyle/>
+          <a:p>
+            <a:pPr algn="l">
+              <a:spcAft>
+                <a:spcPts val="100"/>
+              </a:spcAft>
+            </a:pPr>
+            <a:r>
+              <a:rPr sz="1350" b="1" i="0">
+                <a:solidFill>
+                  <a:srgbClr val="FFFFFF"/>
+                </a:solidFill>
+                <a:latin typeface="Calibri"/>
+              </a:rPr>
+              <a:t>Corridors cover 41% of clean runs</a:t>
+            </a:r>
+          </a:p>
+          <a:p>
+            <a:pPr algn="l">
+              <a:spcAft>
+                <a:spcPts val="0"/>
+              </a:spcAft>
+            </a:pPr>
+            <a:r>
+              <a:rPr sz="1150" b="0" i="0">
+                <a:solidFill>
+                  <a:srgbClr val="C9E2D8"/>
+                </a:solidFill>
+                <a:latin typeface="Calibri"/>
+              </a:rPr>
+              <a:t>The other 59% was decomposed and shown to be noise, loops and out-of-division traffic — but the corridor findings describe the frequently-driven core only.</a:t>
+            </a:r>
+          </a:p>
+        </p:txBody>
+      </p:sp>
+      <p:sp>
+        <p:nvSpPr>
+          <p:cNvPr id="10" name="Rounded Rectangle 9"/>
+          <p:cNvSpPr/>
+          <p:nvPr/>
+        </p:nvSpPr>
+        <p:spPr>
+          <a:xfrm>
+            <a:off x="502920" y="4507992"/>
+            <a:ext cx="11155680" cy="841248"/>
+          </a:xfrm>
+          <a:prstGeom prst="roundRect">
+            <a:avLst>
+              <a:gd name="adj" fmla="val 6000"/>
+            </a:avLst>
+          </a:prstGeom>
+          <a:solidFill>
+            <a:srgbClr val="0E4A3E"/>
+          </a:solidFill>
+          <a:ln>
+            <a:noFill/>
+          </a:ln>
+          <a:effectLst/>
+        </p:spPr>
+        <p:style>
+          <a:lnRef idx="1">
+            <a:schemeClr val="accent1"/>
+          </a:lnRef>
+          <a:fillRef idx="3">
+            <a:schemeClr val="accent1"/>
+          </a:fillRef>
+          <a:effectRef idx="2">
+            <a:schemeClr val="accent1"/>
+          </a:effectRef>
+          <a:fontRef idx="minor">
+            <a:schemeClr val="lt1"/>
+          </a:fontRef>
+        </p:style>
+        <p:txBody>
+          <a:bodyPr rtlCol="0" anchor="ctr"/>
+          <a:lstStyle/>
+          <a:p>
+            <a:pPr algn="ctr"/>
+          </a:p>
+        </p:txBody>
+      </p:sp>
+      <p:sp>
+        <p:nvSpPr>
+          <p:cNvPr id="11" name="TextBox 10"/>
+          <p:cNvSpPr txBox="1"/>
+          <p:nvPr/>
+        </p:nvSpPr>
+        <p:spPr>
+          <a:xfrm>
+            <a:off x="777240" y="4599431"/>
+            <a:ext cx="10607040" cy="676656"/>
+          </a:xfrm>
+          <a:prstGeom prst="rect">
+            <a:avLst/>
+          </a:prstGeom>
+          <a:noFill/>
+        </p:spPr>
+        <p:txBody>
+          <a:bodyPr wrap="square" lIns="0" rIns="0" tIns="0" bIns="0">
+            <a:spAutoFit/>
+          </a:bodyPr>
+          <a:lstStyle/>
+          <a:p>
+            <a:pPr algn="l">
+              <a:spcAft>
+                <a:spcPts val="100"/>
+              </a:spcAft>
+            </a:pPr>
+            <a:r>
+              <a:rPr sz="1350" b="1" i="0">
+                <a:solidFill>
+                  <a:srgbClr val="FFFFFF"/>
+                </a:solidFill>
+                <a:latin typeface="Calibri"/>
+              </a:rPr>
+              <a:t>Observed times are an upper bound</a:t>
+            </a:r>
+          </a:p>
+          <a:p>
+            <a:pPr algn="l">
+              <a:spcAft>
+                <a:spcPts val="0"/>
+              </a:spcAft>
+            </a:pPr>
+            <a:r>
+              <a:rPr sz="1150" b="0" i="0">
+                <a:solidFill>
+                  <a:srgbClr val="C9E2D8"/>
+                </a:solidFill>
+                <a:latin typeface="Calibri"/>
+              </a:rPr>
+              <a:t>They embody informal wait-to-fill practice; a scheduled, headway-enforced service should beat them.</a:t>
+            </a:r>
+          </a:p>
+        </p:txBody>
+      </p:sp>
+      <p:sp>
+        <p:nvSpPr>
+          <p:cNvPr id="12" name="Rounded Rectangle 11"/>
+          <p:cNvSpPr/>
+          <p:nvPr/>
+        </p:nvSpPr>
+        <p:spPr>
+          <a:xfrm>
+            <a:off x="502920" y="5477256"/>
+            <a:ext cx="11155680" cy="841248"/>
+          </a:xfrm>
+          <a:prstGeom prst="roundRect">
+            <a:avLst>
+              <a:gd name="adj" fmla="val 6000"/>
+            </a:avLst>
+          </a:prstGeom>
+          <a:solidFill>
+            <a:srgbClr val="0E4A3E"/>
+          </a:solidFill>
+          <a:ln>
+            <a:noFill/>
+          </a:ln>
+          <a:effectLst/>
+        </p:spPr>
+        <p:style>
+          <a:lnRef idx="1">
+            <a:schemeClr val="accent1"/>
+          </a:lnRef>
+          <a:fillRef idx="3">
+            <a:schemeClr val="accent1"/>
+          </a:fillRef>
+          <a:effectRef idx="2">
+            <a:schemeClr val="accent1"/>
+          </a:effectRef>
+          <a:fontRef idx="minor">
+            <a:schemeClr val="lt1"/>
+          </a:fontRef>
+        </p:style>
+        <p:txBody>
+          <a:bodyPr rtlCol="0" anchor="ctr"/>
+          <a:lstStyle/>
+          <a:p>
+            <a:pPr algn="ctr"/>
+          </a:p>
+        </p:txBody>
+      </p:sp>
+      <p:sp>
+        <p:nvSpPr>
+          <p:cNvPr id="13" name="TextBox 12"/>
+          <p:cNvSpPr txBox="1"/>
+          <p:nvPr/>
+        </p:nvSpPr>
+        <p:spPr>
+          <a:xfrm>
+            <a:off x="777240" y="5568696"/>
+            <a:ext cx="10607040" cy="676656"/>
+          </a:xfrm>
+          <a:prstGeom prst="rect">
+            <a:avLst/>
+          </a:prstGeom>
+          <a:noFill/>
+        </p:spPr>
+        <p:txBody>
+          <a:bodyPr wrap="square" lIns="0" rIns="0" tIns="0" bIns="0">
+            <a:spAutoFit/>
+          </a:bodyPr>
+          <a:lstStyle/>
+          <a:p>
+            <a:pPr algn="l">
+              <a:spcAft>
+                <a:spcPts val="100"/>
+              </a:spcAft>
+            </a:pPr>
+            <a:r>
+              <a:rPr sz="1350" b="1" i="0">
+                <a:solidFill>
+                  <a:srgbClr val="FFFFFF"/>
+                </a:solidFill>
+                <a:latin typeface="Calibri"/>
+              </a:rPr>
+              <a:t>Rural routes remain unvalidated</a:t>
+            </a:r>
+          </a:p>
+          <a:p>
+            <a:pPr algn="l">
+              <a:spcAft>
+                <a:spcPts val="0"/>
+              </a:spcAft>
+            </a:pPr>
+            <a:r>
+              <a:rPr sz="1150" b="0" i="0">
+                <a:solidFill>
+                  <a:srgbClr val="C9E2D8"/>
+                </a:solidFill>
+                <a:latin typeface="Calibri"/>
+              </a:rPr>
+              <a:t>Measured corrections touch 5 Srinagar-core corridors; long rural lifeline cycle times still rest on the model.</a:t>
+            </a:r>
+          </a:p>
+        </p:txBody>
+      </p:sp>
+    </p:spTree>
+  </p:cSld>
+  <p:clrMapOvr>
+    <a:masterClrMapping/>
+  </p:clrMapOvr>
+</p:sld>
+</file>
+
+<file path=ppt/slides/slide13.xml><?xml version="1.0" encoding="utf-8"?>
+<p:sld xmlns:a="http://schemas.openxmlformats.org/drawingml/2006/main" xmlns:p="http://schemas.openxmlformats.org/presentationml/2006/main" xmlns:r="http://schemas.openxmlformats.org/officeDocument/2006/relationships">
+  <p:cSld>
+    <p:spTree>
+      <p:nvGrpSpPr>
+        <p:cNvPr id="1" name=""/>
+        <p:cNvGrpSpPr/>
+        <p:nvPr/>
+      </p:nvGrpSpPr>
+      <p:grpSpPr/>
+      <p:sp>
+        <p:nvSpPr>
+          <p:cNvPr id="2" name="Rectangle 1"/>
+          <p:cNvSpPr/>
+          <p:nvPr/>
+        </p:nvSpPr>
+        <p:spPr>
+          <a:xfrm>
+            <a:off x="0" y="0"/>
+            <a:ext cx="12191695" cy="6858000"/>
+          </a:xfrm>
+          <a:prstGeom prst="rect">
+            <a:avLst/>
+          </a:prstGeom>
+          <a:solidFill>
+            <a:srgbClr val="FFFFFF"/>
+          </a:solidFill>
+          <a:ln>
+            <a:noFill/>
+          </a:ln>
+          <a:effectLst/>
+        </p:spPr>
+        <p:style>
+          <a:lnRef idx="1">
+            <a:schemeClr val="accent1"/>
+          </a:lnRef>
+          <a:fillRef idx="3">
+            <a:schemeClr val="accent1"/>
+          </a:fillRef>
+          <a:effectRef idx="2">
+            <a:schemeClr val="accent1"/>
+          </a:effectRef>
+          <a:fontRef idx="minor">
+            <a:schemeClr val="lt1"/>
+          </a:fontRef>
+        </p:style>
+        <p:txBody>
+          <a:bodyPr rtlCol="0" anchor="ctr"/>
+          <a:lstStyle/>
+          <a:p>
+            <a:pPr algn="ctr"/>
+          </a:p>
+        </p:txBody>
+      </p:sp>
+      <p:sp>
+        <p:nvSpPr>
+          <p:cNvPr id="3" name="TextBox 2"/>
+          <p:cNvSpPr txBox="1"/>
+          <p:nvPr/>
+        </p:nvSpPr>
+        <p:spPr>
+          <a:xfrm>
+            <a:off x="502920" y="292608"/>
+            <a:ext cx="11155680" cy="1188720"/>
+          </a:xfrm>
+          <a:prstGeom prst="rect">
+            <a:avLst/>
+          </a:prstGeom>
+          <a:noFill/>
+        </p:spPr>
+        <p:txBody>
+          <a:bodyPr wrap="square" lIns="0" rIns="0" tIns="0" bIns="0">
+            <a:spAutoFit/>
+          </a:bodyPr>
+          <a:lstStyle/>
+          <a:p>
+            <a:pPr algn="l">
+              <a:spcAft>
+                <a:spcPts val="400"/>
+              </a:spcAft>
+            </a:pPr>
+            <a:r>
+              <a:rPr sz="1200" b="1" i="0">
+                <a:solidFill>
+                  <a:srgbClr val="0F6E56"/>
+                </a:solidFill>
+                <a:latin typeface="Calibri"/>
+              </a:rPr>
               <a:t>SUMMARY</a:t>
             </a:r>
           </a:p>
@@ -5635,7 +8241,7 @@
                 </a:solidFill>
                 <a:latin typeface="Calibri"/>
               </a:rPr>
-              <a:t>STEP 2 — VERIFICATION</a:t>
+              <a:t>WHAT THE CLEANING LOOKS LIKE</a:t>
             </a:r>
           </a:p>
           <a:p>
@@ -5651,37 +8257,45 @@
                 </a:solidFill>
                 <a:latin typeface="Cambria"/>
               </a:rPr>
-              <a:t>18 observed corridors, each judged one by one</a:t>
-            </a:r>
-          </a:p>
-          <a:p>
-            <a:pPr algn="l">
-              <a:spcAft>
-                <a:spcPts val="0"/>
-              </a:spcAft>
-            </a:pPr>
-            <a:r>
-              <a:rPr sz="1300" b="0" i="0">
-                <a:solidFill>
-                  <a:srgbClr val="5B6B6B"/>
-                </a:solidFill>
-                <a:latin typeface="Calibri"/>
-              </a:rPr>
-              <a:t>Endpoint clustering (≥3 distinct drivers per terminal) grouped the clean runs into 25 corridors; the 18 with real support (≥5 runs, ≥2 drivers) each got an evidence file and an individual AI-analyst verdict.</a:t>
-            </a:r>
-          </a:p>
-        </p:txBody>
-      </p:sp>
-      <p:sp>
-        <p:nvSpPr>
-          <p:cNvPr id="4" name="TextBox 3"/>
+              <a:t>One recorded session, ten real bus runs inside it</a:t>
+            </a:r>
+          </a:p>
+        </p:txBody>
+      </p:sp>
+      <p:pic>
+        <p:nvPicPr>
+          <p:cNvPr id="4" name="Picture 3" descr="session_split.png"/>
+          <p:cNvPicPr>
+            <a:picLocks noChangeAspect="1"/>
+          </p:cNvPicPr>
+          <p:nvPr/>
+        </p:nvPicPr>
+        <p:blipFill>
+          <a:blip r:embed="rId2"/>
+          <a:stretch>
+            <a:fillRect/>
+          </a:stretch>
+        </p:blipFill>
+        <p:spPr>
+          <a:xfrm>
+            <a:off x="1051560" y="1417320"/>
+            <a:ext cx="10058400" cy="5019307"/>
+          </a:xfrm>
+          <a:prstGeom prst="rect">
+            <a:avLst/>
+          </a:prstGeom>
+        </p:spPr>
+      </p:pic>
+      <p:sp>
+        <p:nvSpPr>
+          <p:cNvPr id="5" name="TextBox 4"/>
           <p:cNvSpPr txBox="1"/>
           <p:nvPr/>
         </p:nvSpPr>
         <p:spPr>
           <a:xfrm>
-            <a:off x="502920" y="1828800"/>
-            <a:ext cx="5486400" cy="365760"/>
+            <a:off x="1051560" y="6419088"/>
+            <a:ext cx="10058400" cy="457200"/>
           </a:xfrm>
           <a:prstGeom prst="rect">
             <a:avLst/>
@@ -5694,712 +8308,19 @@
           </a:bodyPr>
           <a:lstStyle/>
           <a:p>
-            <a:pPr algn="l">
-              <a:spcAft>
-                <a:spcPts val="400"/>
-              </a:spcAft>
-            </a:pPr>
-            <a:r>
-              <a:rPr sz="1500" b="1" i="0">
-                <a:solidFill>
-                  <a:srgbClr val="102A2E"/>
-                </a:solidFill>
-                <a:latin typeface="Cambria"/>
-              </a:rPr>
-              <a:t>Verdicts vs the plan's routes</a:t>
-            </a:r>
-          </a:p>
-        </p:txBody>
-      </p:sp>
-      <p:sp>
-        <p:nvSpPr>
-          <p:cNvPr id="5" name="Rounded Rectangle 4"/>
-          <p:cNvSpPr/>
-          <p:nvPr/>
-        </p:nvSpPr>
-        <p:spPr>
-          <a:xfrm>
-            <a:off x="502920" y="2286000"/>
-            <a:ext cx="6720840" cy="914400"/>
-          </a:xfrm>
-          <a:prstGeom prst="roundRect">
-            <a:avLst>
-              <a:gd name="adj" fmla="val 6000"/>
-            </a:avLst>
-          </a:prstGeom>
-          <a:solidFill>
-            <a:srgbClr val="E9F2EE"/>
-          </a:solidFill>
-          <a:ln>
-            <a:noFill/>
-          </a:ln>
-          <a:effectLst/>
-        </p:spPr>
-        <p:style>
-          <a:lnRef idx="1">
-            <a:schemeClr val="accent1"/>
-          </a:lnRef>
-          <a:fillRef idx="3">
-            <a:schemeClr val="accent1"/>
-          </a:fillRef>
-          <a:effectRef idx="2">
-            <a:schemeClr val="accent1"/>
-          </a:effectRef>
-          <a:fontRef idx="minor">
-            <a:schemeClr val="lt1"/>
-          </a:fontRef>
-        </p:style>
-        <p:txBody>
-          <a:bodyPr rtlCol="0" anchor="ctr"/>
-          <a:lstStyle/>
-          <a:p>
-            <a:pPr algn="ctr"/>
-          </a:p>
-        </p:txBody>
-      </p:sp>
-      <p:sp>
-        <p:nvSpPr>
-          <p:cNvPr id="6" name="TextBox 5"/>
-          <p:cNvSpPr txBox="1"/>
-          <p:nvPr/>
-        </p:nvSpPr>
-        <p:spPr>
-          <a:xfrm>
-            <a:off x="731520" y="2395728"/>
-            <a:ext cx="822960" cy="731520"/>
-          </a:xfrm>
-          <a:prstGeom prst="rect">
-            <a:avLst/>
-          </a:prstGeom>
-          <a:noFill/>
-        </p:spPr>
-        <p:txBody>
-          <a:bodyPr wrap="square" lIns="0" rIns="0" tIns="0" bIns="0">
-            <a:spAutoFit/>
-          </a:bodyPr>
-          <a:lstStyle/>
-          <a:p>
-            <a:pPr algn="l">
-              <a:spcAft>
-                <a:spcPts val="400"/>
-              </a:spcAft>
-            </a:pPr>
-            <a:r>
-              <a:rPr sz="2700" b="1" i="0">
-                <a:solidFill>
-                  <a:srgbClr val="0F6E56"/>
-                </a:solidFill>
-                <a:latin typeface="Cambria"/>
-              </a:rPr>
-              <a:t>7</a:t>
-            </a:r>
-          </a:p>
-        </p:txBody>
-      </p:sp>
-      <p:sp>
-        <p:nvSpPr>
-          <p:cNvPr id="7" name="TextBox 6"/>
-          <p:cNvSpPr txBox="1"/>
-          <p:nvPr/>
-        </p:nvSpPr>
-        <p:spPr>
-          <a:xfrm>
-            <a:off x="1600200" y="2414016"/>
-            <a:ext cx="5486400" cy="731520"/>
-          </a:xfrm>
-          <a:prstGeom prst="rect">
-            <a:avLst/>
-          </a:prstGeom>
-          <a:noFill/>
-        </p:spPr>
-        <p:txBody>
-          <a:bodyPr wrap="square" lIns="0" rIns="0" tIns="0" bIns="0">
-            <a:spAutoFit/>
-          </a:bodyPr>
-          <a:lstStyle/>
-          <a:p>
-            <a:pPr algn="l">
-              <a:spcAft>
-                <a:spcPts val="100"/>
-              </a:spcAft>
-            </a:pPr>
-            <a:r>
-              <a:rPr sz="1350" b="1" i="0">
-                <a:solidFill>
-                  <a:srgbClr val="102A2E"/>
-                </a:solidFill>
-                <a:latin typeface="Calibri"/>
-              </a:rPr>
-              <a:t>MATCH the plan</a:t>
-            </a:r>
-          </a:p>
-          <a:p>
-            <a:pPr algn="l">
+            <a:pPr algn="ctr">
               <a:spcAft>
                 <a:spcPts val="0"/>
               </a:spcAft>
             </a:pPr>
             <a:r>
-              <a:rPr sz="1150" b="0" i="0">
+              <a:rPr sz="1150" b="0" i="1">
                 <a:solidFill>
                   <a:srgbClr val="5B6B6B"/>
                 </a:solidFill>
                 <a:latin typeface="Calibri"/>
               </a:rPr>
-              <a:t>same corridor, same terminals — e.g. Soura–Lal Chowk = FDR-050 (211 runs)</a:t>
-            </a:r>
-          </a:p>
-        </p:txBody>
-      </p:sp>
-      <p:sp>
-        <p:nvSpPr>
-          <p:cNvPr id="8" name="Rounded Rectangle 7"/>
-          <p:cNvSpPr/>
-          <p:nvPr/>
-        </p:nvSpPr>
-        <p:spPr>
-          <a:xfrm>
-            <a:off x="502920" y="3328415"/>
-            <a:ext cx="6720840" cy="914400"/>
-          </a:xfrm>
-          <a:prstGeom prst="roundRect">
-            <a:avLst>
-              <a:gd name="adj" fmla="val 6000"/>
-            </a:avLst>
-          </a:prstGeom>
-          <a:solidFill>
-            <a:srgbClr val="E9F2EE"/>
-          </a:solidFill>
-          <a:ln>
-            <a:noFill/>
-          </a:ln>
-          <a:effectLst/>
-        </p:spPr>
-        <p:style>
-          <a:lnRef idx="1">
-            <a:schemeClr val="accent1"/>
-          </a:lnRef>
-          <a:fillRef idx="3">
-            <a:schemeClr val="accent1"/>
-          </a:fillRef>
-          <a:effectRef idx="2">
-            <a:schemeClr val="accent1"/>
-          </a:effectRef>
-          <a:fontRef idx="minor">
-            <a:schemeClr val="lt1"/>
-          </a:fontRef>
-        </p:style>
-        <p:txBody>
-          <a:bodyPr rtlCol="0" anchor="ctr"/>
-          <a:lstStyle/>
-          <a:p>
-            <a:pPr algn="ctr"/>
-          </a:p>
-        </p:txBody>
-      </p:sp>
-      <p:sp>
-        <p:nvSpPr>
-          <p:cNvPr id="9" name="TextBox 8"/>
-          <p:cNvSpPr txBox="1"/>
-          <p:nvPr/>
-        </p:nvSpPr>
-        <p:spPr>
-          <a:xfrm>
-            <a:off x="731520" y="3438144"/>
-            <a:ext cx="822960" cy="731520"/>
-          </a:xfrm>
-          <a:prstGeom prst="rect">
-            <a:avLst/>
-          </a:prstGeom>
-          <a:noFill/>
-        </p:spPr>
-        <p:txBody>
-          <a:bodyPr wrap="square" lIns="0" rIns="0" tIns="0" bIns="0">
-            <a:spAutoFit/>
-          </a:bodyPr>
-          <a:lstStyle/>
-          <a:p>
-            <a:pPr algn="l">
-              <a:spcAft>
-                <a:spcPts val="400"/>
-              </a:spcAft>
-            </a:pPr>
-            <a:r>
-              <a:rPr sz="2700" b="1" i="0">
-                <a:solidFill>
-                  <a:srgbClr val="D97706"/>
-                </a:solidFill>
-                <a:latin typeface="Cambria"/>
-              </a:rPr>
-              <a:t>8</a:t>
-            </a:r>
-          </a:p>
-        </p:txBody>
-      </p:sp>
-      <p:sp>
-        <p:nvSpPr>
-          <p:cNvPr id="10" name="TextBox 9"/>
-          <p:cNvSpPr txBox="1"/>
-          <p:nvPr/>
-        </p:nvSpPr>
-        <p:spPr>
-          <a:xfrm>
-            <a:off x="1600200" y="3456432"/>
-            <a:ext cx="5486400" cy="731520"/>
-          </a:xfrm>
-          <a:prstGeom prst="rect">
-            <a:avLst/>
-          </a:prstGeom>
-          <a:noFill/>
-        </p:spPr>
-        <p:txBody>
-          <a:bodyPr wrap="square" lIns="0" rIns="0" tIns="0" bIns="0">
-            <a:spAutoFit/>
-          </a:bodyPr>
-          <a:lstStyle/>
-          <a:p>
-            <a:pPr algn="l">
-              <a:spcAft>
-                <a:spcPts val="100"/>
-              </a:spcAft>
-            </a:pPr>
-            <a:r>
-              <a:rPr sz="1350" b="1" i="0">
-                <a:solidFill>
-                  <a:srgbClr val="102A2E"/>
-                </a:solidFill>
-                <a:latin typeface="Calibri"/>
-              </a:rPr>
-              <a:t>geometry diverges</a:t>
-            </a:r>
-          </a:p>
-          <a:p>
-            <a:pPr algn="l">
-              <a:spcAft>
-                <a:spcPts val="0"/>
-              </a:spcAft>
-            </a:pPr>
-            <a:r>
-              <a:rPr sz="1150" b="0" i="0">
-                <a:solidFill>
-                  <a:srgbClr val="5B6B6B"/>
-                </a:solidFill>
-                <a:latin typeface="Calibri"/>
-              </a:rPr>
-              <a:t>buses observably run a different alignment than the routed line → reconciliation list</a:t>
-            </a:r>
-          </a:p>
-        </p:txBody>
-      </p:sp>
-      <p:sp>
-        <p:nvSpPr>
-          <p:cNvPr id="11" name="Rounded Rectangle 10"/>
-          <p:cNvSpPr/>
-          <p:nvPr/>
-        </p:nvSpPr>
-        <p:spPr>
-          <a:xfrm>
-            <a:off x="502920" y="4370831"/>
-            <a:ext cx="6720840" cy="914400"/>
-          </a:xfrm>
-          <a:prstGeom prst="roundRect">
-            <a:avLst>
-              <a:gd name="adj" fmla="val 6000"/>
-            </a:avLst>
-          </a:prstGeom>
-          <a:solidFill>
-            <a:srgbClr val="E9F2EE"/>
-          </a:solidFill>
-          <a:ln>
-            <a:noFill/>
-          </a:ln>
-          <a:effectLst/>
-        </p:spPr>
-        <p:style>
-          <a:lnRef idx="1">
-            <a:schemeClr val="accent1"/>
-          </a:lnRef>
-          <a:fillRef idx="3">
-            <a:schemeClr val="accent1"/>
-          </a:fillRef>
-          <a:effectRef idx="2">
-            <a:schemeClr val="accent1"/>
-          </a:effectRef>
-          <a:fontRef idx="minor">
-            <a:schemeClr val="lt1"/>
-          </a:fontRef>
-        </p:style>
-        <p:txBody>
-          <a:bodyPr rtlCol="0" anchor="ctr"/>
-          <a:lstStyle/>
-          <a:p>
-            <a:pPr algn="ctr"/>
-          </a:p>
-        </p:txBody>
-      </p:sp>
-      <p:sp>
-        <p:nvSpPr>
-          <p:cNvPr id="12" name="TextBox 11"/>
-          <p:cNvSpPr txBox="1"/>
-          <p:nvPr/>
-        </p:nvSpPr>
-        <p:spPr>
-          <a:xfrm>
-            <a:off x="731520" y="4480559"/>
-            <a:ext cx="822960" cy="731520"/>
-          </a:xfrm>
-          <a:prstGeom prst="rect">
-            <a:avLst/>
-          </a:prstGeom>
-          <a:noFill/>
-        </p:spPr>
-        <p:txBody>
-          <a:bodyPr wrap="square" lIns="0" rIns="0" tIns="0" bIns="0">
-            <a:spAutoFit/>
-          </a:bodyPr>
-          <a:lstStyle/>
-          <a:p>
-            <a:pPr algn="l">
-              <a:spcAft>
-                <a:spcPts val="400"/>
-              </a:spcAft>
-            </a:pPr>
-            <a:r>
-              <a:rPr sz="2700" b="1" i="0">
-                <a:solidFill>
-                  <a:srgbClr val="5B6B6B"/>
-                </a:solidFill>
-                <a:latin typeface="Cambria"/>
-              </a:rPr>
-              <a:t>2</a:t>
-            </a:r>
-          </a:p>
-        </p:txBody>
-      </p:sp>
-      <p:sp>
-        <p:nvSpPr>
-          <p:cNvPr id="13" name="TextBox 12"/>
-          <p:cNvSpPr txBox="1"/>
-          <p:nvPr/>
-        </p:nvSpPr>
-        <p:spPr>
-          <a:xfrm>
-            <a:off x="1600200" y="4498847"/>
-            <a:ext cx="5486400" cy="731520"/>
-          </a:xfrm>
-          <a:prstGeom prst="rect">
-            <a:avLst/>
-          </a:prstGeom>
-          <a:noFill/>
-        </p:spPr>
-        <p:txBody>
-          <a:bodyPr wrap="square" lIns="0" rIns="0" tIns="0" bIns="0">
-            <a:spAutoFit/>
-          </a:bodyPr>
-          <a:lstStyle/>
-          <a:p>
-            <a:pPr algn="l">
-              <a:spcAft>
-                <a:spcPts val="100"/>
-              </a:spcAft>
-            </a:pPr>
-            <a:r>
-              <a:rPr sz="1350" b="1" i="0">
-                <a:solidFill>
-                  <a:srgbClr val="102A2E"/>
-                </a:solidFill>
-                <a:latin typeface="Calibri"/>
-              </a:rPr>
-              <a:t>outside Kashmir Division</a:t>
-            </a:r>
-          </a:p>
-          <a:p>
-            <a:pPr algn="l">
-              <a:spcAft>
-                <a:spcPts val="0"/>
-              </a:spcAft>
-            </a:pPr>
-            <a:r>
-              <a:rPr sz="1150" b="0" i="0">
-                <a:solidFill>
-                  <a:srgbClr val="5B6B6B"/>
-                </a:solidFill>
-                <a:latin typeface="Calibri"/>
-              </a:rPr>
-              <a:t>NH-44 / Jammu traffic — correctly excluded by the district clip</a:t>
-            </a:r>
-          </a:p>
-        </p:txBody>
-      </p:sp>
-      <p:sp>
-        <p:nvSpPr>
-          <p:cNvPr id="14" name="Rounded Rectangle 13"/>
-          <p:cNvSpPr/>
-          <p:nvPr/>
-        </p:nvSpPr>
-        <p:spPr>
-          <a:xfrm>
-            <a:off x="502920" y="5413247"/>
-            <a:ext cx="6720840" cy="914400"/>
-          </a:xfrm>
-          <a:prstGeom prst="roundRect">
-            <a:avLst>
-              <a:gd name="adj" fmla="val 6000"/>
-            </a:avLst>
-          </a:prstGeom>
-          <a:solidFill>
-            <a:srgbClr val="E9F2EE"/>
-          </a:solidFill>
-          <a:ln>
-            <a:noFill/>
-          </a:ln>
-          <a:effectLst/>
-        </p:spPr>
-        <p:style>
-          <a:lnRef idx="1">
-            <a:schemeClr val="accent1"/>
-          </a:lnRef>
-          <a:fillRef idx="3">
-            <a:schemeClr val="accent1"/>
-          </a:fillRef>
-          <a:effectRef idx="2">
-            <a:schemeClr val="accent1"/>
-          </a:effectRef>
-          <a:fontRef idx="minor">
-            <a:schemeClr val="lt1"/>
-          </a:fontRef>
-        </p:style>
-        <p:txBody>
-          <a:bodyPr rtlCol="0" anchor="ctr"/>
-          <a:lstStyle/>
-          <a:p>
-            <a:pPr algn="ctr"/>
-          </a:p>
-        </p:txBody>
-      </p:sp>
-      <p:sp>
-        <p:nvSpPr>
-          <p:cNvPr id="15" name="TextBox 14"/>
-          <p:cNvSpPr txBox="1"/>
-          <p:nvPr/>
-        </p:nvSpPr>
-        <p:spPr>
-          <a:xfrm>
-            <a:off x="731520" y="5522975"/>
-            <a:ext cx="822960" cy="731520"/>
-          </a:xfrm>
-          <a:prstGeom prst="rect">
-            <a:avLst/>
-          </a:prstGeom>
-          <a:noFill/>
-        </p:spPr>
-        <p:txBody>
-          <a:bodyPr wrap="square" lIns="0" rIns="0" tIns="0" bIns="0">
-            <a:spAutoFit/>
-          </a:bodyPr>
-          <a:lstStyle/>
-          <a:p>
-            <a:pPr algn="l">
-              <a:spcAft>
-                <a:spcPts val="400"/>
-              </a:spcAft>
-            </a:pPr>
-            <a:r>
-              <a:rPr sz="2700" b="1" i="0">
-                <a:solidFill>
-                  <a:srgbClr val="5B6B6B"/>
-                </a:solidFill>
-                <a:latin typeface="Cambria"/>
-              </a:rPr>
-              <a:t>1</a:t>
-            </a:r>
-          </a:p>
-        </p:txBody>
-      </p:sp>
-      <p:sp>
-        <p:nvSpPr>
-          <p:cNvPr id="16" name="TextBox 15"/>
-          <p:cNvSpPr txBox="1"/>
-          <p:nvPr/>
-        </p:nvSpPr>
-        <p:spPr>
-          <a:xfrm>
-            <a:off x="1600200" y="5541263"/>
-            <a:ext cx="5486400" cy="731520"/>
-          </a:xfrm>
-          <a:prstGeom prst="rect">
-            <a:avLst/>
-          </a:prstGeom>
-          <a:noFill/>
-        </p:spPr>
-        <p:txBody>
-          <a:bodyPr wrap="square" lIns="0" rIns="0" tIns="0" bIns="0">
-            <a:spAutoFit/>
-          </a:bodyPr>
-          <a:lstStyle/>
-          <a:p>
-            <a:pPr algn="l">
-              <a:spcAft>
-                <a:spcPts val="100"/>
-              </a:spcAft>
-            </a:pPr>
-            <a:r>
-              <a:rPr sz="1350" b="1" i="0">
-                <a:solidFill>
-                  <a:srgbClr val="102A2E"/>
-                </a:solidFill>
-                <a:latin typeface="Calibri"/>
-              </a:rPr>
-              <a:t>data artifact</a:t>
-            </a:r>
-          </a:p>
-          <a:p>
-            <a:pPr algn="l">
-              <a:spcAft>
-                <a:spcPts val="0"/>
-              </a:spcAft>
-            </a:pPr>
-            <a:r>
-              <a:rPr sz="1150" b="0" i="0">
-                <a:solidFill>
-                  <a:srgbClr val="5B6B6B"/>
-                </a:solidFill>
-                <a:latin typeface="Calibri"/>
-              </a:rPr>
-              <a:t>near-stationary terminal idling; excluded and the filter fixed</a:t>
-            </a:r>
-          </a:p>
-        </p:txBody>
-      </p:sp>
-      <p:sp>
-        <p:nvSpPr>
-          <p:cNvPr id="17" name="Rounded Rectangle 16"/>
-          <p:cNvSpPr/>
-          <p:nvPr/>
-        </p:nvSpPr>
-        <p:spPr>
-          <a:xfrm>
-            <a:off x="7498079" y="2286000"/>
-            <a:ext cx="4160520" cy="4023360"/>
-          </a:xfrm>
-          <a:prstGeom prst="roundRect">
-            <a:avLst>
-              <a:gd name="adj" fmla="val 6000"/>
-            </a:avLst>
-          </a:prstGeom>
-          <a:solidFill>
-            <a:srgbClr val="0A3D33"/>
-          </a:solidFill>
-          <a:ln>
-            <a:noFill/>
-          </a:ln>
-          <a:effectLst/>
-        </p:spPr>
-        <p:style>
-          <a:lnRef idx="1">
-            <a:schemeClr val="accent1"/>
-          </a:lnRef>
-          <a:fillRef idx="3">
-            <a:schemeClr val="accent1"/>
-          </a:fillRef>
-          <a:effectRef idx="2">
-            <a:schemeClr val="accent1"/>
-          </a:effectRef>
-          <a:fontRef idx="minor">
-            <a:schemeClr val="lt1"/>
-          </a:fontRef>
-        </p:style>
-        <p:txBody>
-          <a:bodyPr rtlCol="0" anchor="ctr"/>
-          <a:lstStyle/>
-          <a:p>
-            <a:pPr algn="ctr"/>
-          </a:p>
-        </p:txBody>
-      </p:sp>
-      <p:sp>
-        <p:nvSpPr>
-          <p:cNvPr id="18" name="TextBox 17"/>
-          <p:cNvSpPr txBox="1"/>
-          <p:nvPr/>
-        </p:nvSpPr>
-        <p:spPr>
-          <a:xfrm>
-            <a:off x="7772400" y="2514600"/>
-            <a:ext cx="3611880" cy="3566160"/>
-          </a:xfrm>
-          <a:prstGeom prst="rect">
-            <a:avLst/>
-          </a:prstGeom>
-          <a:noFill/>
-        </p:spPr>
-        <p:txBody>
-          <a:bodyPr wrap="square" lIns="0" rIns="0" tIns="0" bIns="0">
-            <a:spAutoFit/>
-          </a:bodyPr>
-          <a:lstStyle/>
-          <a:p>
-            <a:pPr algn="l">
-              <a:spcAft>
-                <a:spcPts val="400"/>
-              </a:spcAft>
-            </a:pPr>
-            <a:r>
-              <a:rPr sz="4800" b="1" i="0">
-                <a:solidFill>
-                  <a:srgbClr val="FFFFFF"/>
-                </a:solidFill>
-                <a:latin typeface="Cambria"/>
-              </a:rPr>
-              <a:t>0</a:t>
-            </a:r>
-          </a:p>
-          <a:p>
-            <a:pPr algn="l">
-              <a:spcAft>
-                <a:spcPts val="800"/>
-              </a:spcAft>
-            </a:pPr>
-            <a:r>
-              <a:rPr sz="1500" b="1" i="0">
-                <a:solidFill>
-                  <a:srgbClr val="FFFFFF"/>
-                </a:solidFill>
-                <a:latin typeface="Calibri"/>
-              </a:rPr>
-              <a:t>informal / unpermitted routes</a:t>
-            </a:r>
-          </a:p>
-          <a:p>
-            <a:pPr algn="l">
-              <a:spcAft>
-                <a:spcPts val="800"/>
-              </a:spcAft>
-            </a:pPr>
-            <a:r>
-              <a:rPr sz="1200" b="0" i="0">
-                <a:solidFill>
-                  <a:srgbClr val="C9E2D8"/>
-                </a:solidFill>
-                <a:latin typeface="Calibri"/>
-              </a:rPr>
-              <a:t>An early “under-permitted cluster” finding was RETRACTED after checking the raw 614-permit register — those areas are heavily permitted. The honest signal is geometry divergence, not illegal operation.</a:t>
-            </a:r>
-          </a:p>
-          <a:p>
-            <a:pPr algn="l">
-              <a:spcAft>
-                <a:spcPts val="0"/>
-              </a:spcAft>
-            </a:pPr>
-            <a:r>
-              <a:rPr sz="1100" b="0" i="1">
-                <a:solidFill>
-                  <a:srgbClr val="9FBFB3"/>
-                </a:solidFill>
-                <a:latin typeface="Calibri"/>
-              </a:rPr>
-              <a:t>The audit trail (verdict + correction per corridor) ships with the repo.</a:t>
+              <a:t>Left: one raw Firestore session (7,906 points — a whole working day). Right: the same session decomposed into 10 idle-trimmed service runs, each with its own realistic distance and duration.</a:t>
             </a:r>
           </a:p>
         </p:txBody>
@@ -6500,7 +8421,7 @@
                 </a:solidFill>
                 <a:latin typeface="Calibri"/>
               </a:rPr>
-              <a:t>STEP 3 — MEASUREMENT</a:t>
+              <a:t>QUALITY GATE</a:t>
             </a:r>
           </a:p>
           <a:p>
@@ -6516,73 +8437,35 @@
                 </a:solidFill>
                 <a:latin typeface="Cambria"/>
               </a:rPr>
-              <a:t>The first measured bus speeds for Srinagar</a:t>
-            </a:r>
-          </a:p>
-          <a:p>
-            <a:pPr algn="l">
-              <a:spcAft>
-                <a:spcPts val="0"/>
-              </a:spcAft>
-            </a:pPr>
-            <a:r>
-              <a:rPr sz="1300" b="0" i="0">
-                <a:solidFill>
-                  <a:srgbClr val="5B6B6B"/>
-                </a:solidFill>
-                <a:latin typeface="Calibri"/>
-              </a:rPr>
-              <a:t>Not modelled, not assumed — computed from consecutive GPS fixes of buses in revenue service.</a:t>
-            </a:r>
-          </a:p>
-        </p:txBody>
-      </p:sp>
-      <p:sp>
-        <p:nvSpPr>
-          <p:cNvPr id="4" name="Rounded Rectangle 3"/>
-          <p:cNvSpPr/>
-          <p:nvPr/>
-        </p:nvSpPr>
-        <p:spPr>
-          <a:xfrm>
-            <a:off x="502920" y="1691640"/>
-            <a:ext cx="2615184" cy="1481328"/>
-          </a:xfrm>
-          <a:prstGeom prst="roundRect">
-            <a:avLst>
-              <a:gd name="adj" fmla="val 6000"/>
-            </a:avLst>
-          </a:prstGeom>
-          <a:solidFill>
-            <a:srgbClr val="E9F2EE"/>
-          </a:solidFill>
-          <a:ln>
-            <a:noFill/>
-          </a:ln>
-          <a:effectLst/>
-        </p:spPr>
-        <p:style>
-          <a:lnRef idx="1">
-            <a:schemeClr val="accent1"/>
-          </a:lnRef>
-          <a:fillRef idx="3">
-            <a:schemeClr val="accent1"/>
-          </a:fillRef>
-          <a:effectRef idx="2">
-            <a:schemeClr val="accent1"/>
-          </a:effectRef>
-          <a:fontRef idx="minor">
-            <a:schemeClr val="lt1"/>
-          </a:fontRef>
-        </p:style>
-        <p:txBody>
-          <a:bodyPr rtlCol="0" anchor="ctr"/>
-          <a:lstStyle/>
-          <a:p>
-            <a:pPr algn="ctr"/>
-          </a:p>
-        </p:txBody>
-      </p:sp>
+              <a:t>Raw GPS (red) vs road-matched (green)</a:t>
+            </a:r>
+          </a:p>
+        </p:txBody>
+      </p:sp>
+      <p:pic>
+        <p:nvPicPr>
+          <p:cNvPr id="4" name="Picture 3" descr="sample_before_after.png"/>
+          <p:cNvPicPr>
+            <a:picLocks noChangeAspect="1"/>
+          </p:cNvPicPr>
+          <p:nvPr/>
+        </p:nvPicPr>
+        <p:blipFill>
+          <a:blip r:embed="rId2"/>
+          <a:stretch>
+            <a:fillRect/>
+          </a:stretch>
+        </p:blipFill>
+        <p:spPr>
+          <a:xfrm>
+            <a:off x="2514600" y="1298448"/>
+            <a:ext cx="7178040" cy="4762999"/>
+          </a:xfrm>
+          <a:prstGeom prst="rect">
+            <a:avLst/>
+          </a:prstGeom>
+        </p:spPr>
+      </p:pic>
       <p:sp>
         <p:nvSpPr>
           <p:cNvPr id="5" name="TextBox 4"/>
@@ -6591,8 +8474,8 @@
         </p:nvSpPr>
         <p:spPr>
           <a:xfrm>
-            <a:off x="667512" y="1819656"/>
-            <a:ext cx="2286000" cy="1243584"/>
+            <a:off x="1051560" y="6144768"/>
+            <a:ext cx="10058400" cy="457200"/>
           </a:xfrm>
           <a:prstGeom prst="rect">
             <a:avLst/>
@@ -6605,542 +8488,19 @@
           </a:bodyPr>
           <a:lstStyle/>
           <a:p>
-            <a:pPr algn="l">
-              <a:spcAft>
-                <a:spcPts val="400"/>
-              </a:spcAft>
-            </a:pPr>
-            <a:r>
-              <a:rPr sz="3000" b="1" i="0">
-                <a:solidFill>
-                  <a:srgbClr val="0F6E56"/>
-                </a:solidFill>
-                <a:latin typeface="Cambria"/>
-              </a:rPr>
-              <a:t>21 km/h</a:t>
-            </a:r>
-          </a:p>
-          <a:p>
-            <a:pPr algn="l">
-              <a:spcAft>
-                <a:spcPts val="400"/>
-              </a:spcAft>
-            </a:pPr>
-            <a:r>
-              <a:rPr sz="1250" b="1" i="0">
-                <a:solidFill>
-                  <a:srgbClr val="102A2E"/>
-                </a:solidFill>
-                <a:latin typeface="Calibri"/>
-              </a:rPr>
-              <a:t>moving speed</a:t>
-            </a:r>
-          </a:p>
-          <a:p>
-            <a:pPr algn="l">
+            <a:pPr algn="ctr">
               <a:spcAft>
                 <a:spcPts val="0"/>
               </a:spcAft>
             </a:pPr>
             <a:r>
-              <a:rPr sz="1000" b="0" i="0">
+              <a:rPr sz="1150" b="0" i="1">
                 <a:solidFill>
                   <a:srgbClr val="5B6B6B"/>
                 </a:solidFill>
                 <a:latin typeface="Calibri"/>
               </a:rPr>
-              <a:t>median while the bus is in motion</a:t>
-            </a:r>
-          </a:p>
-        </p:txBody>
-      </p:sp>
-      <p:sp>
-        <p:nvSpPr>
-          <p:cNvPr id="6" name="Rounded Rectangle 5"/>
-          <p:cNvSpPr/>
-          <p:nvPr/>
-        </p:nvSpPr>
-        <p:spPr>
-          <a:xfrm>
-            <a:off x="3465576" y="1691640"/>
-            <a:ext cx="2615184" cy="1481328"/>
-          </a:xfrm>
-          <a:prstGeom prst="roundRect">
-            <a:avLst>
-              <a:gd name="adj" fmla="val 6000"/>
-            </a:avLst>
-          </a:prstGeom>
-          <a:solidFill>
-            <a:srgbClr val="E9F2EE"/>
-          </a:solidFill>
-          <a:ln>
-            <a:noFill/>
-          </a:ln>
-          <a:effectLst/>
-        </p:spPr>
-        <p:style>
-          <a:lnRef idx="1">
-            <a:schemeClr val="accent1"/>
-          </a:lnRef>
-          <a:fillRef idx="3">
-            <a:schemeClr val="accent1"/>
-          </a:fillRef>
-          <a:effectRef idx="2">
-            <a:schemeClr val="accent1"/>
-          </a:effectRef>
-          <a:fontRef idx="minor">
-            <a:schemeClr val="lt1"/>
-          </a:fontRef>
-        </p:style>
-        <p:txBody>
-          <a:bodyPr rtlCol="0" anchor="ctr"/>
-          <a:lstStyle/>
-          <a:p>
-            <a:pPr algn="ctr"/>
-          </a:p>
-        </p:txBody>
-      </p:sp>
-      <p:sp>
-        <p:nvSpPr>
-          <p:cNvPr id="7" name="TextBox 6"/>
-          <p:cNvSpPr txBox="1"/>
-          <p:nvPr/>
-        </p:nvSpPr>
-        <p:spPr>
-          <a:xfrm>
-            <a:off x="3630168" y="1819656"/>
-            <a:ext cx="2286000" cy="1243584"/>
-          </a:xfrm>
-          <a:prstGeom prst="rect">
-            <a:avLst/>
-          </a:prstGeom>
-          <a:noFill/>
-        </p:spPr>
-        <p:txBody>
-          <a:bodyPr wrap="square" lIns="0" rIns="0" tIns="0" bIns="0">
-            <a:spAutoFit/>
-          </a:bodyPr>
-          <a:lstStyle/>
-          <a:p>
-            <a:pPr algn="l">
-              <a:spcAft>
-                <a:spcPts val="400"/>
-              </a:spcAft>
-            </a:pPr>
-            <a:r>
-              <a:rPr sz="3000" b="1" i="0">
-                <a:solidFill>
-                  <a:srgbClr val="0F6E56"/>
-                </a:solidFill>
-                <a:latin typeface="Cambria"/>
-              </a:rPr>
-              <a:t>12.5 km/h</a:t>
-            </a:r>
-          </a:p>
-          <a:p>
-            <a:pPr algn="l">
-              <a:spcAft>
-                <a:spcPts val="400"/>
-              </a:spcAft>
-            </a:pPr>
-            <a:r>
-              <a:rPr sz="1250" b="1" i="0">
-                <a:solidFill>
-                  <a:srgbClr val="102A2E"/>
-                </a:solidFill>
-                <a:latin typeface="Calibri"/>
-              </a:rPr>
-              <a:t>effective speed</a:t>
-            </a:r>
-          </a:p>
-          <a:p>
-            <a:pPr algn="l">
-              <a:spcAft>
-                <a:spcPts val="0"/>
-              </a:spcAft>
-            </a:pPr>
-            <a:r>
-              <a:rPr sz="1000" b="0" i="0">
-                <a:solidFill>
-                  <a:srgbClr val="5B6B6B"/>
-                </a:solidFill>
-                <a:latin typeface="Calibri"/>
-              </a:rPr>
-              <a:t>including every service stop</a:t>
-            </a:r>
-          </a:p>
-        </p:txBody>
-      </p:sp>
-      <p:sp>
-        <p:nvSpPr>
-          <p:cNvPr id="8" name="Rounded Rectangle 7"/>
-          <p:cNvSpPr/>
-          <p:nvPr/>
-        </p:nvSpPr>
-        <p:spPr>
-          <a:xfrm>
-            <a:off x="6428232" y="1691640"/>
-            <a:ext cx="2615184" cy="1481328"/>
-          </a:xfrm>
-          <a:prstGeom prst="roundRect">
-            <a:avLst>
-              <a:gd name="adj" fmla="val 6000"/>
-            </a:avLst>
-          </a:prstGeom>
-          <a:solidFill>
-            <a:srgbClr val="E9F2EE"/>
-          </a:solidFill>
-          <a:ln>
-            <a:noFill/>
-          </a:ln>
-          <a:effectLst/>
-        </p:spPr>
-        <p:style>
-          <a:lnRef idx="1">
-            <a:schemeClr val="accent1"/>
-          </a:lnRef>
-          <a:fillRef idx="3">
-            <a:schemeClr val="accent1"/>
-          </a:fillRef>
-          <a:effectRef idx="2">
-            <a:schemeClr val="accent1"/>
-          </a:effectRef>
-          <a:fontRef idx="minor">
-            <a:schemeClr val="lt1"/>
-          </a:fontRef>
-        </p:style>
-        <p:txBody>
-          <a:bodyPr rtlCol="0" anchor="ctr"/>
-          <a:lstStyle/>
-          <a:p>
-            <a:pPr algn="ctr"/>
-          </a:p>
-        </p:txBody>
-      </p:sp>
-      <p:sp>
-        <p:nvSpPr>
-          <p:cNvPr id="9" name="TextBox 8"/>
-          <p:cNvSpPr txBox="1"/>
-          <p:nvPr/>
-        </p:nvSpPr>
-        <p:spPr>
-          <a:xfrm>
-            <a:off x="6592824" y="1819656"/>
-            <a:ext cx="2286000" cy="1243584"/>
-          </a:xfrm>
-          <a:prstGeom prst="rect">
-            <a:avLst/>
-          </a:prstGeom>
-          <a:noFill/>
-        </p:spPr>
-        <p:txBody>
-          <a:bodyPr wrap="square" lIns="0" rIns="0" tIns="0" bIns="0">
-            <a:spAutoFit/>
-          </a:bodyPr>
-          <a:lstStyle/>
-          <a:p>
-            <a:pPr algn="l">
-              <a:spcAft>
-                <a:spcPts val="400"/>
-              </a:spcAft>
-            </a:pPr>
-            <a:r>
-              <a:rPr sz="3000" b="1" i="0">
-                <a:solidFill>
-                  <a:srgbClr val="0F6E56"/>
-                </a:solidFill>
-                <a:latin typeface="Cambria"/>
-              </a:rPr>
-              <a:t>37%</a:t>
-            </a:r>
-          </a:p>
-          <a:p>
-            <a:pPr algn="l">
-              <a:spcAft>
-                <a:spcPts val="400"/>
-              </a:spcAft>
-            </a:pPr>
-            <a:r>
-              <a:rPr sz="1250" b="1" i="0">
-                <a:solidFill>
-                  <a:srgbClr val="102A2E"/>
-                </a:solidFill>
-                <a:latin typeface="Calibri"/>
-              </a:rPr>
-              <a:t>of run time at stops</a:t>
-            </a:r>
-          </a:p>
-          <a:p>
-            <a:pPr algn="l">
-              <a:spcAft>
-                <a:spcPts val="0"/>
-              </a:spcAft>
-            </a:pPr>
-            <a:r>
-              <a:rPr sz="1000" b="0" i="0">
-                <a:solidFill>
-                  <a:srgbClr val="5B6B6B"/>
-                </a:solidFill>
-                <a:latin typeface="Calibri"/>
-              </a:rPr>
-              <a:t>boarding + waiting dwell share</a:t>
-            </a:r>
-          </a:p>
-        </p:txBody>
-      </p:sp>
-      <p:sp>
-        <p:nvSpPr>
-          <p:cNvPr id="10" name="Rounded Rectangle 9"/>
-          <p:cNvSpPr/>
-          <p:nvPr/>
-        </p:nvSpPr>
-        <p:spPr>
-          <a:xfrm>
-            <a:off x="9390888" y="1691640"/>
-            <a:ext cx="2615184" cy="1481328"/>
-          </a:xfrm>
-          <a:prstGeom prst="roundRect">
-            <a:avLst>
-              <a:gd name="adj" fmla="val 6000"/>
-            </a:avLst>
-          </a:prstGeom>
-          <a:solidFill>
-            <a:srgbClr val="E9F2EE"/>
-          </a:solidFill>
-          <a:ln>
-            <a:noFill/>
-          </a:ln>
-          <a:effectLst/>
-        </p:spPr>
-        <p:style>
-          <a:lnRef idx="1">
-            <a:schemeClr val="accent1"/>
-          </a:lnRef>
-          <a:fillRef idx="3">
-            <a:schemeClr val="accent1"/>
-          </a:fillRef>
-          <a:effectRef idx="2">
-            <a:schemeClr val="accent1"/>
-          </a:effectRef>
-          <a:fontRef idx="minor">
-            <a:schemeClr val="lt1"/>
-          </a:fontRef>
-        </p:style>
-        <p:txBody>
-          <a:bodyPr rtlCol="0" anchor="ctr"/>
-          <a:lstStyle/>
-          <a:p>
-            <a:pPr algn="ctr"/>
-          </a:p>
-        </p:txBody>
-      </p:sp>
-      <p:sp>
-        <p:nvSpPr>
-          <p:cNvPr id="11" name="TextBox 10"/>
-          <p:cNvSpPr txBox="1"/>
-          <p:nvPr/>
-        </p:nvSpPr>
-        <p:spPr>
-          <a:xfrm>
-            <a:off x="9555480" y="1819656"/>
-            <a:ext cx="2286000" cy="1243584"/>
-          </a:xfrm>
-          <a:prstGeom prst="rect">
-            <a:avLst/>
-          </a:prstGeom>
-          <a:noFill/>
-        </p:spPr>
-        <p:txBody>
-          <a:bodyPr wrap="square" lIns="0" rIns="0" tIns="0" bIns="0">
-            <a:spAutoFit/>
-          </a:bodyPr>
-          <a:lstStyle/>
-          <a:p>
-            <a:pPr algn="l">
-              <a:spcAft>
-                <a:spcPts val="400"/>
-              </a:spcAft>
-            </a:pPr>
-            <a:r>
-              <a:rPr sz="3000" b="1" i="0">
-                <a:solidFill>
-                  <a:srgbClr val="0F6E56"/>
-                </a:solidFill>
-                <a:latin typeface="Cambria"/>
-              </a:rPr>
-              <a:t>17 vs 24</a:t>
-            </a:r>
-          </a:p>
-          <a:p>
-            <a:pPr algn="l">
-              <a:spcAft>
-                <a:spcPts val="400"/>
-              </a:spcAft>
-            </a:pPr>
-            <a:r>
-              <a:rPr sz="1250" b="1" i="0">
-                <a:solidFill>
-                  <a:srgbClr val="102A2E"/>
-                </a:solidFill>
-                <a:latin typeface="Calibri"/>
-              </a:rPr>
-              <a:t>core vs periphery km/h</a:t>
-            </a:r>
-          </a:p>
-          <a:p>
-            <a:pPr algn="l">
-              <a:spcAft>
-                <a:spcPts val="0"/>
-              </a:spcAft>
-            </a:pPr>
-            <a:r>
-              <a:rPr sz="1000" b="0" i="0">
-                <a:solidFill>
-                  <a:srgbClr val="5B6B6B"/>
-                </a:solidFill>
-                <a:latin typeface="Calibri"/>
-              </a:rPr>
-              <a:t>10,600-cell congestion heatmap</a:t>
-            </a:r>
-          </a:p>
-        </p:txBody>
-      </p:sp>
-      <p:sp>
-        <p:nvSpPr>
-          <p:cNvPr id="12" name="TextBox 11"/>
-          <p:cNvSpPr txBox="1"/>
-          <p:nvPr/>
-        </p:nvSpPr>
-        <p:spPr>
-          <a:xfrm>
-            <a:off x="502920" y="3566160"/>
-            <a:ext cx="11155680" cy="502920"/>
-          </a:xfrm>
-          <a:prstGeom prst="rect">
-            <a:avLst/>
-          </a:prstGeom>
-          <a:noFill/>
-        </p:spPr>
-        <p:txBody>
-          <a:bodyPr wrap="square" lIns="0" rIns="0" tIns="0" bIns="0">
-            <a:spAutoFit/>
-          </a:bodyPr>
-          <a:lstStyle/>
-          <a:p>
-            <a:pPr algn="l">
-              <a:spcAft>
-                <a:spcPts val="400"/>
-              </a:spcAft>
-            </a:pPr>
-            <a:r>
-              <a:rPr sz="1400" b="1" i="0">
-                <a:solidFill>
-                  <a:srgbClr val="102A2E"/>
-                </a:solidFill>
-                <a:latin typeface="Calibri"/>
-              </a:rPr>
-              <a:t>Why this matters to the plan:</a:t>
-            </a:r>
-          </a:p>
-        </p:txBody>
-      </p:sp>
-      <p:sp>
-        <p:nvSpPr>
-          <p:cNvPr id="13" name="Rounded Rectangle 12"/>
-          <p:cNvSpPr/>
-          <p:nvPr/>
-        </p:nvSpPr>
-        <p:spPr>
-          <a:xfrm>
-            <a:off x="502920" y="4069080"/>
-            <a:ext cx="11155680" cy="1554480"/>
-          </a:xfrm>
-          <a:prstGeom prst="roundRect">
-            <a:avLst>
-              <a:gd name="adj" fmla="val 6000"/>
-            </a:avLst>
-          </a:prstGeom>
-          <a:solidFill>
-            <a:srgbClr val="E9F2EE"/>
-          </a:solidFill>
-          <a:ln>
-            <a:noFill/>
-          </a:ln>
-          <a:effectLst/>
-        </p:spPr>
-        <p:style>
-          <a:lnRef idx="1">
-            <a:schemeClr val="accent1"/>
-          </a:lnRef>
-          <a:fillRef idx="3">
-            <a:schemeClr val="accent1"/>
-          </a:fillRef>
-          <a:effectRef idx="2">
-            <a:schemeClr val="accent1"/>
-          </a:effectRef>
-          <a:fontRef idx="minor">
-            <a:schemeClr val="lt1"/>
-          </a:fontRef>
-        </p:style>
-        <p:txBody>
-          <a:bodyPr rtlCol="0" anchor="ctr"/>
-          <a:lstStyle/>
-          <a:p>
-            <a:pPr algn="ctr"/>
-          </a:p>
-        </p:txBody>
-      </p:sp>
-      <p:sp>
-        <p:nvSpPr>
-          <p:cNvPr id="14" name="TextBox 13"/>
-          <p:cNvSpPr txBox="1"/>
-          <p:nvPr/>
-        </p:nvSpPr>
-        <p:spPr>
-          <a:xfrm>
-            <a:off x="777240" y="4279392"/>
-            <a:ext cx="10607040" cy="1737360"/>
-          </a:xfrm>
-          <a:prstGeom prst="rect">
-            <a:avLst/>
-          </a:prstGeom>
-          <a:noFill/>
-        </p:spPr>
-        <p:txBody>
-          <a:bodyPr wrap="square" lIns="0" rIns="0" tIns="0" bIns="0">
-            <a:spAutoFit/>
-          </a:bodyPr>
-          <a:lstStyle/>
-          <a:p>
-            <a:pPr algn="l">
-              <a:spcAft>
-                <a:spcPts val="400"/>
-              </a:spcAft>
-            </a:pPr>
-            <a:r>
-              <a:rPr sz="1300" b="0" i="0">
-                <a:solidFill>
-                  <a:srgbClr val="102A2E"/>
-                </a:solidFill>
-                <a:latin typeface="Calibri"/>
-              </a:rPr>
-              <a:t>The engine estimates drive time from OSRM's car profile — which implies 55–137 km/h “free flow” on these roads. Its congestion penalties close much of that gap, but a car model can never know how a crowded 9-metre bus actually moves through Batamaloo at 5 pm.</a:t>
-            </a:r>
-          </a:p>
-          <a:p>
-            <a:pPr algn="l">
-              <a:spcAft>
-                <a:spcPts val="0"/>
-              </a:spcAft>
-            </a:pPr>
-            <a:r>
-              <a:rPr sz="1350" b="1" i="0">
-                <a:solidFill>
-                  <a:srgbClr val="0F6E56"/>
-                </a:solidFill>
-                <a:latin typeface="Calibri"/>
-              </a:rPr>
-              <a:t>This layer replaces assumption with measurement — per 100 m grid cell, per corridor, per hour.</a:t>
+              <a:t>On genuine runs the matched line hugs the raw trace. The top-right panel is parked-vehicle GPS scribble — exactly what the agreement gate rejects before any analysis.</a:t>
             </a:r>
           </a:p>
         </p:txBody>
@@ -7241,7 +8601,7 @@
                 </a:solidFill>
                 <a:latin typeface="Calibri"/>
               </a:rPr>
-              <a:t>STEP 4 — OPERATIONS</a:t>
+              <a:t>STEP 2 — VERIFICATION</a:t>
             </a:r>
           </a:p>
           <a:p>
@@ -7257,7 +8617,7 @@
                 </a:solidFill>
                 <a:latin typeface="Cambria"/>
               </a:rPr>
-              <a:t>What a driver's day actually looks like</a:t>
+              <a:t>18 observed corridors, each judged one by one</a:t>
             </a:r>
           </a:p>
           <a:p>
@@ -7273,21 +8633,60 @@
                 </a:solidFill>
                 <a:latin typeface="Calibri"/>
               </a:rPr>
-              <a:t>855 measured driver-days — duty spans, utilisation, terminal turnarounds and the shape of the service day.</a:t>
-            </a:r>
-          </a:p>
-        </p:txBody>
-      </p:sp>
-      <p:sp>
-        <p:nvSpPr>
-          <p:cNvPr id="4" name="Rounded Rectangle 3"/>
+              <a:t>Endpoint clustering (≥3 distinct drivers per terminal) grouped the clean runs into 25 corridors; the 18 with real support (≥5 runs, ≥2 drivers) each got an evidence file and an individual AI-analyst verdict.</a:t>
+            </a:r>
+          </a:p>
+        </p:txBody>
+      </p:sp>
+      <p:sp>
+        <p:nvSpPr>
+          <p:cNvPr id="4" name="TextBox 3"/>
+          <p:cNvSpPr txBox="1"/>
+          <p:nvPr/>
+        </p:nvSpPr>
+        <p:spPr>
+          <a:xfrm>
+            <a:off x="502920" y="1828800"/>
+            <a:ext cx="5486400" cy="365760"/>
+          </a:xfrm>
+          <a:prstGeom prst="rect">
+            <a:avLst/>
+          </a:prstGeom>
+          <a:noFill/>
+        </p:spPr>
+        <p:txBody>
+          <a:bodyPr wrap="square" lIns="0" rIns="0" tIns="0" bIns="0">
+            <a:spAutoFit/>
+          </a:bodyPr>
+          <a:lstStyle/>
+          <a:p>
+            <a:pPr algn="l">
+              <a:spcAft>
+                <a:spcPts val="400"/>
+              </a:spcAft>
+            </a:pPr>
+            <a:r>
+              <a:rPr sz="1500" b="1" i="0">
+                <a:solidFill>
+                  <a:srgbClr val="102A2E"/>
+                </a:solidFill>
+                <a:latin typeface="Cambria"/>
+              </a:rPr>
+              <a:t>Verdicts vs the plan's routes</a:t>
+            </a:r>
+          </a:p>
+        </p:txBody>
+      </p:sp>
+      <p:sp>
+        <p:nvSpPr>
+          <p:cNvPr id="5" name="Rounded Rectangle 4"/>
           <p:cNvSpPr/>
           <p:nvPr/>
         </p:nvSpPr>
         <p:spPr>
           <a:xfrm>
-            <a:off x="502920" y="1691640"/>
-            <a:ext cx="2615184" cy="1481328"/>
+            <a:off x="502920" y="2286000"/>
+            <a:ext cx="6720840" cy="914400"/>
           </a:xfrm>
           <a:prstGeom prst="roundRect">
             <a:avLst>
@@ -7326,14 +8725,14 @@
       </p:sp>
       <p:sp>
         <p:nvSpPr>
-          <p:cNvPr id="5" name="TextBox 4"/>
+          <p:cNvPr id="6" name="TextBox 5"/>
           <p:cNvSpPr txBox="1"/>
           <p:nvPr/>
         </p:nvSpPr>
         <p:spPr>
           <a:xfrm>
-            <a:off x="667512" y="1819656"/>
-            <a:ext cx="2286000" cy="1243584"/>
+            <a:off x="731520" y="2395728"/>
+            <a:ext cx="822960" cy="731520"/>
           </a:xfrm>
           <a:prstGeom prst="rect">
             <a:avLst/>
@@ -7352,29 +8751,52 @@
               </a:spcAft>
             </a:pPr>
             <a:r>
-              <a:rPr sz="3000" b="1" i="0">
+              <a:rPr sz="2700" b="1" i="0">
                 <a:solidFill>
                   <a:srgbClr val="0F6E56"/>
                 </a:solidFill>
                 <a:latin typeface="Cambria"/>
               </a:rPr>
-              <a:t>7.9 h</a:t>
-            </a:r>
-          </a:p>
-          <a:p>
-            <a:pPr algn="l">
-              <a:spcAft>
-                <a:spcPts val="400"/>
-              </a:spcAft>
-            </a:pPr>
-            <a:r>
-              <a:rPr sz="1250" b="1" i="0">
+              <a:t>7</a:t>
+            </a:r>
+          </a:p>
+        </p:txBody>
+      </p:sp>
+      <p:sp>
+        <p:nvSpPr>
+          <p:cNvPr id="7" name="TextBox 6"/>
+          <p:cNvSpPr txBox="1"/>
+          <p:nvPr/>
+        </p:nvSpPr>
+        <p:spPr>
+          <a:xfrm>
+            <a:off x="1600200" y="2414016"/>
+            <a:ext cx="5486400" cy="731520"/>
+          </a:xfrm>
+          <a:prstGeom prst="rect">
+            <a:avLst/>
+          </a:prstGeom>
+          <a:noFill/>
+        </p:spPr>
+        <p:txBody>
+          <a:bodyPr wrap="square" lIns="0" rIns="0" tIns="0" bIns="0">
+            <a:spAutoFit/>
+          </a:bodyPr>
+          <a:lstStyle/>
+          <a:p>
+            <a:pPr algn="l">
+              <a:spcAft>
+                <a:spcPts val="100"/>
+              </a:spcAft>
+            </a:pPr>
+            <a:r>
+              <a:rPr sz="1350" b="1" i="0">
                 <a:solidFill>
                   <a:srgbClr val="102A2E"/>
                 </a:solidFill>
                 <a:latin typeface="Calibri"/>
               </a:rPr>
-              <a:t>duty-day span</a:t>
+              <a:t>MATCH the plan</a:t>
             </a:r>
           </a:p>
           <a:p>
@@ -7384,27 +8806,27 @@
               </a:spcAft>
             </a:pPr>
             <a:r>
-              <a:rPr sz="1000" b="0" i="0">
+              <a:rPr sz="1150" b="0" i="0">
                 <a:solidFill>
                   <a:srgbClr val="5B6B6B"/>
                 </a:solidFill>
                 <a:latin typeface="Calibri"/>
               </a:rPr>
-              <a:t>4.8 h of it in service = 76% utilisation</a:t>
-            </a:r>
-          </a:p>
-        </p:txBody>
-      </p:sp>
-      <p:sp>
-        <p:nvSpPr>
-          <p:cNvPr id="6" name="Rounded Rectangle 5"/>
+              <a:t>same corridor, same terminals — e.g. Soura–Lal Chowk = FDR-050 (211 runs)</a:t>
+            </a:r>
+          </a:p>
+        </p:txBody>
+      </p:sp>
+      <p:sp>
+        <p:nvSpPr>
+          <p:cNvPr id="8" name="Rounded Rectangle 7"/>
           <p:cNvSpPr/>
           <p:nvPr/>
         </p:nvSpPr>
         <p:spPr>
           <a:xfrm>
-            <a:off x="3465576" y="1691640"/>
-            <a:ext cx="2615184" cy="1481328"/>
+            <a:off x="502920" y="3328415"/>
+            <a:ext cx="6720840" cy="914400"/>
           </a:xfrm>
           <a:prstGeom prst="roundRect">
             <a:avLst>
@@ -7443,14 +8865,14 @@
       </p:sp>
       <p:sp>
         <p:nvSpPr>
-          <p:cNvPr id="7" name="TextBox 6"/>
+          <p:cNvPr id="9" name="TextBox 8"/>
           <p:cNvSpPr txBox="1"/>
           <p:nvPr/>
         </p:nvSpPr>
         <p:spPr>
           <a:xfrm>
-            <a:off x="3630168" y="1819656"/>
-            <a:ext cx="2286000" cy="1243584"/>
+            <a:off x="731520" y="3438144"/>
+            <a:ext cx="822960" cy="731520"/>
           </a:xfrm>
           <a:prstGeom prst="rect">
             <a:avLst/>
@@ -7469,29 +8891,52 @@
               </a:spcAft>
             </a:pPr>
             <a:r>
-              <a:rPr sz="3000" b="1" i="0">
-                <a:solidFill>
-                  <a:srgbClr val="0F6E56"/>
+              <a:rPr sz="2700" b="1" i="0">
+                <a:solidFill>
+                  <a:srgbClr val="D97706"/>
                 </a:solidFill>
                 <a:latin typeface="Cambria"/>
               </a:rPr>
-              <a:t>24 min</a:t>
-            </a:r>
-          </a:p>
-          <a:p>
-            <a:pPr algn="l">
-              <a:spcAft>
-                <a:spcPts val="400"/>
-              </a:spcAft>
-            </a:pPr>
-            <a:r>
-              <a:rPr sz="1250" b="1" i="0">
+              <a:t>8</a:t>
+            </a:r>
+          </a:p>
+        </p:txBody>
+      </p:sp>
+      <p:sp>
+        <p:nvSpPr>
+          <p:cNvPr id="10" name="TextBox 9"/>
+          <p:cNvSpPr txBox="1"/>
+          <p:nvPr/>
+        </p:nvSpPr>
+        <p:spPr>
+          <a:xfrm>
+            <a:off x="1600200" y="3456432"/>
+            <a:ext cx="5486400" cy="731520"/>
+          </a:xfrm>
+          <a:prstGeom prst="rect">
+            <a:avLst/>
+          </a:prstGeom>
+          <a:noFill/>
+        </p:spPr>
+        <p:txBody>
+          <a:bodyPr wrap="square" lIns="0" rIns="0" tIns="0" bIns="0">
+            <a:spAutoFit/>
+          </a:bodyPr>
+          <a:lstStyle/>
+          <a:p>
+            <a:pPr algn="l">
+              <a:spcAft>
+                <a:spcPts val="100"/>
+              </a:spcAft>
+            </a:pPr>
+            <a:r>
+              <a:rPr sz="1350" b="1" i="0">
                 <a:solidFill>
                   <a:srgbClr val="102A2E"/>
                 </a:solidFill>
                 <a:latin typeface="Calibri"/>
               </a:rPr>
-              <a:t>median terminal turn</a:t>
+              <a:t>geometry diverges</a:t>
             </a:r>
           </a:p>
           <a:p>
@@ -7501,27 +8946,27 @@
               </a:spcAft>
             </a:pPr>
             <a:r>
-              <a:rPr sz="1000" b="0" i="0">
+              <a:rPr sz="1150" b="0" i="0">
                 <a:solidFill>
                   <a:srgbClr val="5B6B6B"/>
                 </a:solidFill>
                 <a:latin typeface="Calibri"/>
               </a:rPr>
-              <a:t>door-to-door incl. layover (n=1,178)</a:t>
-            </a:r>
-          </a:p>
-        </p:txBody>
-      </p:sp>
-      <p:sp>
-        <p:nvSpPr>
-          <p:cNvPr id="8" name="Rounded Rectangle 7"/>
+              <a:t>buses observably run a different alignment than the routed line → reconciliation list</a:t>
+            </a:r>
+          </a:p>
+        </p:txBody>
+      </p:sp>
+      <p:sp>
+        <p:nvSpPr>
+          <p:cNvPr id="11" name="Rounded Rectangle 10"/>
           <p:cNvSpPr/>
           <p:nvPr/>
         </p:nvSpPr>
         <p:spPr>
           <a:xfrm>
-            <a:off x="6428232" y="1691640"/>
-            <a:ext cx="2615184" cy="1481328"/>
+            <a:off x="502920" y="4370831"/>
+            <a:ext cx="6720840" cy="914400"/>
           </a:xfrm>
           <a:prstGeom prst="roundRect">
             <a:avLst>
@@ -7560,14 +9005,14 @@
       </p:sp>
       <p:sp>
         <p:nvSpPr>
-          <p:cNvPr id="9" name="TextBox 8"/>
+          <p:cNvPr id="12" name="TextBox 11"/>
           <p:cNvSpPr txBox="1"/>
           <p:nvPr/>
         </p:nvSpPr>
         <p:spPr>
           <a:xfrm>
-            <a:off x="6592824" y="1819656"/>
-            <a:ext cx="2286000" cy="1243584"/>
+            <a:off x="731520" y="4480559"/>
+            <a:ext cx="822960" cy="731520"/>
           </a:xfrm>
           <a:prstGeom prst="rect">
             <a:avLst/>
@@ -7586,29 +9031,52 @@
               </a:spcAft>
             </a:pPr>
             <a:r>
-              <a:rPr sz="3000" b="1" i="0">
-                <a:solidFill>
-                  <a:srgbClr val="0F6E56"/>
+              <a:rPr sz="2700" b="1" i="0">
+                <a:solidFill>
+                  <a:srgbClr val="5B6B6B"/>
                 </a:solidFill>
                 <a:latin typeface="Cambria"/>
               </a:rPr>
-              <a:t>10:20–18:15</a:t>
-            </a:r>
-          </a:p>
-          <a:p>
-            <a:pPr algn="l">
-              <a:spcAft>
-                <a:spcPts val="400"/>
-              </a:spcAft>
-            </a:pPr>
-            <a:r>
-              <a:rPr sz="1250" b="1" i="0">
+              <a:t>2</a:t>
+            </a:r>
+          </a:p>
+        </p:txBody>
+      </p:sp>
+      <p:sp>
+        <p:nvSpPr>
+          <p:cNvPr id="13" name="TextBox 12"/>
+          <p:cNvSpPr txBox="1"/>
+          <p:nvPr/>
+        </p:nvSpPr>
+        <p:spPr>
+          <a:xfrm>
+            <a:off x="1600200" y="4498847"/>
+            <a:ext cx="5486400" cy="731520"/>
+          </a:xfrm>
+          <a:prstGeom prst="rect">
+            <a:avLst/>
+          </a:prstGeom>
+          <a:noFill/>
+        </p:spPr>
+        <p:txBody>
+          <a:bodyPr wrap="square" lIns="0" rIns="0" tIns="0" bIns="0">
+            <a:spAutoFit/>
+          </a:bodyPr>
+          <a:lstStyle/>
+          <a:p>
+            <a:pPr algn="l">
+              <a:spcAft>
+                <a:spcPts val="100"/>
+              </a:spcAft>
+            </a:pPr>
+            <a:r>
+              <a:rPr sz="1350" b="1" i="0">
                 <a:solidFill>
                   <a:srgbClr val="102A2E"/>
                 </a:solidFill>
                 <a:latin typeface="Calibri"/>
               </a:rPr>
-              <a:t>the typical service day</a:t>
+              <a:t>outside Kashmir Division</a:t>
             </a:r>
           </a:p>
           <a:p>
@@ -7618,27 +9086,27 @@
               </a:spcAft>
             </a:pPr>
             <a:r>
-              <a:rPr sz="1000" b="0" i="0">
+              <a:rPr sz="1150" b="0" i="0">
                 <a:solidFill>
                   <a:srgbClr val="5B6B6B"/>
                 </a:solidFill>
                 <a:latin typeface="Calibri"/>
               </a:rPr>
-              <a:t>ramps from 8:00, peaks 14:00–17:00</a:t>
-            </a:r>
-          </a:p>
-        </p:txBody>
-      </p:sp>
-      <p:sp>
-        <p:nvSpPr>
-          <p:cNvPr id="10" name="Rounded Rectangle 9"/>
+              <a:t>NH-44 / Jammu traffic — correctly excluded by the district clip</a:t>
+            </a:r>
+          </a:p>
+        </p:txBody>
+      </p:sp>
+      <p:sp>
+        <p:nvSpPr>
+          <p:cNvPr id="14" name="Rounded Rectangle 13"/>
           <p:cNvSpPr/>
           <p:nvPr/>
         </p:nvSpPr>
         <p:spPr>
           <a:xfrm>
-            <a:off x="9390888" y="1691640"/>
-            <a:ext cx="2615184" cy="1481328"/>
+            <a:off x="502920" y="5413247"/>
+            <a:ext cx="6720840" cy="914400"/>
           </a:xfrm>
           <a:prstGeom prst="roundRect">
             <a:avLst>
@@ -7677,14 +9145,14 @@
       </p:sp>
       <p:sp>
         <p:nvSpPr>
-          <p:cNvPr id="11" name="TextBox 10"/>
+          <p:cNvPr id="15" name="TextBox 14"/>
           <p:cNvSpPr txBox="1"/>
           <p:nvPr/>
         </p:nvSpPr>
         <p:spPr>
           <a:xfrm>
-            <a:off x="9555480" y="1819656"/>
-            <a:ext cx="2286000" cy="1243584"/>
+            <a:off x="731520" y="5522975"/>
+            <a:ext cx="822960" cy="731520"/>
           </a:xfrm>
           <a:prstGeom prst="rect">
             <a:avLst/>
@@ -7703,29 +9171,52 @@
               </a:spcAft>
             </a:pPr>
             <a:r>
-              <a:rPr sz="3000" b="1" i="0">
-                <a:solidFill>
-                  <a:srgbClr val="0F6E56"/>
+              <a:rPr sz="2700" b="1" i="0">
+                <a:solidFill>
+                  <a:srgbClr val="5B6B6B"/>
                 </a:solidFill>
                 <a:latin typeface="Cambria"/>
               </a:rPr>
-              <a:t>~19:00</a:t>
-            </a:r>
-          </a:p>
-          <a:p>
-            <a:pPr algn="l">
-              <a:spcAft>
-                <a:spcPts val="400"/>
-              </a:spcAft>
-            </a:pPr>
-            <a:r>
-              <a:rPr sz="1250" b="1" i="0">
+              <a:t>1</a:t>
+            </a:r>
+          </a:p>
+        </p:txBody>
+      </p:sp>
+      <p:sp>
+        <p:nvSpPr>
+          <p:cNvPr id="16" name="TextBox 15"/>
+          <p:cNvSpPr txBox="1"/>
+          <p:nvPr/>
+        </p:nvSpPr>
+        <p:spPr>
+          <a:xfrm>
+            <a:off x="1600200" y="5541263"/>
+            <a:ext cx="5486400" cy="731520"/>
+          </a:xfrm>
+          <a:prstGeom prst="rect">
+            <a:avLst/>
+          </a:prstGeom>
+          <a:noFill/>
+        </p:spPr>
+        <p:txBody>
+          <a:bodyPr wrap="square" lIns="0" rIns="0" tIns="0" bIns="0">
+            <a:spAutoFit/>
+          </a:bodyPr>
+          <a:lstStyle/>
+          <a:p>
+            <a:pPr algn="l">
+              <a:spcAft>
+                <a:spcPts val="100"/>
+              </a:spcAft>
+            </a:pPr>
+            <a:r>
+              <a:rPr sz="1350" b="1" i="0">
                 <a:solidFill>
                   <a:srgbClr val="102A2E"/>
                 </a:solidFill>
                 <a:latin typeface="Calibri"/>
               </a:rPr>
-              <a:t>service collapses</a:t>
+              <a:t>data artifact</a:t>
             </a:r>
           </a:p>
           <a:p>
@@ -7735,27 +9226,27 @@
               </a:spcAft>
             </a:pPr>
             <a:r>
-              <a:rPr sz="1000" b="0" i="0">
+              <a:rPr sz="1150" b="0" i="0">
                 <a:solidFill>
                   <a:srgbClr val="5B6B6B"/>
                 </a:solidFill>
                 <a:latin typeface="Calibri"/>
               </a:rPr>
-              <a:t>the observed fleet stops by evening</a:t>
-            </a:r>
-          </a:p>
-        </p:txBody>
-      </p:sp>
-      <p:sp>
-        <p:nvSpPr>
-          <p:cNvPr id="12" name="Rounded Rectangle 11"/>
+              <a:t>near-stationary terminal idling; excluded and the filter fixed</a:t>
+            </a:r>
+          </a:p>
+        </p:txBody>
+      </p:sp>
+      <p:sp>
+        <p:nvSpPr>
+          <p:cNvPr id="17" name="Rounded Rectangle 16"/>
           <p:cNvSpPr/>
           <p:nvPr/>
         </p:nvSpPr>
         <p:spPr>
           <a:xfrm>
-            <a:off x="502920" y="3611880"/>
-            <a:ext cx="11155680" cy="1965960"/>
+            <a:off x="7498079" y="2286000"/>
+            <a:ext cx="4160520" cy="4023360"/>
           </a:xfrm>
           <a:prstGeom prst="roundRect">
             <a:avLst>
@@ -7763,7 +9254,7 @@
             </a:avLst>
           </a:prstGeom>
           <a:solidFill>
-            <a:srgbClr val="E9F2EE"/>
+            <a:srgbClr val="0A3D33"/>
           </a:solidFill>
           <a:ln>
             <a:noFill/>
@@ -7794,14 +9285,14 @@
       </p:sp>
       <p:sp>
         <p:nvSpPr>
-          <p:cNvPr id="13" name="TextBox 12"/>
+          <p:cNvPr id="18" name="TextBox 17"/>
           <p:cNvSpPr txBox="1"/>
           <p:nvPr/>
         </p:nvSpPr>
         <p:spPr>
           <a:xfrm>
-            <a:off x="777240" y="3822191"/>
-            <a:ext cx="10607040" cy="1645920"/>
+            <a:off x="7772400" y="2514600"/>
+            <a:ext cx="3611880" cy="3566160"/>
           </a:xfrm>
           <a:prstGeom prst="rect">
             <a:avLst/>
@@ -7816,33 +9307,49 @@
           <a:p>
             <a:pPr algn="l">
               <a:spcAft>
-                <a:spcPts val="600"/>
-              </a:spcAft>
-            </a:pPr>
-            <a:r>
-              <a:rPr sz="1450" b="1" i="0">
-                <a:solidFill>
-                  <a:srgbClr val="0F6E56"/>
+                <a:spcPts val="400"/>
+              </a:spcAft>
+            </a:pPr>
+            <a:r>
+              <a:rPr sz="4800" b="1" i="0">
+                <a:solidFill>
+                  <a:srgbClr val="FFFFFF"/>
                 </a:solidFill>
                 <a:latin typeface="Cambria"/>
               </a:rPr>
-              <a:t>Two operational takeaways</a:t>
-            </a:r>
-          </a:p>
-          <a:p>
-            <a:pPr algn="l">
-              <a:spcAft>
-                <a:spcPts val="600"/>
-              </a:spcAft>
-            </a:pPr>
-            <a:r>
-              <a:rPr sz="1300" b="0" i="0">
-                <a:solidFill>
-                  <a:srgbClr val="102A2E"/>
-                </a:solidFill>
-                <a:latin typeface="Calibri"/>
-              </a:rPr>
-              <a:t>1.  Evening service is the gap. Measured in-service time collapses after ~19:00 across the observed fleet — an enforced-headway evening tier would be a visible, cheap service win.</a:t>
+              <a:t>0</a:t>
+            </a:r>
+          </a:p>
+          <a:p>
+            <a:pPr algn="l">
+              <a:spcAft>
+                <a:spcPts val="800"/>
+              </a:spcAft>
+            </a:pPr>
+            <a:r>
+              <a:rPr sz="1500" b="1" i="0">
+                <a:solidFill>
+                  <a:srgbClr val="FFFFFF"/>
+                </a:solidFill>
+                <a:latin typeface="Calibri"/>
+              </a:rPr>
+              <a:t>informal / unpermitted routes</a:t>
+            </a:r>
+          </a:p>
+          <a:p>
+            <a:pPr algn="l">
+              <a:spcAft>
+                <a:spcPts val="800"/>
+              </a:spcAft>
+            </a:pPr>
+            <a:r>
+              <a:rPr sz="1200" b="0" i="0">
+                <a:solidFill>
+                  <a:srgbClr val="C9E2D8"/>
+                </a:solidFill>
+                <a:latin typeface="Calibri"/>
+              </a:rPr>
+              <a:t>An early “under-permitted cluster” finding was RETRACTED after checking the raw 614-permit register — those areas are heavily permitted. The honest signal is geometry divergence, not illegal operation.</a:t>
             </a:r>
           </a:p>
           <a:p>
@@ -7852,13 +9359,13 @@
               </a:spcAft>
             </a:pPr>
             <a:r>
-              <a:rPr sz="1300" b="0" i="0">
-                <a:solidFill>
-                  <a:srgbClr val="102A2E"/>
-                </a:solidFill>
-                <a:latin typeface="Calibri"/>
-              </a:rPr>
-              <a:t>2.  The 24-minute turn is what schedulers must plan for. It includes waiting-to-fill, so a scheduled service can beat it — but any timetable assuming near-zero recovery is fiction.</a:t>
+              <a:rPr sz="1100" b="0" i="1">
+                <a:solidFill>
+                  <a:srgbClr val="9FBFB3"/>
+                </a:solidFill>
+                <a:latin typeface="Calibri"/>
+              </a:rPr>
+              <a:t>The audit trail (verdict + correction per corridor) ships with the repo.</a:t>
             </a:r>
           </a:p>
         </p:txBody>
@@ -7959,7 +9466,7 @@
                 </a:solidFill>
                 <a:latin typeface="Calibri"/>
               </a:rPr>
-              <a:t>CLOSING THE LOOP</a:t>
+              <a:t>THE OVERLAY EVIDENCE</a:t>
             </a:r>
           </a:p>
           <a:p>
@@ -7975,37 +9482,69 @@
                 </a:solidFill>
                 <a:latin typeface="Cambria"/>
               </a:rPr>
-              <a:t>Measurement corrected the plan: v3.4.5</a:t>
-            </a:r>
-          </a:p>
-          <a:p>
-            <a:pPr algn="l">
-              <a:spcAft>
-                <a:spcPts val="0"/>
-              </a:spcAft>
-            </a:pPr>
-            <a:r>
-              <a:rPr sz="1300" b="0" i="0">
-                <a:solidFill>
-                  <a:srgbClr val="5B6B6B"/>
-                </a:solidFill>
-                <a:latin typeface="Calibri"/>
-              </a:rPr>
-              <a:t>Five plan routes were confidently matched to observed corridors — enough evidence to re-anchor their cycle times to measured bus physics.</a:t>
-            </a:r>
-          </a:p>
-        </p:txBody>
-      </p:sp>
-      <p:sp>
-        <p:nvSpPr>
-          <p:cNvPr id="4" name="TextBox 3"/>
+              <a:t>Observed corridor (green) laid over the plan's candidate routes</a:t>
+            </a:r>
+          </a:p>
+        </p:txBody>
+      </p:sp>
+      <p:pic>
+        <p:nvPicPr>
+          <p:cNvPr id="4" name="Picture 3" descr="C1.png"/>
+          <p:cNvPicPr>
+            <a:picLocks noChangeAspect="1"/>
+          </p:cNvPicPr>
+          <p:nvPr/>
+        </p:nvPicPr>
+        <p:blipFill>
+          <a:blip r:embed="rId2"/>
+          <a:stretch>
+            <a:fillRect/>
+          </a:stretch>
+        </p:blipFill>
+        <p:spPr>
+          <a:xfrm>
+            <a:off x="685800" y="1463040"/>
+            <a:ext cx="4892040" cy="4892040"/>
+          </a:xfrm>
+          <a:prstGeom prst="rect">
+            <a:avLst/>
+          </a:prstGeom>
+        </p:spPr>
+      </p:pic>
+      <p:pic>
+        <p:nvPicPr>
+          <p:cNvPr id="5" name="Picture 4" descr="C2.png"/>
+          <p:cNvPicPr>
+            <a:picLocks noChangeAspect="1"/>
+          </p:cNvPicPr>
+          <p:nvPr/>
+        </p:nvPicPr>
+        <p:blipFill>
+          <a:blip r:embed="rId3"/>
+          <a:stretch>
+            <a:fillRect/>
+          </a:stretch>
+        </p:blipFill>
+        <p:spPr>
+          <a:xfrm>
+            <a:off x="6629400" y="1463040"/>
+            <a:ext cx="4892040" cy="4892040"/>
+          </a:xfrm>
+          <a:prstGeom prst="rect">
+            <a:avLst/>
+          </a:prstGeom>
+        </p:spPr>
+      </p:pic>
+      <p:sp>
+        <p:nvSpPr>
+          <p:cNvPr id="6" name="TextBox 5"/>
           <p:cNvSpPr txBox="1"/>
           <p:nvPr/>
         </p:nvSpPr>
         <p:spPr>
           <a:xfrm>
-            <a:off x="502920" y="1783080"/>
-            <a:ext cx="6675120" cy="365760"/>
+            <a:off x="685800" y="6382512"/>
+            <a:ext cx="4892040" cy="457200"/>
           </a:xfrm>
           <a:prstGeom prst="rect">
             <a:avLst/>
@@ -8018,79 +9557,33 @@
           </a:bodyPr>
           <a:lstStyle/>
           <a:p>
-            <a:pPr algn="l">
-              <a:spcAft>
-                <a:spcPts val="400"/>
-              </a:spcAft>
-            </a:pPr>
-            <a:r>
-              <a:rPr sz="1450" b="1" i="0">
-                <a:solidFill>
-                  <a:srgbClr val="102A2E"/>
-                </a:solidFill>
-                <a:latin typeface="Cambria"/>
-              </a:rPr>
-              <a:t>Planned one-way time ÷ measured one-way time</a:t>
-            </a:r>
-          </a:p>
-        </p:txBody>
-      </p:sp>
-      <p:sp>
-        <p:nvSpPr>
-          <p:cNvPr id="5" name="Rounded Rectangle 4"/>
-          <p:cNvSpPr/>
-          <p:nvPr/>
-        </p:nvSpPr>
-        <p:spPr>
-          <a:xfrm>
-            <a:off x="502920" y="2240280"/>
-            <a:ext cx="6675120" cy="676656"/>
-          </a:xfrm>
-          <a:prstGeom prst="roundRect">
-            <a:avLst>
-              <a:gd name="adj" fmla="val 6000"/>
-            </a:avLst>
-          </a:prstGeom>
-          <a:solidFill>
-            <a:srgbClr val="E9F2EE"/>
-          </a:solidFill>
-          <a:ln>
-            <a:noFill/>
-          </a:ln>
-          <a:effectLst/>
-        </p:spPr>
-        <p:style>
-          <a:lnRef idx="1">
-            <a:schemeClr val="accent1"/>
-          </a:lnRef>
-          <a:fillRef idx="3">
-            <a:schemeClr val="accent1"/>
-          </a:fillRef>
-          <a:effectRef idx="2">
-            <a:schemeClr val="accent1"/>
-          </a:effectRef>
-          <a:fontRef idx="minor">
-            <a:schemeClr val="lt1"/>
-          </a:fontRef>
-        </p:style>
-        <p:txBody>
-          <a:bodyPr rtlCol="0" anchor="ctr"/>
-          <a:lstStyle/>
-          <a:p>
-            <a:pPr algn="ctr"/>
-          </a:p>
-        </p:txBody>
-      </p:sp>
-      <p:sp>
-        <p:nvSpPr>
-          <p:cNvPr id="6" name="TextBox 5"/>
+            <a:pPr algn="ctr">
+              <a:spcAft>
+                <a:spcPts val="0"/>
+              </a:spcAft>
+            </a:pPr>
+            <a:r>
+              <a:rPr sz="1150" b="1" i="0">
+                <a:solidFill>
+                  <a:srgbClr val="0F6E56"/>
+                </a:solidFill>
+                <a:latin typeface="Calibri"/>
+              </a:rPr>
+              <a:t>C1 — a MATCH: 211 observed runs ride exactly on permit FDR-050 (Soura–Lal Chowk).</a:t>
+            </a:r>
+          </a:p>
+        </p:txBody>
+      </p:sp>
+      <p:sp>
+        <p:nvSpPr>
+          <p:cNvPr id="7" name="TextBox 6"/>
           <p:cNvSpPr txBox="1"/>
           <p:nvPr/>
         </p:nvSpPr>
         <p:spPr>
           <a:xfrm>
-            <a:off x="731520" y="2350008"/>
-            <a:ext cx="4206240" cy="457200"/>
+            <a:off x="6629400" y="6382512"/>
+            <a:ext cx="4892040" cy="457200"/>
           </a:xfrm>
           <a:prstGeom prst="rect">
             <a:avLst/>
@@ -8103,978 +9596,19 @@
           </a:bodyPr>
           <a:lstStyle/>
           <a:p>
-            <a:pPr algn="l">
+            <a:pPr algn="ctr">
               <a:spcAft>
                 <a:spcPts val="0"/>
               </a:spcAft>
             </a:pPr>
             <a:r>
-              <a:rPr sz="1200" b="1" i="0">
-                <a:solidFill>
-                  <a:srgbClr val="102A2E"/>
-                </a:solidFill>
-                <a:latin typeface="Calibri"/>
-              </a:rPr>
-              <a:t>Soura – Lal Chowk (FDR-050)</a:t>
-            </a:r>
-          </a:p>
-          <a:p>
-            <a:pPr algn="l">
-              <a:spcAft>
-                <a:spcPts val="0"/>
-              </a:spcAft>
-            </a:pPr>
-            <a:r>
-              <a:rPr sz="1000" b="0" i="0">
-                <a:solidFill>
-                  <a:srgbClr val="5B6B6B"/>
-                </a:solidFill>
-                <a:latin typeface="Calibri"/>
-              </a:rPr>
-              <a:t>211 runs observed</a:t>
-            </a:r>
-          </a:p>
-        </p:txBody>
-      </p:sp>
-      <p:sp>
-        <p:nvSpPr>
-          <p:cNvPr id="7" name="TextBox 6"/>
-          <p:cNvSpPr txBox="1"/>
-          <p:nvPr/>
-        </p:nvSpPr>
-        <p:spPr>
-          <a:xfrm>
-            <a:off x="5029200" y="2386584"/>
-            <a:ext cx="1005840" cy="411480"/>
-          </a:xfrm>
-          <a:prstGeom prst="rect">
-            <a:avLst/>
-          </a:prstGeom>
-          <a:noFill/>
-        </p:spPr>
-        <p:txBody>
-          <a:bodyPr wrap="square" lIns="0" rIns="0" tIns="0" bIns="0">
-            <a:spAutoFit/>
-          </a:bodyPr>
-          <a:lstStyle/>
-          <a:p>
-            <a:pPr algn="ctr">
-              <a:spcAft>
-                <a:spcPts val="0"/>
-              </a:spcAft>
-            </a:pPr>
-            <a:r>
-              <a:rPr sz="1600" b="1" i="0">
-                <a:solidFill>
-                  <a:srgbClr val="B0432F"/>
-                </a:solidFill>
-                <a:latin typeface="Cambria"/>
-              </a:rPr>
-              <a:t>0.50</a:t>
-            </a:r>
-          </a:p>
-        </p:txBody>
-      </p:sp>
-      <p:sp>
-        <p:nvSpPr>
-          <p:cNvPr id="8" name="TextBox 7"/>
-          <p:cNvSpPr txBox="1"/>
-          <p:nvPr/>
-        </p:nvSpPr>
-        <p:spPr>
-          <a:xfrm>
-            <a:off x="6126480" y="2386584"/>
-            <a:ext cx="914400" cy="411480"/>
-          </a:xfrm>
-          <a:prstGeom prst="rect">
-            <a:avLst/>
-          </a:prstGeom>
-          <a:noFill/>
-        </p:spPr>
-        <p:txBody>
-          <a:bodyPr wrap="square" lIns="0" rIns="0" tIns="0" bIns="0">
-            <a:spAutoFit/>
-          </a:bodyPr>
-          <a:lstStyle/>
-          <a:p>
-            <a:pPr algn="ctr">
-              <a:spcAft>
-                <a:spcPts val="0"/>
-              </a:spcAft>
-            </a:pPr>
-            <a:r>
-              <a:rPr sz="1300" b="1" i="0">
-                <a:solidFill>
-                  <a:srgbClr val="0F6E56"/>
-                </a:solidFill>
-                <a:latin typeface="Calibri"/>
-              </a:rPr>
-              <a:t>5 → 7</a:t>
-            </a:r>
-          </a:p>
-        </p:txBody>
-      </p:sp>
-      <p:sp>
-        <p:nvSpPr>
-          <p:cNvPr id="9" name="Rounded Rectangle 8"/>
-          <p:cNvSpPr/>
-          <p:nvPr/>
-        </p:nvSpPr>
-        <p:spPr>
-          <a:xfrm>
-            <a:off x="502920" y="3026664"/>
-            <a:ext cx="6675120" cy="676656"/>
-          </a:xfrm>
-          <a:prstGeom prst="roundRect">
-            <a:avLst>
-              <a:gd name="adj" fmla="val 6000"/>
-            </a:avLst>
-          </a:prstGeom>
-          <a:solidFill>
-            <a:srgbClr val="E9F2EE"/>
-          </a:solidFill>
-          <a:ln>
-            <a:noFill/>
-          </a:ln>
-          <a:effectLst/>
-        </p:spPr>
-        <p:style>
-          <a:lnRef idx="1">
-            <a:schemeClr val="accent1"/>
-          </a:lnRef>
-          <a:fillRef idx="3">
-            <a:schemeClr val="accent1"/>
-          </a:fillRef>
-          <a:effectRef idx="2">
-            <a:schemeClr val="accent1"/>
-          </a:effectRef>
-          <a:fontRef idx="minor">
-            <a:schemeClr val="lt1"/>
-          </a:fontRef>
-        </p:style>
-        <p:txBody>
-          <a:bodyPr rtlCol="0" anchor="ctr"/>
-          <a:lstStyle/>
-          <a:p>
-            <a:pPr algn="ctr"/>
-          </a:p>
-        </p:txBody>
-      </p:sp>
-      <p:sp>
-        <p:nvSpPr>
-          <p:cNvPr id="10" name="TextBox 9"/>
-          <p:cNvSpPr txBox="1"/>
-          <p:nvPr/>
-        </p:nvSpPr>
-        <p:spPr>
-          <a:xfrm>
-            <a:off x="731520" y="3136392"/>
-            <a:ext cx="4206240" cy="457200"/>
-          </a:xfrm>
-          <a:prstGeom prst="rect">
-            <a:avLst/>
-          </a:prstGeom>
-          <a:noFill/>
-        </p:spPr>
-        <p:txBody>
-          <a:bodyPr wrap="square" lIns="0" rIns="0" tIns="0" bIns="0">
-            <a:spAutoFit/>
-          </a:bodyPr>
-          <a:lstStyle/>
-          <a:p>
-            <a:pPr algn="l">
-              <a:spcAft>
-                <a:spcPts val="0"/>
-              </a:spcAft>
-            </a:pPr>
-            <a:r>
-              <a:rPr sz="1200" b="1" i="0">
-                <a:solidFill>
-                  <a:srgbClr val="102A2E"/>
-                </a:solidFill>
-                <a:latin typeface="Calibri"/>
-              </a:rPr>
-              <a:t>Soura – Railway Stn (FDR-262)</a:t>
-            </a:r>
-          </a:p>
-          <a:p>
-            <a:pPr algn="l">
-              <a:spcAft>
-                <a:spcPts val="0"/>
-              </a:spcAft>
-            </a:pPr>
-            <a:r>
-              <a:rPr sz="1000" b="0" i="0">
-                <a:solidFill>
-                  <a:srgbClr val="5B6B6B"/>
-                </a:solidFill>
-                <a:latin typeface="Calibri"/>
-              </a:rPr>
-              <a:t>93 runs observed</a:t>
-            </a:r>
-          </a:p>
-        </p:txBody>
-      </p:sp>
-      <p:sp>
-        <p:nvSpPr>
-          <p:cNvPr id="11" name="TextBox 10"/>
-          <p:cNvSpPr txBox="1"/>
-          <p:nvPr/>
-        </p:nvSpPr>
-        <p:spPr>
-          <a:xfrm>
-            <a:off x="5029200" y="3172968"/>
-            <a:ext cx="1005840" cy="411480"/>
-          </a:xfrm>
-          <a:prstGeom prst="rect">
-            <a:avLst/>
-          </a:prstGeom>
-          <a:noFill/>
-        </p:spPr>
-        <p:txBody>
-          <a:bodyPr wrap="square" lIns="0" rIns="0" tIns="0" bIns="0">
-            <a:spAutoFit/>
-          </a:bodyPr>
-          <a:lstStyle/>
-          <a:p>
-            <a:pPr algn="ctr">
-              <a:spcAft>
-                <a:spcPts val="0"/>
-              </a:spcAft>
-            </a:pPr>
-            <a:r>
-              <a:rPr sz="1600" b="1" i="0">
-                <a:solidFill>
-                  <a:srgbClr val="B0432F"/>
-                </a:solidFill>
-                <a:latin typeface="Cambria"/>
-              </a:rPr>
-              <a:t>0.55</a:t>
-            </a:r>
-          </a:p>
-        </p:txBody>
-      </p:sp>
-      <p:sp>
-        <p:nvSpPr>
-          <p:cNvPr id="12" name="TextBox 11"/>
-          <p:cNvSpPr txBox="1"/>
-          <p:nvPr/>
-        </p:nvSpPr>
-        <p:spPr>
-          <a:xfrm>
-            <a:off x="6126480" y="3172968"/>
-            <a:ext cx="914400" cy="411480"/>
-          </a:xfrm>
-          <a:prstGeom prst="rect">
-            <a:avLst/>
-          </a:prstGeom>
-          <a:noFill/>
-        </p:spPr>
-        <p:txBody>
-          <a:bodyPr wrap="square" lIns="0" rIns="0" tIns="0" bIns="0">
-            <a:spAutoFit/>
-          </a:bodyPr>
-          <a:lstStyle/>
-          <a:p>
-            <a:pPr algn="ctr">
-              <a:spcAft>
-                <a:spcPts val="0"/>
-              </a:spcAft>
-            </a:pPr>
-            <a:r>
-              <a:rPr sz="1300" b="1" i="0">
-                <a:solidFill>
-                  <a:srgbClr val="0F6E56"/>
-                </a:solidFill>
-                <a:latin typeface="Calibri"/>
-              </a:rPr>
-              <a:t>4 → 7</a:t>
-            </a:r>
-          </a:p>
-        </p:txBody>
-      </p:sp>
-      <p:sp>
-        <p:nvSpPr>
-          <p:cNvPr id="13" name="Rounded Rectangle 12"/>
-          <p:cNvSpPr/>
-          <p:nvPr/>
-        </p:nvSpPr>
-        <p:spPr>
-          <a:xfrm>
-            <a:off x="502920" y="3813048"/>
-            <a:ext cx="6675120" cy="676656"/>
-          </a:xfrm>
-          <a:prstGeom prst="roundRect">
-            <a:avLst>
-              <a:gd name="adj" fmla="val 6000"/>
-            </a:avLst>
-          </a:prstGeom>
-          <a:solidFill>
-            <a:srgbClr val="E9F2EE"/>
-          </a:solidFill>
-          <a:ln>
-            <a:noFill/>
-          </a:ln>
-          <a:effectLst/>
-        </p:spPr>
-        <p:style>
-          <a:lnRef idx="1">
-            <a:schemeClr val="accent1"/>
-          </a:lnRef>
-          <a:fillRef idx="3">
-            <a:schemeClr val="accent1"/>
-          </a:fillRef>
-          <a:effectRef idx="2">
-            <a:schemeClr val="accent1"/>
-          </a:effectRef>
-          <a:fontRef idx="minor">
-            <a:schemeClr val="lt1"/>
-          </a:fontRef>
-        </p:style>
-        <p:txBody>
-          <a:bodyPr rtlCol="0" anchor="ctr"/>
-          <a:lstStyle/>
-          <a:p>
-            <a:pPr algn="ctr"/>
-          </a:p>
-        </p:txBody>
-      </p:sp>
-      <p:sp>
-        <p:nvSpPr>
-          <p:cNvPr id="14" name="TextBox 13"/>
-          <p:cNvSpPr txBox="1"/>
-          <p:nvPr/>
-        </p:nvSpPr>
-        <p:spPr>
-          <a:xfrm>
-            <a:off x="731520" y="3922776"/>
-            <a:ext cx="4206240" cy="457200"/>
-          </a:xfrm>
-          <a:prstGeom prst="rect">
-            <a:avLst/>
-          </a:prstGeom>
-          <a:noFill/>
-        </p:spPr>
-        <p:txBody>
-          <a:bodyPr wrap="square" lIns="0" rIns="0" tIns="0" bIns="0">
-            <a:spAutoFit/>
-          </a:bodyPr>
-          <a:lstStyle/>
-          <a:p>
-            <a:pPr algn="l">
-              <a:spcAft>
-                <a:spcPts val="0"/>
-              </a:spcAft>
-            </a:pPr>
-            <a:r>
-              <a:rPr sz="1200" b="1" i="0">
-                <a:solidFill>
-                  <a:srgbClr val="102A2E"/>
-                </a:solidFill>
-                <a:latin typeface="Calibri"/>
-              </a:rPr>
-              <a:t>Srinagar – Pampore (FDR-370)</a:t>
-            </a:r>
-          </a:p>
-          <a:p>
-            <a:pPr algn="l">
-              <a:spcAft>
-                <a:spcPts val="0"/>
-              </a:spcAft>
-            </a:pPr>
-            <a:r>
-              <a:rPr sz="1000" b="0" i="0">
-                <a:solidFill>
-                  <a:srgbClr val="5B6B6B"/>
-                </a:solidFill>
-                <a:latin typeface="Calibri"/>
-              </a:rPr>
-              <a:t>79 runs observed</a:t>
-            </a:r>
-          </a:p>
-        </p:txBody>
-      </p:sp>
-      <p:sp>
-        <p:nvSpPr>
-          <p:cNvPr id="15" name="TextBox 14"/>
-          <p:cNvSpPr txBox="1"/>
-          <p:nvPr/>
-        </p:nvSpPr>
-        <p:spPr>
-          <a:xfrm>
-            <a:off x="5029200" y="3959352"/>
-            <a:ext cx="1005840" cy="411480"/>
-          </a:xfrm>
-          <a:prstGeom prst="rect">
-            <a:avLst/>
-          </a:prstGeom>
-          <a:noFill/>
-        </p:spPr>
-        <p:txBody>
-          <a:bodyPr wrap="square" lIns="0" rIns="0" tIns="0" bIns="0">
-            <a:spAutoFit/>
-          </a:bodyPr>
-          <a:lstStyle/>
-          <a:p>
-            <a:pPr algn="ctr">
-              <a:spcAft>
-                <a:spcPts val="0"/>
-              </a:spcAft>
-            </a:pPr>
-            <a:r>
-              <a:rPr sz="1600" b="1" i="0">
-                <a:solidFill>
-                  <a:srgbClr val="B0432F"/>
-                </a:solidFill>
-                <a:latin typeface="Cambria"/>
-              </a:rPr>
-              <a:t>0.51</a:t>
-            </a:r>
-          </a:p>
-        </p:txBody>
-      </p:sp>
-      <p:sp>
-        <p:nvSpPr>
-          <p:cNvPr id="16" name="TextBox 15"/>
-          <p:cNvSpPr txBox="1"/>
-          <p:nvPr/>
-        </p:nvSpPr>
-        <p:spPr>
-          <a:xfrm>
-            <a:off x="6126480" y="3959352"/>
-            <a:ext cx="914400" cy="411480"/>
-          </a:xfrm>
-          <a:prstGeom prst="rect">
-            <a:avLst/>
-          </a:prstGeom>
-          <a:noFill/>
-        </p:spPr>
-        <p:txBody>
-          <a:bodyPr wrap="square" lIns="0" rIns="0" tIns="0" bIns="0">
-            <a:spAutoFit/>
-          </a:bodyPr>
-          <a:lstStyle/>
-          <a:p>
-            <a:pPr algn="ctr">
-              <a:spcAft>
-                <a:spcPts val="0"/>
-              </a:spcAft>
-            </a:pPr>
-            <a:r>
-              <a:rPr sz="1300" b="1" i="0">
-                <a:solidFill>
-                  <a:srgbClr val="0F6E56"/>
-                </a:solidFill>
-                <a:latin typeface="Calibri"/>
-              </a:rPr>
-              <a:t>4 → 5</a:t>
-            </a:r>
-          </a:p>
-        </p:txBody>
-      </p:sp>
-      <p:sp>
-        <p:nvSpPr>
-          <p:cNvPr id="17" name="Rounded Rectangle 16"/>
-          <p:cNvSpPr/>
-          <p:nvPr/>
-        </p:nvSpPr>
-        <p:spPr>
-          <a:xfrm>
-            <a:off x="502920" y="4599432"/>
-            <a:ext cx="6675120" cy="676656"/>
-          </a:xfrm>
-          <a:prstGeom prst="roundRect">
-            <a:avLst>
-              <a:gd name="adj" fmla="val 6000"/>
-            </a:avLst>
-          </a:prstGeom>
-          <a:solidFill>
-            <a:srgbClr val="E9F2EE"/>
-          </a:solidFill>
-          <a:ln>
-            <a:noFill/>
-          </a:ln>
-          <a:effectLst/>
-        </p:spPr>
-        <p:style>
-          <a:lnRef idx="1">
-            <a:schemeClr val="accent1"/>
-          </a:lnRef>
-          <a:fillRef idx="3">
-            <a:schemeClr val="accent1"/>
-          </a:fillRef>
-          <a:effectRef idx="2">
-            <a:schemeClr val="accent1"/>
-          </a:effectRef>
-          <a:fontRef idx="minor">
-            <a:schemeClr val="lt1"/>
-          </a:fontRef>
-        </p:style>
-        <p:txBody>
-          <a:bodyPr rtlCol="0" anchor="ctr"/>
-          <a:lstStyle/>
-          <a:p>
-            <a:pPr algn="ctr"/>
-          </a:p>
-        </p:txBody>
-      </p:sp>
-      <p:sp>
-        <p:nvSpPr>
-          <p:cNvPr id="18" name="TextBox 17"/>
-          <p:cNvSpPr txBox="1"/>
-          <p:nvPr/>
-        </p:nvSpPr>
-        <p:spPr>
-          <a:xfrm>
-            <a:off x="731520" y="4709160"/>
-            <a:ext cx="4206240" cy="457200"/>
-          </a:xfrm>
-          <a:prstGeom prst="rect">
-            <a:avLst/>
-          </a:prstGeom>
-          <a:noFill/>
-        </p:spPr>
-        <p:txBody>
-          <a:bodyPr wrap="square" lIns="0" rIns="0" tIns="0" bIns="0">
-            <a:spAutoFit/>
-          </a:bodyPr>
-          <a:lstStyle/>
-          <a:p>
-            <a:pPr algn="l">
-              <a:spcAft>
-                <a:spcPts val="0"/>
-              </a:spcAft>
-            </a:pPr>
-            <a:r>
-              <a:rPr sz="1200" b="1" i="0">
-                <a:solidFill>
-                  <a:srgbClr val="102A2E"/>
-                </a:solidFill>
-                <a:latin typeface="Calibri"/>
-              </a:rPr>
-              <a:t>Soura – Qamarwari (FDR-270)</a:t>
-            </a:r>
-          </a:p>
-          <a:p>
-            <a:pPr algn="l">
-              <a:spcAft>
-                <a:spcPts val="0"/>
-              </a:spcAft>
-            </a:pPr>
-            <a:r>
-              <a:rPr sz="1000" b="0" i="0">
-                <a:solidFill>
-                  <a:srgbClr val="5B6B6B"/>
-                </a:solidFill>
-                <a:latin typeface="Calibri"/>
-              </a:rPr>
-              <a:t>47 runs observed</a:t>
-            </a:r>
-          </a:p>
-        </p:txBody>
-      </p:sp>
-      <p:sp>
-        <p:nvSpPr>
-          <p:cNvPr id="19" name="TextBox 18"/>
-          <p:cNvSpPr txBox="1"/>
-          <p:nvPr/>
-        </p:nvSpPr>
-        <p:spPr>
-          <a:xfrm>
-            <a:off x="5029200" y="4745736"/>
-            <a:ext cx="1005840" cy="411480"/>
-          </a:xfrm>
-          <a:prstGeom prst="rect">
-            <a:avLst/>
-          </a:prstGeom>
-          <a:noFill/>
-        </p:spPr>
-        <p:txBody>
-          <a:bodyPr wrap="square" lIns="0" rIns="0" tIns="0" bIns="0">
-            <a:spAutoFit/>
-          </a:bodyPr>
-          <a:lstStyle/>
-          <a:p>
-            <a:pPr algn="ctr">
-              <a:spcAft>
-                <a:spcPts val="0"/>
-              </a:spcAft>
-            </a:pPr>
-            <a:r>
-              <a:rPr sz="1600" b="1" i="0">
-                <a:solidFill>
-                  <a:srgbClr val="B0432F"/>
-                </a:solidFill>
-                <a:latin typeface="Cambria"/>
-              </a:rPr>
-              <a:t>0.58</a:t>
-            </a:r>
-          </a:p>
-        </p:txBody>
-      </p:sp>
-      <p:sp>
-        <p:nvSpPr>
-          <p:cNvPr id="20" name="TextBox 19"/>
-          <p:cNvSpPr txBox="1"/>
-          <p:nvPr/>
-        </p:nvSpPr>
-        <p:spPr>
-          <a:xfrm>
-            <a:off x="6126480" y="4745736"/>
-            <a:ext cx="914400" cy="411480"/>
-          </a:xfrm>
-          <a:prstGeom prst="rect">
-            <a:avLst/>
-          </a:prstGeom>
-          <a:noFill/>
-        </p:spPr>
-        <p:txBody>
-          <a:bodyPr wrap="square" lIns="0" rIns="0" tIns="0" bIns="0">
-            <a:spAutoFit/>
-          </a:bodyPr>
-          <a:lstStyle/>
-          <a:p>
-            <a:pPr algn="ctr">
-              <a:spcAft>
-                <a:spcPts val="0"/>
-              </a:spcAft>
-            </a:pPr>
-            <a:r>
-              <a:rPr sz="1300" b="1" i="0">
-                <a:solidFill>
-                  <a:srgbClr val="0F6E56"/>
-                </a:solidFill>
-                <a:latin typeface="Calibri"/>
-              </a:rPr>
-              <a:t>4 → 5</a:t>
-            </a:r>
-          </a:p>
-        </p:txBody>
-      </p:sp>
-      <p:sp>
-        <p:nvSpPr>
-          <p:cNvPr id="21" name="Rounded Rectangle 20"/>
-          <p:cNvSpPr/>
-          <p:nvPr/>
-        </p:nvSpPr>
-        <p:spPr>
-          <a:xfrm>
-            <a:off x="502920" y="5385816"/>
-            <a:ext cx="6675120" cy="676656"/>
-          </a:xfrm>
-          <a:prstGeom prst="roundRect">
-            <a:avLst>
-              <a:gd name="adj" fmla="val 6000"/>
-            </a:avLst>
-          </a:prstGeom>
-          <a:solidFill>
-            <a:srgbClr val="E9F2EE"/>
-          </a:solidFill>
-          <a:ln>
-            <a:noFill/>
-          </a:ln>
-          <a:effectLst/>
-        </p:spPr>
-        <p:style>
-          <a:lnRef idx="1">
-            <a:schemeClr val="accent1"/>
-          </a:lnRef>
-          <a:fillRef idx="3">
-            <a:schemeClr val="accent1"/>
-          </a:fillRef>
-          <a:effectRef idx="2">
-            <a:schemeClr val="accent1"/>
-          </a:effectRef>
-          <a:fontRef idx="minor">
-            <a:schemeClr val="lt1"/>
-          </a:fontRef>
-        </p:style>
-        <p:txBody>
-          <a:bodyPr rtlCol="0" anchor="ctr"/>
-          <a:lstStyle/>
-          <a:p>
-            <a:pPr algn="ctr"/>
-          </a:p>
-        </p:txBody>
-      </p:sp>
-      <p:sp>
-        <p:nvSpPr>
-          <p:cNvPr id="22" name="TextBox 21"/>
-          <p:cNvSpPr txBox="1"/>
-          <p:nvPr/>
-        </p:nvSpPr>
-        <p:spPr>
-          <a:xfrm>
-            <a:off x="731520" y="5495544"/>
-            <a:ext cx="4206240" cy="457200"/>
-          </a:xfrm>
-          <a:prstGeom prst="rect">
-            <a:avLst/>
-          </a:prstGeom>
-          <a:noFill/>
-        </p:spPr>
-        <p:txBody>
-          <a:bodyPr wrap="square" lIns="0" rIns="0" tIns="0" bIns="0">
-            <a:spAutoFit/>
-          </a:bodyPr>
-          <a:lstStyle/>
-          <a:p>
-            <a:pPr algn="l">
-              <a:spcAft>
-                <a:spcPts val="0"/>
-              </a:spcAft>
-            </a:pPr>
-            <a:r>
-              <a:rPr sz="1200" b="1" i="0">
-                <a:solidFill>
-                  <a:srgbClr val="102A2E"/>
-                </a:solidFill>
-                <a:latin typeface="Calibri"/>
-              </a:rPr>
-              <a:t>Safakadal – Jehangir Chowk (FDR-575)</a:t>
-            </a:r>
-          </a:p>
-          <a:p>
-            <a:pPr algn="l">
-              <a:spcAft>
-                <a:spcPts val="0"/>
-              </a:spcAft>
-            </a:pPr>
-            <a:r>
-              <a:rPr sz="1000" b="0" i="0">
-                <a:solidFill>
-                  <a:srgbClr val="5B6B6B"/>
-                </a:solidFill>
-                <a:latin typeface="Calibri"/>
-              </a:rPr>
-              <a:t>40 runs observed</a:t>
-            </a:r>
-          </a:p>
-        </p:txBody>
-      </p:sp>
-      <p:sp>
-        <p:nvSpPr>
-          <p:cNvPr id="23" name="TextBox 22"/>
-          <p:cNvSpPr txBox="1"/>
-          <p:nvPr/>
-        </p:nvSpPr>
-        <p:spPr>
-          <a:xfrm>
-            <a:off x="5029200" y="5532120"/>
-            <a:ext cx="1005840" cy="411480"/>
-          </a:xfrm>
-          <a:prstGeom prst="rect">
-            <a:avLst/>
-          </a:prstGeom>
-          <a:noFill/>
-        </p:spPr>
-        <p:txBody>
-          <a:bodyPr wrap="square" lIns="0" rIns="0" tIns="0" bIns="0">
-            <a:spAutoFit/>
-          </a:bodyPr>
-          <a:lstStyle/>
-          <a:p>
-            <a:pPr algn="ctr">
-              <a:spcAft>
-                <a:spcPts val="0"/>
-              </a:spcAft>
-            </a:pPr>
-            <a:r>
-              <a:rPr sz="1600" b="1" i="0">
-                <a:solidFill>
-                  <a:srgbClr val="B0432F"/>
-                </a:solidFill>
-                <a:latin typeface="Cambria"/>
-              </a:rPr>
-              <a:t>0.47</a:t>
-            </a:r>
-          </a:p>
-        </p:txBody>
-      </p:sp>
-      <p:sp>
-        <p:nvSpPr>
-          <p:cNvPr id="24" name="TextBox 23"/>
-          <p:cNvSpPr txBox="1"/>
-          <p:nvPr/>
-        </p:nvSpPr>
-        <p:spPr>
-          <a:xfrm>
-            <a:off x="6126480" y="5532120"/>
-            <a:ext cx="914400" cy="411480"/>
-          </a:xfrm>
-          <a:prstGeom prst="rect">
-            <a:avLst/>
-          </a:prstGeom>
-          <a:noFill/>
-        </p:spPr>
-        <p:txBody>
-          <a:bodyPr wrap="square" lIns="0" rIns="0" tIns="0" bIns="0">
-            <a:spAutoFit/>
-          </a:bodyPr>
-          <a:lstStyle/>
-          <a:p>
-            <a:pPr algn="ctr">
-              <a:spcAft>
-                <a:spcPts val="0"/>
-              </a:spcAft>
-            </a:pPr>
-            <a:r>
-              <a:rPr sz="1300" b="1" i="0">
-                <a:solidFill>
-                  <a:srgbClr val="0F6E56"/>
-                </a:solidFill>
-                <a:latin typeface="Calibri"/>
-              </a:rPr>
-              <a:t>3 → 3</a:t>
-            </a:r>
-          </a:p>
-        </p:txBody>
-      </p:sp>
-      <p:sp>
-        <p:nvSpPr>
-          <p:cNvPr id="25" name="Rounded Rectangle 24"/>
-          <p:cNvSpPr/>
-          <p:nvPr/>
-        </p:nvSpPr>
-        <p:spPr>
-          <a:xfrm>
-            <a:off x="7498079" y="1783080"/>
-            <a:ext cx="4160520" cy="4434840"/>
-          </a:xfrm>
-          <a:prstGeom prst="roundRect">
-            <a:avLst>
-              <a:gd name="adj" fmla="val 6000"/>
-            </a:avLst>
-          </a:prstGeom>
-          <a:solidFill>
-            <a:srgbClr val="0A3D33"/>
-          </a:solidFill>
-          <a:ln>
-            <a:noFill/>
-          </a:ln>
-          <a:effectLst/>
-        </p:spPr>
-        <p:style>
-          <a:lnRef idx="1">
-            <a:schemeClr val="accent1"/>
-          </a:lnRef>
-          <a:fillRef idx="3">
-            <a:schemeClr val="accent1"/>
-          </a:fillRef>
-          <a:effectRef idx="2">
-            <a:schemeClr val="accent1"/>
-          </a:effectRef>
-          <a:fontRef idx="minor">
-            <a:schemeClr val="lt1"/>
-          </a:fontRef>
-        </p:style>
-        <p:txBody>
-          <a:bodyPr rtlCol="0" anchor="ctr"/>
-          <a:lstStyle/>
-          <a:p>
-            <a:pPr algn="ctr"/>
-          </a:p>
-        </p:txBody>
-      </p:sp>
-      <p:sp>
-        <p:nvSpPr>
-          <p:cNvPr id="26" name="TextBox 25"/>
-          <p:cNvSpPr txBox="1"/>
-          <p:nvPr/>
-        </p:nvSpPr>
-        <p:spPr>
-          <a:xfrm>
-            <a:off x="7772400" y="2011680"/>
-            <a:ext cx="3611880" cy="4023360"/>
-          </a:xfrm>
-          <a:prstGeom prst="rect">
-            <a:avLst/>
-          </a:prstGeom>
-          <a:noFill/>
-        </p:spPr>
-        <p:txBody>
-          <a:bodyPr wrap="square" lIns="0" rIns="0" tIns="0" bIns="0">
-            <a:spAutoFit/>
-          </a:bodyPr>
-          <a:lstStyle/>
-          <a:p>
-            <a:pPr algn="l">
-              <a:spcAft>
-                <a:spcPts val="600"/>
-              </a:spcAft>
-            </a:pPr>
-            <a:r>
-              <a:rPr sz="1500" b="1" i="0">
-                <a:solidFill>
-                  <a:srgbClr val="FFFFFF"/>
-                </a:solidFill>
-                <a:latin typeface="Cambria"/>
-              </a:rPr>
-              <a:t>What was hiding it</a:t>
-            </a:r>
-          </a:p>
-          <a:p>
-            <a:pPr algn="l">
-              <a:spcAft>
-                <a:spcPts val="800"/>
-              </a:spcAft>
-            </a:pPr>
-            <a:r>
-              <a:rPr sz="1200" b="0" i="0">
-                <a:solidFill>
-                  <a:srgbClr val="D5E8DF"/>
-                </a:solidFill>
-                <a:latin typeface="Calibri"/>
-              </a:rPr>
-              <a:t>4 of the 5 routes were pinned at the engine's per-km cycle CAP — a safety heuristic that quietly clamped their cycle times below what buses measurably need.</a:t>
-            </a:r>
-          </a:p>
-          <a:p>
-            <a:pPr algn="l">
-              <a:spcAft>
-                <a:spcPts val="1000"/>
-              </a:spcAft>
-            </a:pPr>
-            <a:r>
-              <a:rPr sz="1200" b="0" i="0">
-                <a:solidFill>
-                  <a:srgbClr val="D5E8DF"/>
-                </a:solidFill>
-                <a:latin typeface="Calibri"/>
-              </a:rPr>
-              <a:t>The fix: on directly-measured corridors, the measured moving speed replaces the car-model estimate, and the cap no longer clamps. Only those 5 routes changed.</a:t>
-            </a:r>
-          </a:p>
-          <a:p>
-            <a:pPr algn="l">
-              <a:spcAft>
-                <a:spcPts val="200"/>
-              </a:spcAft>
-            </a:pPr>
-            <a:r>
-              <a:rPr sz="2400" b="1" i="0">
-                <a:solidFill>
-                  <a:srgbClr val="FFFFFF"/>
-                </a:solidFill>
-                <a:latin typeface="Cambria"/>
-              </a:rPr>
-              <a:t>Fleet 1,004 → 1,011</a:t>
-            </a:r>
-          </a:p>
-          <a:p>
-            <a:pPr algn="l">
-              <a:spcAft>
-                <a:spcPts val="0"/>
-              </a:spcAft>
-            </a:pPr>
-            <a:r>
-              <a:rPr sz="1150" b="0" i="0">
-                <a:solidFill>
-                  <a:srgbClr val="9FBFB3"/>
-                </a:solidFill>
-                <a:latin typeface="Calibri"/>
-              </a:rPr>
-              <a:t>+7 buses, all on GPS-verified core corridors</a:t>
+              <a:rPr sz="1150" b="1" i="0">
+                <a:solidFill>
+                  <a:srgbClr val="D97706"/>
+                </a:solidFill>
+                <a:latin typeface="Calibri"/>
+              </a:rPr>
+              <a:t>C2 — a DIVERGENCE: 150 real runs (green) vs the routed lines — the alignment to reconcile.</a:t>
             </a:r>
           </a:p>
         </p:txBody>
@@ -9175,7 +9709,7 @@
                 </a:solidFill>
                 <a:latin typeface="Calibri"/>
               </a:rPr>
-              <a:t>BONUS LAYER</a:t>
+              <a:t>STEP 3 — MEASUREMENT</a:t>
             </a:r>
           </a:p>
           <a:p>
@@ -9191,7 +9725,7 @@
                 </a:solidFill>
                 <a:latin typeface="Cambria"/>
               </a:rPr>
-              <a:t>An evidence-based stop inventory</a:t>
+              <a:t>The first measured bus speeds for Srinagar</a:t>
             </a:r>
           </a:p>
           <a:p>
@@ -9207,7 +9741,7 @@
                 </a:solidFill>
                 <a:latin typeface="Calibri"/>
               </a:rPr>
-              <a:t>Every 40 s – 12 min dwell is a vote for a real stopping place. Clustered, they map where buses actually stop.</a:t>
+              <a:t>Not modelled, not assumed — computed from consecutive GPS fixes of buses in revenue service.</a:t>
             </a:r>
           </a:p>
         </p:txBody>
@@ -9221,7 +9755,7 @@
         <p:spPr>
           <a:xfrm>
             <a:off x="502920" y="1691640"/>
-            <a:ext cx="2615184" cy="1481328"/>
+            <a:ext cx="3154680" cy="1481328"/>
           </a:xfrm>
           <a:prstGeom prst="roundRect">
             <a:avLst>
@@ -9267,7 +9801,7 @@
         <p:spPr>
           <a:xfrm>
             <a:off x="667512" y="1819656"/>
-            <a:ext cx="2286000" cy="1243584"/>
+            <a:ext cx="2825496" cy="1243584"/>
           </a:xfrm>
           <a:prstGeom prst="rect">
             <a:avLst/>
@@ -9292,7 +9826,7 @@
                 </a:solidFill>
                 <a:latin typeface="Cambria"/>
               </a:rPr>
-              <a:t>352</a:t>
+              <a:t>21 km/h</a:t>
             </a:r>
           </a:p>
           <a:p>
@@ -9308,7 +9842,7 @@
                 </a:solidFill>
                 <a:latin typeface="Calibri"/>
               </a:rPr>
-              <a:t>candidate stops</a:t>
+              <a:t>moving speed</a:t>
             </a:r>
           </a:p>
           <a:p>
@@ -9324,7 +9858,7 @@
                 </a:solidFill>
                 <a:latin typeface="Calibri"/>
               </a:rPr>
-              <a:t>from 38,431 observed dwell events</a:t>
+              <a:t>median while the bus is in motion</a:t>
             </a:r>
           </a:p>
         </p:txBody>
@@ -9337,8 +9871,8 @@
         </p:nvSpPr>
         <p:spPr>
           <a:xfrm>
-            <a:off x="3465576" y="1691640"/>
-            <a:ext cx="2615184" cy="1481328"/>
+            <a:off x="3840480" y="1691640"/>
+            <a:ext cx="3154680" cy="1481328"/>
           </a:xfrm>
           <a:prstGeom prst="roundRect">
             <a:avLst>
@@ -9383,8 +9917,8 @@
         </p:nvSpPr>
         <p:spPr>
           <a:xfrm>
-            <a:off x="3630168" y="1819656"/>
-            <a:ext cx="2286000" cy="1243584"/>
+            <a:off x="4005072" y="1819656"/>
+            <a:ext cx="2825496" cy="1243584"/>
           </a:xfrm>
           <a:prstGeom prst="rect">
             <a:avLst/>
@@ -9409,7 +9943,7 @@
                 </a:solidFill>
                 <a:latin typeface="Cambria"/>
               </a:rPr>
-              <a:t>215</a:t>
+              <a:t>12.5 km/h</a:t>
             </a:r>
           </a:p>
           <a:p>
@@ -9425,7 +9959,7 @@
                 </a:solidFill>
                 <a:latin typeface="Calibri"/>
               </a:rPr>
-              <a:t>strong stops</a:t>
+              <a:t>effective speed</a:t>
             </a:r>
           </a:p>
           <a:p>
@@ -9441,7 +9975,7 @@
                 </a:solidFill>
                 <a:latin typeface="Calibri"/>
               </a:rPr>
-              <a:t>≥3 distinct drivers and ≥10 visits</a:t>
+              <a:t>including every service stop</a:t>
             </a:r>
           </a:p>
         </p:txBody>
@@ -9454,8 +9988,8 @@
         </p:nvSpPr>
         <p:spPr>
           <a:xfrm>
-            <a:off x="6428232" y="1691640"/>
-            <a:ext cx="2615184" cy="1481328"/>
+            <a:off x="502920" y="3310128"/>
+            <a:ext cx="3154680" cy="1481328"/>
           </a:xfrm>
           <a:prstGeom prst="roundRect">
             <a:avLst>
@@ -9500,8 +10034,8 @@
         </p:nvSpPr>
         <p:spPr>
           <a:xfrm>
-            <a:off x="6592824" y="1819656"/>
-            <a:ext cx="2286000" cy="1243584"/>
+            <a:off x="667512" y="3438144"/>
+            <a:ext cx="2825496" cy="1243584"/>
           </a:xfrm>
           <a:prstGeom prst="rect">
             <a:avLst/>
@@ -9526,7 +10060,7 @@
                 </a:solidFill>
                 <a:latin typeface="Cambria"/>
               </a:rPr>
-              <a:t>30%</a:t>
+              <a:t>37%</a:t>
             </a:r>
           </a:p>
           <a:p>
@@ -9542,7 +10076,7 @@
                 </a:solidFill>
                 <a:latin typeface="Calibri"/>
               </a:rPr>
-              <a:t>register corroboration</a:t>
+              <a:t>of run time at stops</a:t>
             </a:r>
           </a:p>
           <a:p>
@@ -9558,7 +10092,7 @@
                 </a:solidFill>
                 <a:latin typeface="Calibri"/>
               </a:rPr>
-              <a:t>of official stops in the observed footprint</a:t>
+              <a:t>boarding + waiting dwell share</a:t>
             </a:r>
           </a:p>
         </p:txBody>
@@ -9571,8 +10105,8 @@
         </p:nvSpPr>
         <p:spPr>
           <a:xfrm>
-            <a:off x="9390888" y="1691640"/>
-            <a:ext cx="2615184" cy="1481328"/>
+            <a:off x="3840480" y="3310128"/>
+            <a:ext cx="3154680" cy="1481328"/>
           </a:xfrm>
           <a:prstGeom prst="roundRect">
             <a:avLst>
@@ -9617,8 +10151,8 @@
         </p:nvSpPr>
         <p:spPr>
           <a:xfrm>
-            <a:off x="9555480" y="1819656"/>
-            <a:ext cx="2286000" cy="1243584"/>
+            <a:off x="4005072" y="3438144"/>
+            <a:ext cx="2825496" cy="1243584"/>
           </a:xfrm>
           <a:prstGeom prst="rect">
             <a:avLst/>
@@ -9643,7 +10177,7 @@
                 </a:solidFill>
                 <a:latin typeface="Cambria"/>
               </a:rPr>
-              <a:t>135</a:t>
+              <a:t>17 vs 24</a:t>
             </a:r>
           </a:p>
           <a:p>
@@ -9659,7 +10193,7 @@
                 </a:solidFill>
                 <a:latin typeface="Calibri"/>
               </a:rPr>
-              <a:t>enrichment candidates</a:t>
+              <a:t>core vs periphery km/h</a:t>
             </a:r>
           </a:p>
           <a:p>
@@ -9675,7 +10209,7 @@
                 </a:solidFill>
                 <a:latin typeface="Calibri"/>
               </a:rPr>
-              <a:t>observed stops the register doesn't list</a:t>
+              <a:t>10,600-cell congestion heatmap</a:t>
             </a:r>
           </a:p>
         </p:txBody>
@@ -9688,8 +10222,8 @@
         </p:nvSpPr>
         <p:spPr>
           <a:xfrm>
-            <a:off x="502920" y="3611880"/>
-            <a:ext cx="11155680" cy="2011680"/>
+            <a:off x="502920" y="4983480"/>
+            <a:ext cx="6492240" cy="1417320"/>
           </a:xfrm>
           <a:prstGeom prst="roundRect">
             <a:avLst>
@@ -9734,8 +10268,8 @@
         </p:nvSpPr>
         <p:spPr>
           <a:xfrm>
-            <a:off x="777240" y="3822191"/>
-            <a:ext cx="10607040" cy="1691640"/>
+            <a:off x="731520" y="5138928"/>
+            <a:ext cx="6035040" cy="1143000"/>
           </a:xfrm>
           <a:prstGeom prst="rect">
             <a:avLst/>
@@ -9750,49 +10284,80 @@
           <a:p>
             <a:pPr algn="l">
               <a:spcAft>
-                <a:spcPts val="600"/>
-              </a:spcAft>
-            </a:pPr>
-            <a:r>
-              <a:rPr sz="1450" b="1" i="0">
-                <a:solidFill>
-                  <a:srgbClr val="0F6E56"/>
-                </a:solidFill>
-                <a:latin typeface="Cambria"/>
-              </a:rPr>
-              <a:t>Framed honestly: enrichment, not indictment</a:t>
-            </a:r>
-          </a:p>
-          <a:p>
-            <a:pPr algn="l">
-              <a:spcAft>
-                <a:spcPts val="600"/>
-              </a:spcAft>
-            </a:pPr>
-            <a:r>
-              <a:rPr sz="1300" b="0" i="0">
+                <a:spcPts val="0"/>
+              </a:spcAft>
+            </a:pPr>
+            <a:r>
+              <a:rPr sz="1200" b="0" i="0">
                 <a:solidFill>
                   <a:srgbClr val="102A2E"/>
                 </a:solidFill>
                 <a:latin typeface="Calibri"/>
               </a:rPr>
-              <a:t>The official register is endpoint-oriented — mid-route stops are “new” by construction, so 135 candidates doesn't mean 135 missing stops. It means the GPS fills exactly the gap the RTO's P0 data-ask (a surveyed stop register) was meant to close.</a:t>
-            </a:r>
-          </a:p>
-          <a:p>
-            <a:pPr algn="l">
+              <a:t>Why it matters: the engine's drive times come from a CAR model (55–137 km/h “free flow” here). This layer replaces that assumption with measurement — per 100 m cell, per corridor.</a:t>
+            </a:r>
+          </a:p>
+        </p:txBody>
+      </p:sp>
+      <p:pic>
+        <p:nvPicPr>
+          <p:cNvPr id="14" name="Picture 13" descr="speed_layer.png"/>
+          <p:cNvPicPr>
+            <a:picLocks noChangeAspect="1"/>
+          </p:cNvPicPr>
+          <p:nvPr/>
+        </p:nvPicPr>
+        <p:blipFill>
+          <a:blip r:embed="rId2"/>
+          <a:stretch>
+            <a:fillRect/>
+          </a:stretch>
+        </p:blipFill>
+        <p:spPr>
+          <a:xfrm>
+            <a:off x="7360920" y="1417320"/>
+            <a:ext cx="4640342" cy="4983480"/>
+          </a:xfrm>
+          <a:prstGeom prst="rect">
+            <a:avLst/>
+          </a:prstGeom>
+        </p:spPr>
+      </p:pic>
+      <p:sp>
+        <p:nvSpPr>
+          <p:cNvPr id="15" name="TextBox 14"/>
+          <p:cNvSpPr txBox="1"/>
+          <p:nvPr/>
+        </p:nvSpPr>
+        <p:spPr>
+          <a:xfrm>
+            <a:off x="7360920" y="6437376"/>
+            <a:ext cx="4480560" cy="457200"/>
+          </a:xfrm>
+          <a:prstGeom prst="rect">
+            <a:avLst/>
+          </a:prstGeom>
+          <a:noFill/>
+        </p:spPr>
+        <p:txBody>
+          <a:bodyPr wrap="square" lIns="0" rIns="0" tIns="0" bIns="0">
+            <a:spAutoFit/>
+          </a:bodyPr>
+          <a:lstStyle/>
+          <a:p>
+            <a:pPr algn="ctr">
               <a:spcAft>
                 <a:spcPts val="0"/>
               </a:spcAft>
             </a:pPr>
             <a:r>
-              <a:rPr sz="1300" b="0" i="0">
-                <a:solidFill>
-                  <a:srgbClr val="102A2E"/>
-                </a:solidFill>
-                <a:latin typeface="Calibri"/>
-              </a:rPr>
-              <a:t>Each candidate ships with coordinates, visit counts and distinct-driver support — ready for field validation.</a:t>
+              <a:rPr sz="1150" b="0" i="1">
+                <a:solidFill>
+                  <a:srgbClr val="5B6B6B"/>
+                </a:solidFill>
+                <a:latin typeface="Calibri"/>
+              </a:rPr>
+              <a:t>Measured speed per cell — red = congested crawl.</a:t>
             </a:r>
           </a:p>
         </p:txBody>
@@ -9830,7 +10395,7 @@
             <a:avLst/>
           </a:prstGeom>
           <a:solidFill>
-            <a:srgbClr val="0A3D33"/>
+            <a:srgbClr val="FFFFFF"/>
           </a:solidFill>
           <a:ln>
             <a:noFill/>
@@ -9867,8 +10432,8 @@
         </p:nvSpPr>
         <p:spPr>
           <a:xfrm>
-            <a:off x="502920" y="365760"/>
-            <a:ext cx="11155680" cy="1005840"/>
+            <a:off x="502920" y="292608"/>
+            <a:ext cx="11155680" cy="1188720"/>
           </a:xfrm>
           <a:prstGeom prst="rect">
             <a:avLst/>
@@ -9889,11 +10454,11 @@
             <a:r>
               <a:rPr sz="1200" b="1" i="0">
                 <a:solidFill>
-                  <a:srgbClr val="7FC8AF"/>
-                </a:solidFill>
-                <a:latin typeface="Calibri"/>
-              </a:rPr>
-              <a:t>READ BEFORE CITING</a:t>
+                  <a:srgbClr val="0F6E56"/>
+                </a:solidFill>
+                <a:latin typeface="Calibri"/>
+              </a:rPr>
+              <a:t>STEP 4 — OPERATIONS</a:t>
             </a:r>
           </a:p>
           <a:p>
@@ -9905,11 +10470,27 @@
             <a:r>
               <a:rPr sz="3100" b="1" i="0">
                 <a:solidFill>
-                  <a:srgbClr val="FFFFFF"/>
+                  <a:srgbClr val="102A2E"/>
                 </a:solidFill>
                 <a:latin typeface="Cambria"/>
               </a:rPr>
-              <a:t>What this data cannot tell us</a:t>
+              <a:t>What a driver's day actually looks like</a:t>
+            </a:r>
+          </a:p>
+          <a:p>
+            <a:pPr algn="l">
+              <a:spcAft>
+                <a:spcPts val="0"/>
+              </a:spcAft>
+            </a:pPr>
+            <a:r>
+              <a:rPr sz="1300" b="0" i="0">
+                <a:solidFill>
+                  <a:srgbClr val="5B6B6B"/>
+                </a:solidFill>
+                <a:latin typeface="Calibri"/>
+              </a:rPr>
+              <a:t>855 measured driver-days — duty spans, utilisation, terminal turnarounds and the shape of the service day.</a:t>
             </a:r>
           </a:p>
         </p:txBody>
@@ -9922,8 +10503,8 @@
         </p:nvSpPr>
         <p:spPr>
           <a:xfrm>
-            <a:off x="502920" y="1600200"/>
-            <a:ext cx="11155680" cy="841248"/>
+            <a:off x="502920" y="1691640"/>
+            <a:ext cx="2615184" cy="1481328"/>
           </a:xfrm>
           <a:prstGeom prst="roundRect">
             <a:avLst>
@@ -9931,7 +10512,7 @@
             </a:avLst>
           </a:prstGeom>
           <a:solidFill>
-            <a:srgbClr val="0E4A3E"/>
+            <a:srgbClr val="E9F2EE"/>
           </a:solidFill>
           <a:ln>
             <a:noFill/>
@@ -9968,8 +10549,8 @@
         </p:nvSpPr>
         <p:spPr>
           <a:xfrm>
-            <a:off x="777240" y="1691640"/>
-            <a:ext cx="10607040" cy="676656"/>
+            <a:off x="667512" y="1819656"/>
+            <a:ext cx="2286000" cy="1243584"/>
           </a:xfrm>
           <a:prstGeom prst="rect">
             <a:avLst/>
@@ -9984,17 +10565,33 @@
           <a:p>
             <a:pPr algn="l">
               <a:spcAft>
-                <a:spcPts val="100"/>
-              </a:spcAft>
-            </a:pPr>
-            <a:r>
-              <a:rPr sz="1350" b="1" i="0">
-                <a:solidFill>
-                  <a:srgbClr val="FFFFFF"/>
-                </a:solidFill>
-                <a:latin typeface="Calibri"/>
-              </a:rPr>
-              <a:t>Partial, self-selected adoption</a:t>
+                <a:spcPts val="400"/>
+              </a:spcAft>
+            </a:pPr>
+            <a:r>
+              <a:rPr sz="3000" b="1" i="0">
+                <a:solidFill>
+                  <a:srgbClr val="0F6E56"/>
+                </a:solidFill>
+                <a:latin typeface="Cambria"/>
+              </a:rPr>
+              <a:t>7.9 h</a:t>
+            </a:r>
+          </a:p>
+          <a:p>
+            <a:pPr algn="l">
+              <a:spcAft>
+                <a:spcPts val="400"/>
+              </a:spcAft>
+            </a:pPr>
+            <a:r>
+              <a:rPr sz="1250" b="1" i="0">
+                <a:solidFill>
+                  <a:srgbClr val="102A2E"/>
+                </a:solidFill>
+                <a:latin typeface="Calibri"/>
+              </a:rPr>
+              <a:t>duty-day span</a:t>
             </a:r>
           </a:p>
           <a:p>
@@ -10004,13 +10601,13 @@
               </a:spcAft>
             </a:pPr>
             <a:r>
-              <a:rPr sz="1150" b="0" i="0">
-                <a:solidFill>
-                  <a:srgbClr val="C9E2D8"/>
-                </a:solidFill>
-                <a:latin typeface="Calibri"/>
-              </a:rPr>
-              <a:t>~157 active drivers, Srinagar-concentrated. “No app data on a route” does NOT mean “no service”.</a:t>
+              <a:rPr sz="1000" b="0" i="0">
+                <a:solidFill>
+                  <a:srgbClr val="5B6B6B"/>
+                </a:solidFill>
+                <a:latin typeface="Calibri"/>
+              </a:rPr>
+              <a:t>4.8 h of it in service = 76% utilisation</a:t>
             </a:r>
           </a:p>
         </p:txBody>
@@ -10023,8 +10620,8 @@
         </p:nvSpPr>
         <p:spPr>
           <a:xfrm>
-            <a:off x="502920" y="2569464"/>
-            <a:ext cx="11155680" cy="841248"/>
+            <a:off x="3465576" y="1691640"/>
+            <a:ext cx="2615184" cy="1481328"/>
           </a:xfrm>
           <a:prstGeom prst="roundRect">
             <a:avLst>
@@ -10032,7 +10629,7 @@
             </a:avLst>
           </a:prstGeom>
           <a:solidFill>
-            <a:srgbClr val="0E4A3E"/>
+            <a:srgbClr val="E9F2EE"/>
           </a:solidFill>
           <a:ln>
             <a:noFill/>
@@ -10069,8 +10666,8 @@
         </p:nvSpPr>
         <p:spPr>
           <a:xfrm>
-            <a:off x="777240" y="2660904"/>
-            <a:ext cx="10607040" cy="676656"/>
+            <a:off x="3630168" y="1819656"/>
+            <a:ext cx="2286000" cy="1243584"/>
           </a:xfrm>
           <a:prstGeom prst="rect">
             <a:avLst/>
@@ -10085,17 +10682,33 @@
           <a:p>
             <a:pPr algn="l">
               <a:spcAft>
-                <a:spcPts val="100"/>
-              </a:spcAft>
-            </a:pPr>
-            <a:r>
-              <a:rPr sz="1350" b="1" i="0">
-                <a:solidFill>
-                  <a:srgbClr val="FFFFFF"/>
-                </a:solidFill>
-                <a:latin typeface="Calibri"/>
-              </a:rPr>
-              <a:t>No demand, no ridership, no frequency</a:t>
+                <a:spcPts val="400"/>
+              </a:spcAft>
+            </a:pPr>
+            <a:r>
+              <a:rPr sz="3000" b="1" i="0">
+                <a:solidFill>
+                  <a:srgbClr val="0F6E56"/>
+                </a:solidFill>
+                <a:latin typeface="Cambria"/>
+              </a:rPr>
+              <a:t>24 min</a:t>
+            </a:r>
+          </a:p>
+          <a:p>
+            <a:pPr algn="l">
+              <a:spcAft>
+                <a:spcPts val="400"/>
+              </a:spcAft>
+            </a:pPr>
+            <a:r>
+              <a:rPr sz="1250" b="1" i="0">
+                <a:solidFill>
+                  <a:srgbClr val="102A2E"/>
+                </a:solidFill>
+                <a:latin typeface="Calibri"/>
+              </a:rPr>
+              <a:t>median terminal turn</a:t>
             </a:r>
           </a:p>
           <a:p>
@@ -10105,13 +10718,13 @@
               </a:spcAft>
             </a:pPr>
             <a:r>
-              <a:rPr sz="1150" b="0" i="0">
-                <a:solidFill>
-                  <a:srgbClr val="C9E2D8"/>
-                </a:solidFill>
-                <a:latin typeface="Calibri"/>
-              </a:rPr>
-              <a:t>The app sees vehicles, not passengers. Observed run counts reflect who installed the app — never cited as service frequency.</a:t>
+              <a:rPr sz="1000" b="0" i="0">
+                <a:solidFill>
+                  <a:srgbClr val="5B6B6B"/>
+                </a:solidFill>
+                <a:latin typeface="Calibri"/>
+              </a:rPr>
+              <a:t>door-to-door incl. layover (n=1,178)</a:t>
             </a:r>
           </a:p>
         </p:txBody>
@@ -10124,8 +10737,8 @@
         </p:nvSpPr>
         <p:spPr>
           <a:xfrm>
-            <a:off x="502920" y="3538728"/>
-            <a:ext cx="11155680" cy="841248"/>
+            <a:off x="6428232" y="1691640"/>
+            <a:ext cx="2615184" cy="1481328"/>
           </a:xfrm>
           <a:prstGeom prst="roundRect">
             <a:avLst>
@@ -10133,7 +10746,7 @@
             </a:avLst>
           </a:prstGeom>
           <a:solidFill>
-            <a:srgbClr val="0E4A3E"/>
+            <a:srgbClr val="E9F2EE"/>
           </a:solidFill>
           <a:ln>
             <a:noFill/>
@@ -10170,8 +10783,8 @@
         </p:nvSpPr>
         <p:spPr>
           <a:xfrm>
-            <a:off x="777240" y="3630168"/>
-            <a:ext cx="10607040" cy="676656"/>
+            <a:off x="6592824" y="1819656"/>
+            <a:ext cx="2286000" cy="1243584"/>
           </a:xfrm>
           <a:prstGeom prst="rect">
             <a:avLst/>
@@ -10186,17 +10799,33 @@
           <a:p>
             <a:pPr algn="l">
               <a:spcAft>
-                <a:spcPts val="100"/>
-              </a:spcAft>
-            </a:pPr>
-            <a:r>
-              <a:rPr sz="1350" b="1" i="0">
-                <a:solidFill>
-                  <a:srgbClr val="FFFFFF"/>
-                </a:solidFill>
-                <a:latin typeface="Calibri"/>
-              </a:rPr>
-              <a:t>Corridors cover 41% of clean runs</a:t>
+                <a:spcPts val="400"/>
+              </a:spcAft>
+            </a:pPr>
+            <a:r>
+              <a:rPr sz="3000" b="1" i="0">
+                <a:solidFill>
+                  <a:srgbClr val="0F6E56"/>
+                </a:solidFill>
+                <a:latin typeface="Cambria"/>
+              </a:rPr>
+              <a:t>10:20–18:15</a:t>
+            </a:r>
+          </a:p>
+          <a:p>
+            <a:pPr algn="l">
+              <a:spcAft>
+                <a:spcPts val="400"/>
+              </a:spcAft>
+            </a:pPr>
+            <a:r>
+              <a:rPr sz="1250" b="1" i="0">
+                <a:solidFill>
+                  <a:srgbClr val="102A2E"/>
+                </a:solidFill>
+                <a:latin typeface="Calibri"/>
+              </a:rPr>
+              <a:t>the typical service day</a:t>
             </a:r>
           </a:p>
           <a:p>
@@ -10206,13 +10835,13 @@
               </a:spcAft>
             </a:pPr>
             <a:r>
-              <a:rPr sz="1150" b="0" i="0">
-                <a:solidFill>
-                  <a:srgbClr val="C9E2D8"/>
-                </a:solidFill>
-                <a:latin typeface="Calibri"/>
-              </a:rPr>
-              <a:t>The other 59% was decomposed and shown to be noise, loops and out-of-division traffic — but the corridor findings describe the frequently-driven core only.</a:t>
+              <a:rPr sz="1000" b="0" i="0">
+                <a:solidFill>
+                  <a:srgbClr val="5B6B6B"/>
+                </a:solidFill>
+                <a:latin typeface="Calibri"/>
+              </a:rPr>
+              <a:t>ramps from 8:00, peaks 14:00–17:00</a:t>
             </a:r>
           </a:p>
         </p:txBody>
@@ -10225,8 +10854,8 @@
         </p:nvSpPr>
         <p:spPr>
           <a:xfrm>
-            <a:off x="502920" y="4507992"/>
-            <a:ext cx="11155680" cy="841248"/>
+            <a:off x="9390888" y="1691640"/>
+            <a:ext cx="2615184" cy="1481328"/>
           </a:xfrm>
           <a:prstGeom prst="roundRect">
             <a:avLst>
@@ -10234,7 +10863,7 @@
             </a:avLst>
           </a:prstGeom>
           <a:solidFill>
-            <a:srgbClr val="0E4A3E"/>
+            <a:srgbClr val="E9F2EE"/>
           </a:solidFill>
           <a:ln>
             <a:noFill/>
@@ -10271,8 +10900,8 @@
         </p:nvSpPr>
         <p:spPr>
           <a:xfrm>
-            <a:off x="777240" y="4599431"/>
-            <a:ext cx="10607040" cy="676656"/>
+            <a:off x="9555480" y="1819656"/>
+            <a:ext cx="2286000" cy="1243584"/>
           </a:xfrm>
           <a:prstGeom prst="rect">
             <a:avLst/>
@@ -10287,17 +10916,33 @@
           <a:p>
             <a:pPr algn="l">
               <a:spcAft>
-                <a:spcPts val="100"/>
-              </a:spcAft>
-            </a:pPr>
-            <a:r>
-              <a:rPr sz="1350" b="1" i="0">
-                <a:solidFill>
-                  <a:srgbClr val="FFFFFF"/>
-                </a:solidFill>
-                <a:latin typeface="Calibri"/>
-              </a:rPr>
-              <a:t>Observed times are an upper bound</a:t>
+                <a:spcPts val="400"/>
+              </a:spcAft>
+            </a:pPr>
+            <a:r>
+              <a:rPr sz="3000" b="1" i="0">
+                <a:solidFill>
+                  <a:srgbClr val="0F6E56"/>
+                </a:solidFill>
+                <a:latin typeface="Cambria"/>
+              </a:rPr>
+              <a:t>~19:00</a:t>
+            </a:r>
+          </a:p>
+          <a:p>
+            <a:pPr algn="l">
+              <a:spcAft>
+                <a:spcPts val="400"/>
+              </a:spcAft>
+            </a:pPr>
+            <a:r>
+              <a:rPr sz="1250" b="1" i="0">
+                <a:solidFill>
+                  <a:srgbClr val="102A2E"/>
+                </a:solidFill>
+                <a:latin typeface="Calibri"/>
+              </a:rPr>
+              <a:t>service collapses</a:t>
             </a:r>
           </a:p>
           <a:p>
@@ -10307,13 +10952,13 @@
               </a:spcAft>
             </a:pPr>
             <a:r>
-              <a:rPr sz="1150" b="0" i="0">
-                <a:solidFill>
-                  <a:srgbClr val="C9E2D8"/>
-                </a:solidFill>
-                <a:latin typeface="Calibri"/>
-              </a:rPr>
-              <a:t>They embody informal wait-to-fill practice; a scheduled, headway-enforced service should beat them.</a:t>
+              <a:rPr sz="1000" b="0" i="0">
+                <a:solidFill>
+                  <a:srgbClr val="5B6B6B"/>
+                </a:solidFill>
+                <a:latin typeface="Calibri"/>
+              </a:rPr>
+              <a:t>the observed fleet stops by evening</a:t>
             </a:r>
           </a:p>
         </p:txBody>
@@ -10326,8 +10971,8 @@
         </p:nvSpPr>
         <p:spPr>
           <a:xfrm>
-            <a:off x="502920" y="5477256"/>
-            <a:ext cx="11155680" cy="841248"/>
+            <a:off x="502920" y="3611880"/>
+            <a:ext cx="11155680" cy="1965960"/>
           </a:xfrm>
           <a:prstGeom prst="roundRect">
             <a:avLst>
@@ -10335,7 +10980,7 @@
             </a:avLst>
           </a:prstGeom>
           <a:solidFill>
-            <a:srgbClr val="0E4A3E"/>
+            <a:srgbClr val="E9F2EE"/>
           </a:solidFill>
           <a:ln>
             <a:noFill/>
@@ -10372,8 +11017,8 @@
         </p:nvSpPr>
         <p:spPr>
           <a:xfrm>
-            <a:off x="777240" y="5568696"/>
-            <a:ext cx="10607040" cy="676656"/>
+            <a:off x="777240" y="3822191"/>
+            <a:ext cx="10607040" cy="1645920"/>
           </a:xfrm>
           <a:prstGeom prst="rect">
             <a:avLst/>
@@ -10388,17 +11033,33 @@
           <a:p>
             <a:pPr algn="l">
               <a:spcAft>
-                <a:spcPts val="100"/>
-              </a:spcAft>
-            </a:pPr>
-            <a:r>
-              <a:rPr sz="1350" b="1" i="0">
-                <a:solidFill>
-                  <a:srgbClr val="FFFFFF"/>
-                </a:solidFill>
-                <a:latin typeface="Calibri"/>
-              </a:rPr>
-              <a:t>Rural routes remain unvalidated</a:t>
+                <a:spcPts val="600"/>
+              </a:spcAft>
+            </a:pPr>
+            <a:r>
+              <a:rPr sz="1450" b="1" i="0">
+                <a:solidFill>
+                  <a:srgbClr val="0F6E56"/>
+                </a:solidFill>
+                <a:latin typeface="Cambria"/>
+              </a:rPr>
+              <a:t>Two operational takeaways</a:t>
+            </a:r>
+          </a:p>
+          <a:p>
+            <a:pPr algn="l">
+              <a:spcAft>
+                <a:spcPts val="600"/>
+              </a:spcAft>
+            </a:pPr>
+            <a:r>
+              <a:rPr sz="1300" b="0" i="0">
+                <a:solidFill>
+                  <a:srgbClr val="102A2E"/>
+                </a:solidFill>
+                <a:latin typeface="Calibri"/>
+              </a:rPr>
+              <a:t>1.  Evening service is the gap. Measured in-service time collapses after ~19:00 across the observed fleet — an enforced-headway evening tier would be a visible, cheap service win.</a:t>
             </a:r>
           </a:p>
           <a:p>
@@ -10408,13 +11069,13 @@
               </a:spcAft>
             </a:pPr>
             <a:r>
-              <a:rPr sz="1150" b="0" i="0">
-                <a:solidFill>
-                  <a:srgbClr val="C9E2D8"/>
-                </a:solidFill>
-                <a:latin typeface="Calibri"/>
-              </a:rPr>
-              <a:t>Measured corrections touch 5 Srinagar-core corridors; long rural lifeline cycle times still rest on the model.</a:t>
+              <a:rPr sz="1300" b="0" i="0">
+                <a:solidFill>
+                  <a:srgbClr val="102A2E"/>
+                </a:solidFill>
+                <a:latin typeface="Calibri"/>
+              </a:rPr>
+              <a:t>2.  The 24-minute turn is what schedulers must plan for. It includes waiting-to-fill, so a scheduled service can beat it — but any timetable assuming near-zero recovery is fiction.</a:t>
             </a:r>
           </a:p>
         </p:txBody>

--- a/Bus_Sathi_Trace_Intelligence_Briefing.pptx
+++ b/Bus_Sathi_Trace_Intelligence_Briefing.pptx
@@ -18,6 +18,7 @@
     <p:sldId id="266" r:id="rId17"/>
     <p:sldId id="267" r:id="rId18"/>
     <p:sldId id="268" r:id="rId19"/>
+    <p:sldId id="269" r:id="rId20"/>
   </p:sldIdLst>
   <p:sldSz cx="12191695" cy="6858000" type="screen4x3"/>
   <p:notesSz cx="6858000" cy="9144000"/>
@@ -5285,7 +5286,7 @@
             <a:avLst/>
           </a:prstGeom>
           <a:solidFill>
-            <a:srgbClr val="0A3D33"/>
+            <a:srgbClr val="FFFFFF"/>
           </a:solidFill>
           <a:ln>
             <a:noFill/>
@@ -5322,8 +5323,8 @@
         </p:nvSpPr>
         <p:spPr>
           <a:xfrm>
-            <a:off x="502920" y="365760"/>
-            <a:ext cx="11155680" cy="1005840"/>
+            <a:off x="502920" y="292608"/>
+            <a:ext cx="11155680" cy="1188720"/>
           </a:xfrm>
           <a:prstGeom prst="rect">
             <a:avLst/>
@@ -5344,11 +5345,11 @@
             <a:r>
               <a:rPr sz="1200" b="1" i="0">
                 <a:solidFill>
-                  <a:srgbClr val="7FC8AF"/>
-                </a:solidFill>
-                <a:latin typeface="Calibri"/>
-              </a:rPr>
-              <a:t>READ BEFORE CITING</a:t>
+                  <a:srgbClr val="0F6E56"/>
+                </a:solidFill>
+                <a:latin typeface="Calibri"/>
+              </a:rPr>
+              <a:t>SECOND HARVEST</a:t>
             </a:r>
           </a:p>
           <a:p>
@@ -5360,11 +5361,27 @@
             <a:r>
               <a:rPr sz="3100" b="1" i="0">
                 <a:solidFill>
-                  <a:srgbClr val="FFFFFF"/>
+                  <a:srgbClr val="102A2E"/>
                 </a:solidFill>
                 <a:latin typeface="Cambria"/>
               </a:rPr>
-              <a:t>What this data cannot tell us</a:t>
+              <a:t>The whole valley, recovered from broken fragments</a:t>
+            </a:r>
+          </a:p>
+          <a:p>
+            <a:pPr algn="l">
+              <a:spcAft>
+                <a:spcPts val="0"/>
+              </a:spcAft>
+            </a:pPr>
+            <a:r>
+              <a:rPr sz="1300" b="0" i="0">
+                <a:solidFill>
+                  <a:srgbClr val="5B6B6B"/>
+                </a:solidFill>
+                <a:latin typeface="Calibri"/>
+              </a:rPr>
+              <a:t>Long-haul runs exist only as fragments (the app gets toggled mid-journey) — so fragments now vote for road-km instead of whole runs.</a:t>
             </a:r>
           </a:p>
         </p:txBody>
@@ -5377,8 +5394,8 @@
         </p:nvSpPr>
         <p:spPr>
           <a:xfrm>
-            <a:off x="502920" y="1600200"/>
-            <a:ext cx="11155680" cy="841248"/>
+            <a:off x="502920" y="1691640"/>
+            <a:ext cx="3154680" cy="1481328"/>
           </a:xfrm>
           <a:prstGeom prst="roundRect">
             <a:avLst>
@@ -5386,7 +5403,7 @@
             </a:avLst>
           </a:prstGeom>
           <a:solidFill>
-            <a:srgbClr val="0E4A3E"/>
+            <a:srgbClr val="E9F2EE"/>
           </a:solidFill>
           <a:ln>
             <a:noFill/>
@@ -5423,8 +5440,8 @@
         </p:nvSpPr>
         <p:spPr>
           <a:xfrm>
-            <a:off x="777240" y="1691640"/>
-            <a:ext cx="10607040" cy="676656"/>
+            <a:off x="667512" y="1819656"/>
+            <a:ext cx="2825496" cy="1243584"/>
           </a:xfrm>
           <a:prstGeom prst="rect">
             <a:avLst/>
@@ -5439,17 +5456,33 @@
           <a:p>
             <a:pPr algn="l">
               <a:spcAft>
-                <a:spcPts val="100"/>
-              </a:spcAft>
-            </a:pPr>
-            <a:r>
-              <a:rPr sz="1350" b="1" i="0">
-                <a:solidFill>
-                  <a:srgbClr val="FFFFFF"/>
-                </a:solidFill>
-                <a:latin typeface="Calibri"/>
-              </a:rPr>
-              <a:t>Partial, self-selected adoption</a:t>
+                <a:spcPts val="400"/>
+              </a:spcAft>
+            </a:pPr>
+            <a:r>
+              <a:rPr sz="3000" b="1" i="0">
+                <a:solidFill>
+                  <a:srgbClr val="0F6E56"/>
+                </a:solidFill>
+                <a:latin typeface="Cambria"/>
+              </a:rPr>
+              <a:t>172 / 186</a:t>
+            </a:r>
+          </a:p>
+          <a:p>
+            <a:pPr algn="l">
+              <a:spcAft>
+                <a:spcPts val="400"/>
+              </a:spcAft>
+            </a:pPr>
+            <a:r>
+              <a:rPr sz="1250" b="1" i="0">
+                <a:solidFill>
+                  <a:srgbClr val="102A2E"/>
+                </a:solidFill>
+                <a:latin typeface="Calibri"/>
+              </a:rPr>
+              <a:t>plan routes evidenced</a:t>
             </a:r>
           </a:p>
           <a:p>
@@ -5459,13 +5492,13 @@
               </a:spcAft>
             </a:pPr>
             <a:r>
-              <a:rPr sz="1150" b="0" i="0">
-                <a:solidFill>
-                  <a:srgbClr val="C9E2D8"/>
-                </a:solidFill>
-                <a:latin typeface="Calibri"/>
-              </a:rPr>
-              <a:t>~157 active drivers, Srinagar-concentrated. “No app data on a route” does NOT mean “no service”.</a:t>
+              <a:rPr sz="1000" b="0" i="0">
+                <a:solidFill>
+                  <a:srgbClr val="5B6B6B"/>
+                </a:solidFill>
+                <a:latin typeface="Calibri"/>
+              </a:rPr>
+              <a:t>≥50% of alignment driven, ≥2 drivers</a:t>
             </a:r>
           </a:p>
         </p:txBody>
@@ -5478,8 +5511,8 @@
         </p:nvSpPr>
         <p:spPr>
           <a:xfrm>
-            <a:off x="502920" y="2569464"/>
-            <a:ext cx="11155680" cy="841248"/>
+            <a:off x="3840480" y="1691640"/>
+            <a:ext cx="3154680" cy="1481328"/>
           </a:xfrm>
           <a:prstGeom prst="roundRect">
             <a:avLst>
@@ -5487,7 +5520,7 @@
             </a:avLst>
           </a:prstGeom>
           <a:solidFill>
-            <a:srgbClr val="0E4A3E"/>
+            <a:srgbClr val="E9F2EE"/>
           </a:solidFill>
           <a:ln>
             <a:noFill/>
@@ -5524,8 +5557,8 @@
         </p:nvSpPr>
         <p:spPr>
           <a:xfrm>
-            <a:off x="777240" y="2660904"/>
-            <a:ext cx="10607040" cy="676656"/>
+            <a:off x="4005072" y="1819656"/>
+            <a:ext cx="2825496" cy="1243584"/>
           </a:xfrm>
           <a:prstGeom prst="rect">
             <a:avLst/>
@@ -5540,17 +5573,33 @@
           <a:p>
             <a:pPr algn="l">
               <a:spcAft>
-                <a:spcPts val="100"/>
-              </a:spcAft>
-            </a:pPr>
-            <a:r>
-              <a:rPr sz="1350" b="1" i="0">
-                <a:solidFill>
-                  <a:srgbClr val="FFFFFF"/>
-                </a:solidFill>
-                <a:latin typeface="Calibri"/>
-              </a:rPr>
-              <a:t>No demand, no ridership, no frequency</a:t>
+                <a:spcPts val="400"/>
+              </a:spcAft>
+            </a:pPr>
+            <a:r>
+              <a:rPr sz="3000" b="1" i="0">
+                <a:solidFill>
+                  <a:srgbClr val="0F6E56"/>
+                </a:solidFill>
+                <a:latin typeface="Cambria"/>
+              </a:rPr>
+              <a:t>59 km</a:t>
+            </a:r>
+          </a:p>
+          <a:p>
+            <a:pPr algn="l">
+              <a:spcAft>
+                <a:spcPts val="400"/>
+              </a:spcAft>
+            </a:pPr>
+            <a:r>
+              <a:rPr sz="1250" b="1" i="0">
+                <a:solidFill>
+                  <a:srgbClr val="102A2E"/>
+                </a:solidFill>
+                <a:latin typeface="Calibri"/>
+              </a:rPr>
+              <a:t>Anantnag–Srinagar</a:t>
             </a:r>
           </a:p>
           <a:p>
@@ -5560,13 +5609,13 @@
               </a:spcAft>
             </a:pPr>
             <a:r>
-              <a:rPr sz="1150" b="0" i="0">
-                <a:solidFill>
-                  <a:srgbClr val="C9E2D8"/>
-                </a:solidFill>
-                <a:latin typeface="Calibri"/>
-              </a:rPr>
-              <a:t>The app sees vehicles, not passengers. Observed run counts reflect who installed the app — never cited as service frequency.</a:t>
+              <a:rPr sz="1000" b="0" i="0">
+                <a:solidFill>
+                  <a:srgbClr val="5B6B6B"/>
+                </a:solidFill>
+                <a:latin typeface="Calibri"/>
+              </a:rPr>
+              <a:t>100% driven · 367 fragments · 24 drivers</a:t>
             </a:r>
           </a:p>
         </p:txBody>
@@ -5579,8 +5628,8 @@
         </p:nvSpPr>
         <p:spPr>
           <a:xfrm>
-            <a:off x="502920" y="3538728"/>
-            <a:ext cx="11155680" cy="841248"/>
+            <a:off x="502920" y="3310128"/>
+            <a:ext cx="3154680" cy="1481328"/>
           </a:xfrm>
           <a:prstGeom prst="roundRect">
             <a:avLst>
@@ -5588,7 +5637,7 @@
             </a:avLst>
           </a:prstGeom>
           <a:solidFill>
-            <a:srgbClr val="0E4A3E"/>
+            <a:srgbClr val="E9F2EE"/>
           </a:solidFill>
           <a:ln>
             <a:noFill/>
@@ -5625,8 +5674,8 @@
         </p:nvSpPr>
         <p:spPr>
           <a:xfrm>
-            <a:off x="777240" y="3630168"/>
-            <a:ext cx="10607040" cy="676656"/>
+            <a:off x="667512" y="3438144"/>
+            <a:ext cx="2825496" cy="1243584"/>
           </a:xfrm>
           <a:prstGeom prst="rect">
             <a:avLst/>
@@ -5641,17 +5690,33 @@
           <a:p>
             <a:pPr algn="l">
               <a:spcAft>
-                <a:spcPts val="100"/>
-              </a:spcAft>
-            </a:pPr>
-            <a:r>
-              <a:rPr sz="1350" b="1" i="0">
-                <a:solidFill>
-                  <a:srgbClr val="FFFFFF"/>
-                </a:solidFill>
-                <a:latin typeface="Calibri"/>
-              </a:rPr>
-              <a:t>Corridors cover 41% of clean runs</a:t>
+                <a:spcPts val="400"/>
+              </a:spcAft>
+            </a:pPr>
+            <a:r>
+              <a:rPr sz="3000" b="1" i="0">
+                <a:solidFill>
+                  <a:srgbClr val="0F6E56"/>
+                </a:solidFill>
+                <a:latin typeface="Cambria"/>
+              </a:rPr>
+              <a:t>64</a:t>
+            </a:r>
+          </a:p>
+          <a:p>
+            <a:pPr algn="l">
+              <a:spcAft>
+                <a:spcPts val="400"/>
+              </a:spcAft>
+            </a:pPr>
+            <a:r>
+              <a:rPr sz="1250" b="1" i="0">
+                <a:solidFill>
+                  <a:srgbClr val="102A2E"/>
+                </a:solidFill>
+                <a:latin typeface="Calibri"/>
+              </a:rPr>
+              <a:t>Tier-2 rural stops</a:t>
             </a:r>
           </a:p>
           <a:p>
@@ -5661,13 +5726,13 @@
               </a:spcAft>
             </a:pPr>
             <a:r>
-              <a:rPr sz="1150" b="0" i="0">
-                <a:solidFill>
-                  <a:srgbClr val="C9E2D8"/>
-                </a:solidFill>
-                <a:latin typeface="Calibri"/>
-              </a:rPr>
-              <a:t>The other 59% was decomposed and shown to be noise, loops and out-of-division traffic — but the corridor findings describe the frequently-driven core only.</a:t>
+              <a:rPr sz="1000" b="0" i="0">
+                <a:solidFill>
+                  <a:srgbClr val="5B6B6B"/>
+                </a:solidFill>
+                <a:latin typeface="Calibri"/>
+              </a:rPr>
+              <a:t>Anantnag 7 · Pulwama 7 · Ganderbal 3</a:t>
             </a:r>
           </a:p>
         </p:txBody>
@@ -5680,8 +5745,8 @@
         </p:nvSpPr>
         <p:spPr>
           <a:xfrm>
-            <a:off x="502920" y="4507992"/>
-            <a:ext cx="11155680" cy="841248"/>
+            <a:off x="3840480" y="3310128"/>
+            <a:ext cx="3154680" cy="1481328"/>
           </a:xfrm>
           <a:prstGeom prst="roundRect">
             <a:avLst>
@@ -5689,7 +5754,7 @@
             </a:avLst>
           </a:prstGeom>
           <a:solidFill>
-            <a:srgbClr val="0E4A3E"/>
+            <a:srgbClr val="E9F2EE"/>
           </a:solidFill>
           <a:ln>
             <a:noFill/>
@@ -5726,8 +5791,8 @@
         </p:nvSpPr>
         <p:spPr>
           <a:xfrm>
-            <a:off x="777240" y="4599431"/>
-            <a:ext cx="10607040" cy="676656"/>
+            <a:off x="4005072" y="3438144"/>
+            <a:ext cx="2825496" cy="1243584"/>
           </a:xfrm>
           <a:prstGeom prst="rect">
             <a:avLst/>
@@ -5742,17 +5807,33 @@
           <a:p>
             <a:pPr algn="l">
               <a:spcAft>
-                <a:spcPts val="100"/>
-              </a:spcAft>
-            </a:pPr>
-            <a:r>
-              <a:rPr sz="1350" b="1" i="0">
-                <a:solidFill>
-                  <a:srgbClr val="FFFFFF"/>
-                </a:solidFill>
-                <a:latin typeface="Calibri"/>
-              </a:rPr>
-              <a:t>Observed times are an upper bound</a:t>
+                <a:spcPts val="400"/>
+              </a:spcAft>
+            </a:pPr>
+            <a:r>
+              <a:rPr sz="3000" b="1" i="0">
+                <a:solidFill>
+                  <a:srgbClr val="0F6E56"/>
+                </a:solidFill>
+                <a:latin typeface="Cambria"/>
+              </a:rPr>
+              <a:t>7</a:t>
+            </a:r>
+          </a:p>
+          <a:p>
+            <a:pPr algn="l">
+              <a:spcAft>
+                <a:spcPts val="400"/>
+              </a:spcAft>
+            </a:pPr>
+            <a:r>
+              <a:rPr sz="1250" b="1" i="0">
+                <a:solidFill>
+                  <a:srgbClr val="102A2E"/>
+                </a:solidFill>
+                <a:latin typeface="Calibri"/>
+              </a:rPr>
+              <a:t>honest gaps</a:t>
             </a:r>
           </a:p>
           <a:p>
@@ -5762,13 +5843,13 @@
               </a:spcAft>
             </a:pPr>
             <a:r>
-              <a:rPr sz="1150" b="0" i="0">
-                <a:solidFill>
-                  <a:srgbClr val="C9E2D8"/>
-                </a:solidFill>
-                <a:latin typeface="Calibri"/>
-              </a:rPr>
-              <a:t>They embody informal wait-to-fill practice; a scheduled, headway-enforced service should beat them.</a:t>
+              <a:rPr sz="1000" b="0" i="0">
+                <a:solidFill>
+                  <a:srgbClr val="5B6B6B"/>
+                </a:solidFill>
+                <a:latin typeface="Calibri"/>
+              </a:rPr>
+              <a:t>little app data: Shopian/Kulgam + far NW</a:t>
             </a:r>
           </a:p>
         </p:txBody>
@@ -5781,8 +5862,8 @@
         </p:nvSpPr>
         <p:spPr>
           <a:xfrm>
-            <a:off x="502920" y="5477256"/>
-            <a:ext cx="11155680" cy="841248"/>
+            <a:off x="502920" y="4983480"/>
+            <a:ext cx="6492240" cy="1417320"/>
           </a:xfrm>
           <a:prstGeom prst="roundRect">
             <a:avLst>
@@ -5790,7 +5871,7 @@
             </a:avLst>
           </a:prstGeom>
           <a:solidFill>
-            <a:srgbClr val="0E4A3E"/>
+            <a:srgbClr val="E9F2EE"/>
           </a:solidFill>
           <a:ln>
             <a:noFill/>
@@ -5827,8 +5908,8 @@
         </p:nvSpPr>
         <p:spPr>
           <a:xfrm>
-            <a:off x="777240" y="5568696"/>
-            <a:ext cx="10607040" cy="676656"/>
+            <a:off x="731520" y="5138928"/>
+            <a:ext cx="6035040" cy="1143000"/>
           </a:xfrm>
           <a:prstGeom prst="rect">
             <a:avLst/>
@@ -5843,37 +5924,45 @@
           <a:p>
             <a:pPr algn="l">
               <a:spcAft>
-                <a:spcPts val="100"/>
-              </a:spcAft>
-            </a:pPr>
-            <a:r>
-              <a:rPr sz="1350" b="1" i="0">
-                <a:solidFill>
-                  <a:srgbClr val="FFFFFF"/>
-                </a:solidFill>
-                <a:latin typeface="Calibri"/>
-              </a:rPr>
-              <a:t>Rural routes remain unvalidated</a:t>
-            </a:r>
-          </a:p>
-          <a:p>
-            <a:pPr algn="l">
-              <a:spcAft>
                 <a:spcPts val="0"/>
               </a:spcAft>
             </a:pPr>
             <a:r>
-              <a:rPr sz="1150" b="0" i="0">
-                <a:solidFill>
-                  <a:srgbClr val="C9E2D8"/>
-                </a:solidFill>
-                <a:latin typeface="Calibri"/>
-              </a:rPr>
-              <a:t>Measured corrections touch 5 Srinagar-core corridors; long rural lifeline cycle times still rest on the model.</a:t>
-            </a:r>
-          </a:p>
-        </p:txBody>
-      </p:sp>
+              <a:rPr sz="1200" b="0" i="0">
+                <a:solidFill>
+                  <a:srgbClr val="102A2E"/>
+                </a:solidFill>
+                <a:latin typeface="Calibri"/>
+              </a:rPr>
+              <a:t>Caveat on every popup: this is ROAD-level evidence (“buses drive this alignment”) — not proof a specific permit operates end-to-end. Parallel routes share segment evidence.</a:t>
+            </a:r>
+          </a:p>
+        </p:txBody>
+      </p:sp>
+      <p:pic>
+        <p:nvPicPr>
+          <p:cNvPr id="14" name="Picture 13" descr="route_evidence.png"/>
+          <p:cNvPicPr>
+            <a:picLocks noChangeAspect="1"/>
+          </p:cNvPicPr>
+          <p:nvPr/>
+        </p:nvPicPr>
+        <p:blipFill>
+          <a:blip r:embed="rId2"/>
+          <a:stretch>
+            <a:fillRect/>
+          </a:stretch>
+        </p:blipFill>
+        <p:spPr>
+          <a:xfrm>
+            <a:off x="7315200" y="1371600"/>
+            <a:ext cx="5032834" cy="5029200"/>
+          </a:xfrm>
+          <a:prstGeom prst="rect">
+            <a:avLst/>
+          </a:prstGeom>
+        </p:spPr>
+      </p:pic>
     </p:spTree>
   </p:cSld>
   <p:clrMapOvr>
@@ -5907,6 +5996,628 @@
             <a:avLst/>
           </a:prstGeom>
           <a:solidFill>
+            <a:srgbClr val="0A3D33"/>
+          </a:solidFill>
+          <a:ln>
+            <a:noFill/>
+          </a:ln>
+          <a:effectLst/>
+        </p:spPr>
+        <p:style>
+          <a:lnRef idx="1">
+            <a:schemeClr val="accent1"/>
+          </a:lnRef>
+          <a:fillRef idx="3">
+            <a:schemeClr val="accent1"/>
+          </a:fillRef>
+          <a:effectRef idx="2">
+            <a:schemeClr val="accent1"/>
+          </a:effectRef>
+          <a:fontRef idx="minor">
+            <a:schemeClr val="lt1"/>
+          </a:fontRef>
+        </p:style>
+        <p:txBody>
+          <a:bodyPr rtlCol="0" anchor="ctr"/>
+          <a:lstStyle/>
+          <a:p>
+            <a:pPr algn="ctr"/>
+          </a:p>
+        </p:txBody>
+      </p:sp>
+      <p:sp>
+        <p:nvSpPr>
+          <p:cNvPr id="3" name="TextBox 2"/>
+          <p:cNvSpPr txBox="1"/>
+          <p:nvPr/>
+        </p:nvSpPr>
+        <p:spPr>
+          <a:xfrm>
+            <a:off x="502920" y="365760"/>
+            <a:ext cx="11155680" cy="1005840"/>
+          </a:xfrm>
+          <a:prstGeom prst="rect">
+            <a:avLst/>
+          </a:prstGeom>
+          <a:noFill/>
+        </p:spPr>
+        <p:txBody>
+          <a:bodyPr wrap="square" lIns="0" rIns="0" tIns="0" bIns="0">
+            <a:spAutoFit/>
+          </a:bodyPr>
+          <a:lstStyle/>
+          <a:p>
+            <a:pPr algn="l">
+              <a:spcAft>
+                <a:spcPts val="400"/>
+              </a:spcAft>
+            </a:pPr>
+            <a:r>
+              <a:rPr sz="1200" b="1" i="0">
+                <a:solidFill>
+                  <a:srgbClr val="7FC8AF"/>
+                </a:solidFill>
+                <a:latin typeface="Calibri"/>
+              </a:rPr>
+              <a:t>READ BEFORE CITING</a:t>
+            </a:r>
+          </a:p>
+          <a:p>
+            <a:pPr algn="l">
+              <a:spcAft>
+                <a:spcPts val="200"/>
+              </a:spcAft>
+            </a:pPr>
+            <a:r>
+              <a:rPr sz="3100" b="1" i="0">
+                <a:solidFill>
+                  <a:srgbClr val="FFFFFF"/>
+                </a:solidFill>
+                <a:latin typeface="Cambria"/>
+              </a:rPr>
+              <a:t>What this data cannot tell us</a:t>
+            </a:r>
+          </a:p>
+        </p:txBody>
+      </p:sp>
+      <p:sp>
+        <p:nvSpPr>
+          <p:cNvPr id="4" name="Rounded Rectangle 3"/>
+          <p:cNvSpPr/>
+          <p:nvPr/>
+        </p:nvSpPr>
+        <p:spPr>
+          <a:xfrm>
+            <a:off x="502920" y="1600200"/>
+            <a:ext cx="11155680" cy="841248"/>
+          </a:xfrm>
+          <a:prstGeom prst="roundRect">
+            <a:avLst>
+              <a:gd name="adj" fmla="val 6000"/>
+            </a:avLst>
+          </a:prstGeom>
+          <a:solidFill>
+            <a:srgbClr val="0E4A3E"/>
+          </a:solidFill>
+          <a:ln>
+            <a:noFill/>
+          </a:ln>
+          <a:effectLst/>
+        </p:spPr>
+        <p:style>
+          <a:lnRef idx="1">
+            <a:schemeClr val="accent1"/>
+          </a:lnRef>
+          <a:fillRef idx="3">
+            <a:schemeClr val="accent1"/>
+          </a:fillRef>
+          <a:effectRef idx="2">
+            <a:schemeClr val="accent1"/>
+          </a:effectRef>
+          <a:fontRef idx="minor">
+            <a:schemeClr val="lt1"/>
+          </a:fontRef>
+        </p:style>
+        <p:txBody>
+          <a:bodyPr rtlCol="0" anchor="ctr"/>
+          <a:lstStyle/>
+          <a:p>
+            <a:pPr algn="ctr"/>
+          </a:p>
+        </p:txBody>
+      </p:sp>
+      <p:sp>
+        <p:nvSpPr>
+          <p:cNvPr id="5" name="TextBox 4"/>
+          <p:cNvSpPr txBox="1"/>
+          <p:nvPr/>
+        </p:nvSpPr>
+        <p:spPr>
+          <a:xfrm>
+            <a:off x="777240" y="1691640"/>
+            <a:ext cx="10607040" cy="676656"/>
+          </a:xfrm>
+          <a:prstGeom prst="rect">
+            <a:avLst/>
+          </a:prstGeom>
+          <a:noFill/>
+        </p:spPr>
+        <p:txBody>
+          <a:bodyPr wrap="square" lIns="0" rIns="0" tIns="0" bIns="0">
+            <a:spAutoFit/>
+          </a:bodyPr>
+          <a:lstStyle/>
+          <a:p>
+            <a:pPr algn="l">
+              <a:spcAft>
+                <a:spcPts val="100"/>
+              </a:spcAft>
+            </a:pPr>
+            <a:r>
+              <a:rPr sz="1350" b="1" i="0">
+                <a:solidFill>
+                  <a:srgbClr val="FFFFFF"/>
+                </a:solidFill>
+                <a:latin typeface="Calibri"/>
+              </a:rPr>
+              <a:t>Partial, self-selected adoption</a:t>
+            </a:r>
+          </a:p>
+          <a:p>
+            <a:pPr algn="l">
+              <a:spcAft>
+                <a:spcPts val="0"/>
+              </a:spcAft>
+            </a:pPr>
+            <a:r>
+              <a:rPr sz="1150" b="0" i="0">
+                <a:solidFill>
+                  <a:srgbClr val="C9E2D8"/>
+                </a:solidFill>
+                <a:latin typeface="Calibri"/>
+              </a:rPr>
+              <a:t>~157 active drivers, Srinagar-concentrated. “No app data on a route” does NOT mean “no service”.</a:t>
+            </a:r>
+          </a:p>
+        </p:txBody>
+      </p:sp>
+      <p:sp>
+        <p:nvSpPr>
+          <p:cNvPr id="6" name="Rounded Rectangle 5"/>
+          <p:cNvSpPr/>
+          <p:nvPr/>
+        </p:nvSpPr>
+        <p:spPr>
+          <a:xfrm>
+            <a:off x="502920" y="2569464"/>
+            <a:ext cx="11155680" cy="841248"/>
+          </a:xfrm>
+          <a:prstGeom prst="roundRect">
+            <a:avLst>
+              <a:gd name="adj" fmla="val 6000"/>
+            </a:avLst>
+          </a:prstGeom>
+          <a:solidFill>
+            <a:srgbClr val="0E4A3E"/>
+          </a:solidFill>
+          <a:ln>
+            <a:noFill/>
+          </a:ln>
+          <a:effectLst/>
+        </p:spPr>
+        <p:style>
+          <a:lnRef idx="1">
+            <a:schemeClr val="accent1"/>
+          </a:lnRef>
+          <a:fillRef idx="3">
+            <a:schemeClr val="accent1"/>
+          </a:fillRef>
+          <a:effectRef idx="2">
+            <a:schemeClr val="accent1"/>
+          </a:effectRef>
+          <a:fontRef idx="minor">
+            <a:schemeClr val="lt1"/>
+          </a:fontRef>
+        </p:style>
+        <p:txBody>
+          <a:bodyPr rtlCol="0" anchor="ctr"/>
+          <a:lstStyle/>
+          <a:p>
+            <a:pPr algn="ctr"/>
+          </a:p>
+        </p:txBody>
+      </p:sp>
+      <p:sp>
+        <p:nvSpPr>
+          <p:cNvPr id="7" name="TextBox 6"/>
+          <p:cNvSpPr txBox="1"/>
+          <p:nvPr/>
+        </p:nvSpPr>
+        <p:spPr>
+          <a:xfrm>
+            <a:off x="777240" y="2660904"/>
+            <a:ext cx="10607040" cy="676656"/>
+          </a:xfrm>
+          <a:prstGeom prst="rect">
+            <a:avLst/>
+          </a:prstGeom>
+          <a:noFill/>
+        </p:spPr>
+        <p:txBody>
+          <a:bodyPr wrap="square" lIns="0" rIns="0" tIns="0" bIns="0">
+            <a:spAutoFit/>
+          </a:bodyPr>
+          <a:lstStyle/>
+          <a:p>
+            <a:pPr algn="l">
+              <a:spcAft>
+                <a:spcPts val="100"/>
+              </a:spcAft>
+            </a:pPr>
+            <a:r>
+              <a:rPr sz="1350" b="1" i="0">
+                <a:solidFill>
+                  <a:srgbClr val="FFFFFF"/>
+                </a:solidFill>
+                <a:latin typeface="Calibri"/>
+              </a:rPr>
+              <a:t>No demand, no ridership, no frequency</a:t>
+            </a:r>
+          </a:p>
+          <a:p>
+            <a:pPr algn="l">
+              <a:spcAft>
+                <a:spcPts val="0"/>
+              </a:spcAft>
+            </a:pPr>
+            <a:r>
+              <a:rPr sz="1150" b="0" i="0">
+                <a:solidFill>
+                  <a:srgbClr val="C9E2D8"/>
+                </a:solidFill>
+                <a:latin typeface="Calibri"/>
+              </a:rPr>
+              <a:t>The app sees vehicles, not passengers. Observed run counts reflect who installed the app — never cited as service frequency.</a:t>
+            </a:r>
+          </a:p>
+        </p:txBody>
+      </p:sp>
+      <p:sp>
+        <p:nvSpPr>
+          <p:cNvPr id="8" name="Rounded Rectangle 7"/>
+          <p:cNvSpPr/>
+          <p:nvPr/>
+        </p:nvSpPr>
+        <p:spPr>
+          <a:xfrm>
+            <a:off x="502920" y="3538728"/>
+            <a:ext cx="11155680" cy="841248"/>
+          </a:xfrm>
+          <a:prstGeom prst="roundRect">
+            <a:avLst>
+              <a:gd name="adj" fmla="val 6000"/>
+            </a:avLst>
+          </a:prstGeom>
+          <a:solidFill>
+            <a:srgbClr val="0E4A3E"/>
+          </a:solidFill>
+          <a:ln>
+            <a:noFill/>
+          </a:ln>
+          <a:effectLst/>
+        </p:spPr>
+        <p:style>
+          <a:lnRef idx="1">
+            <a:schemeClr val="accent1"/>
+          </a:lnRef>
+          <a:fillRef idx="3">
+            <a:schemeClr val="accent1"/>
+          </a:fillRef>
+          <a:effectRef idx="2">
+            <a:schemeClr val="accent1"/>
+          </a:effectRef>
+          <a:fontRef idx="minor">
+            <a:schemeClr val="lt1"/>
+          </a:fontRef>
+        </p:style>
+        <p:txBody>
+          <a:bodyPr rtlCol="0" anchor="ctr"/>
+          <a:lstStyle/>
+          <a:p>
+            <a:pPr algn="ctr"/>
+          </a:p>
+        </p:txBody>
+      </p:sp>
+      <p:sp>
+        <p:nvSpPr>
+          <p:cNvPr id="9" name="TextBox 8"/>
+          <p:cNvSpPr txBox="1"/>
+          <p:nvPr/>
+        </p:nvSpPr>
+        <p:spPr>
+          <a:xfrm>
+            <a:off x="777240" y="3630168"/>
+            <a:ext cx="10607040" cy="676656"/>
+          </a:xfrm>
+          <a:prstGeom prst="rect">
+            <a:avLst/>
+          </a:prstGeom>
+          <a:noFill/>
+        </p:spPr>
+        <p:txBody>
+          <a:bodyPr wrap="square" lIns="0" rIns="0" tIns="0" bIns="0">
+            <a:spAutoFit/>
+          </a:bodyPr>
+          <a:lstStyle/>
+          <a:p>
+            <a:pPr algn="l">
+              <a:spcAft>
+                <a:spcPts val="100"/>
+              </a:spcAft>
+            </a:pPr>
+            <a:r>
+              <a:rPr sz="1350" b="1" i="0">
+                <a:solidFill>
+                  <a:srgbClr val="FFFFFF"/>
+                </a:solidFill>
+                <a:latin typeface="Calibri"/>
+              </a:rPr>
+              <a:t>Corridors cover 41% of clean runs</a:t>
+            </a:r>
+          </a:p>
+          <a:p>
+            <a:pPr algn="l">
+              <a:spcAft>
+                <a:spcPts val="0"/>
+              </a:spcAft>
+            </a:pPr>
+            <a:r>
+              <a:rPr sz="1150" b="0" i="0">
+                <a:solidFill>
+                  <a:srgbClr val="C9E2D8"/>
+                </a:solidFill>
+                <a:latin typeface="Calibri"/>
+              </a:rPr>
+              <a:t>The other 59% was decomposed and shown to be noise, loops and out-of-division traffic — but the corridor findings describe the frequently-driven core only.</a:t>
+            </a:r>
+          </a:p>
+        </p:txBody>
+      </p:sp>
+      <p:sp>
+        <p:nvSpPr>
+          <p:cNvPr id="10" name="Rounded Rectangle 9"/>
+          <p:cNvSpPr/>
+          <p:nvPr/>
+        </p:nvSpPr>
+        <p:spPr>
+          <a:xfrm>
+            <a:off x="502920" y="4507992"/>
+            <a:ext cx="11155680" cy="841248"/>
+          </a:xfrm>
+          <a:prstGeom prst="roundRect">
+            <a:avLst>
+              <a:gd name="adj" fmla="val 6000"/>
+            </a:avLst>
+          </a:prstGeom>
+          <a:solidFill>
+            <a:srgbClr val="0E4A3E"/>
+          </a:solidFill>
+          <a:ln>
+            <a:noFill/>
+          </a:ln>
+          <a:effectLst/>
+        </p:spPr>
+        <p:style>
+          <a:lnRef idx="1">
+            <a:schemeClr val="accent1"/>
+          </a:lnRef>
+          <a:fillRef idx="3">
+            <a:schemeClr val="accent1"/>
+          </a:fillRef>
+          <a:effectRef idx="2">
+            <a:schemeClr val="accent1"/>
+          </a:effectRef>
+          <a:fontRef idx="minor">
+            <a:schemeClr val="lt1"/>
+          </a:fontRef>
+        </p:style>
+        <p:txBody>
+          <a:bodyPr rtlCol="0" anchor="ctr"/>
+          <a:lstStyle/>
+          <a:p>
+            <a:pPr algn="ctr"/>
+          </a:p>
+        </p:txBody>
+      </p:sp>
+      <p:sp>
+        <p:nvSpPr>
+          <p:cNvPr id="11" name="TextBox 10"/>
+          <p:cNvSpPr txBox="1"/>
+          <p:nvPr/>
+        </p:nvSpPr>
+        <p:spPr>
+          <a:xfrm>
+            <a:off x="777240" y="4599431"/>
+            <a:ext cx="10607040" cy="676656"/>
+          </a:xfrm>
+          <a:prstGeom prst="rect">
+            <a:avLst/>
+          </a:prstGeom>
+          <a:noFill/>
+        </p:spPr>
+        <p:txBody>
+          <a:bodyPr wrap="square" lIns="0" rIns="0" tIns="0" bIns="0">
+            <a:spAutoFit/>
+          </a:bodyPr>
+          <a:lstStyle/>
+          <a:p>
+            <a:pPr algn="l">
+              <a:spcAft>
+                <a:spcPts val="100"/>
+              </a:spcAft>
+            </a:pPr>
+            <a:r>
+              <a:rPr sz="1350" b="1" i="0">
+                <a:solidFill>
+                  <a:srgbClr val="FFFFFF"/>
+                </a:solidFill>
+                <a:latin typeface="Calibri"/>
+              </a:rPr>
+              <a:t>Observed times are an upper bound</a:t>
+            </a:r>
+          </a:p>
+          <a:p>
+            <a:pPr algn="l">
+              <a:spcAft>
+                <a:spcPts val="0"/>
+              </a:spcAft>
+            </a:pPr>
+            <a:r>
+              <a:rPr sz="1150" b="0" i="0">
+                <a:solidFill>
+                  <a:srgbClr val="C9E2D8"/>
+                </a:solidFill>
+                <a:latin typeface="Calibri"/>
+              </a:rPr>
+              <a:t>They embody informal wait-to-fill practice; a scheduled, headway-enforced service should beat them.</a:t>
+            </a:r>
+          </a:p>
+        </p:txBody>
+      </p:sp>
+      <p:sp>
+        <p:nvSpPr>
+          <p:cNvPr id="12" name="Rounded Rectangle 11"/>
+          <p:cNvSpPr/>
+          <p:nvPr/>
+        </p:nvSpPr>
+        <p:spPr>
+          <a:xfrm>
+            <a:off x="502920" y="5477256"/>
+            <a:ext cx="11155680" cy="841248"/>
+          </a:xfrm>
+          <a:prstGeom prst="roundRect">
+            <a:avLst>
+              <a:gd name="adj" fmla="val 6000"/>
+            </a:avLst>
+          </a:prstGeom>
+          <a:solidFill>
+            <a:srgbClr val="0E4A3E"/>
+          </a:solidFill>
+          <a:ln>
+            <a:noFill/>
+          </a:ln>
+          <a:effectLst/>
+        </p:spPr>
+        <p:style>
+          <a:lnRef idx="1">
+            <a:schemeClr val="accent1"/>
+          </a:lnRef>
+          <a:fillRef idx="3">
+            <a:schemeClr val="accent1"/>
+          </a:fillRef>
+          <a:effectRef idx="2">
+            <a:schemeClr val="accent1"/>
+          </a:effectRef>
+          <a:fontRef idx="minor">
+            <a:schemeClr val="lt1"/>
+          </a:fontRef>
+        </p:style>
+        <p:txBody>
+          <a:bodyPr rtlCol="0" anchor="ctr"/>
+          <a:lstStyle/>
+          <a:p>
+            <a:pPr algn="ctr"/>
+          </a:p>
+        </p:txBody>
+      </p:sp>
+      <p:sp>
+        <p:nvSpPr>
+          <p:cNvPr id="13" name="TextBox 12"/>
+          <p:cNvSpPr txBox="1"/>
+          <p:nvPr/>
+        </p:nvSpPr>
+        <p:spPr>
+          <a:xfrm>
+            <a:off x="777240" y="5568696"/>
+            <a:ext cx="10607040" cy="676656"/>
+          </a:xfrm>
+          <a:prstGeom prst="rect">
+            <a:avLst/>
+          </a:prstGeom>
+          <a:noFill/>
+        </p:spPr>
+        <p:txBody>
+          <a:bodyPr wrap="square" lIns="0" rIns="0" tIns="0" bIns="0">
+            <a:spAutoFit/>
+          </a:bodyPr>
+          <a:lstStyle/>
+          <a:p>
+            <a:pPr algn="l">
+              <a:spcAft>
+                <a:spcPts val="100"/>
+              </a:spcAft>
+            </a:pPr>
+            <a:r>
+              <a:rPr sz="1350" b="1" i="0">
+                <a:solidFill>
+                  <a:srgbClr val="FFFFFF"/>
+                </a:solidFill>
+                <a:latin typeface="Calibri"/>
+              </a:rPr>
+              <a:t>Rural routes remain unvalidated</a:t>
+            </a:r>
+          </a:p>
+          <a:p>
+            <a:pPr algn="l">
+              <a:spcAft>
+                <a:spcPts val="0"/>
+              </a:spcAft>
+            </a:pPr>
+            <a:r>
+              <a:rPr sz="1150" b="0" i="0">
+                <a:solidFill>
+                  <a:srgbClr val="C9E2D8"/>
+                </a:solidFill>
+                <a:latin typeface="Calibri"/>
+              </a:rPr>
+              <a:t>Measured corrections touch 5 Srinagar-core corridors; long rural lifeline cycle times still rest on the model.</a:t>
+            </a:r>
+          </a:p>
+        </p:txBody>
+      </p:sp>
+    </p:spTree>
+  </p:cSld>
+  <p:clrMapOvr>
+    <a:masterClrMapping/>
+  </p:clrMapOvr>
+</p:sld>
+</file>
+
+<file path=ppt/slides/slide14.xml><?xml version="1.0" encoding="utf-8"?>
+<p:sld xmlns:a="http://schemas.openxmlformats.org/drawingml/2006/main" xmlns:p="http://schemas.openxmlformats.org/presentationml/2006/main" xmlns:r="http://schemas.openxmlformats.org/officeDocument/2006/relationships">
+  <p:cSld>
+    <p:spTree>
+      <p:nvGrpSpPr>
+        <p:cNvPr id="1" name=""/>
+        <p:cNvGrpSpPr/>
+        <p:nvPr/>
+      </p:nvGrpSpPr>
+      <p:grpSpPr/>
+      <p:sp>
+        <p:nvSpPr>
+          <p:cNvPr id="2" name="Rectangle 1"/>
+          <p:cNvSpPr/>
+          <p:nvPr/>
+        </p:nvSpPr>
+        <p:spPr>
+          <a:xfrm>
+            <a:off x="0" y="0"/>
+            <a:ext cx="12191695" cy="6858000"/>
+          </a:xfrm>
+          <a:prstGeom prst="rect">
+            <a:avLst/>
+          </a:prstGeom>
+          <a:solidFill>
             <a:srgbClr val="FFFFFF"/>
           </a:solidFill>
           <a:ln>
@@ -6087,7 +6798,7 @@
                 </a:solidFill>
                 <a:latin typeface="Calibri"/>
               </a:rPr>
-              <a:t>7 plan routes confirmed running in reality; 8 geometry divergences queued for reconciliation; 0 informal routes.</a:t>
+              <a:t>7 plan routes confirmed corridor-level + 172 of 186 evidenced at road level from fragments; 8 geometry divergences queued; 0 informal routes.</a:t>
             </a:r>
           </a:p>
         </p:txBody>

--- a/Bus_Sathi_Trace_Intelligence_Briefing.pptx
+++ b/Bus_Sathi_Trace_Intelligence_Briefing.pptx
@@ -19,6 +19,7 @@
     <p:sldId id="267" r:id="rId18"/>
     <p:sldId id="268" r:id="rId19"/>
     <p:sldId id="269" r:id="rId20"/>
+    <p:sldId id="270" r:id="rId21"/>
   </p:sldIdLst>
   <p:sldSz cx="12191695" cy="6858000" type="screen4x3"/>
   <p:notesSz cx="6858000" cy="9144000"/>
@@ -5996,6 +5997,575 @@
             <a:avLst/>
           </a:prstGeom>
           <a:solidFill>
+            <a:srgbClr val="FFFFFF"/>
+          </a:solidFill>
+          <a:ln>
+            <a:noFill/>
+          </a:ln>
+          <a:effectLst/>
+        </p:spPr>
+        <p:style>
+          <a:lnRef idx="1">
+            <a:schemeClr val="accent1"/>
+          </a:lnRef>
+          <a:fillRef idx="3">
+            <a:schemeClr val="accent1"/>
+          </a:fillRef>
+          <a:effectRef idx="2">
+            <a:schemeClr val="accent1"/>
+          </a:effectRef>
+          <a:fontRef idx="minor">
+            <a:schemeClr val="lt1"/>
+          </a:fontRef>
+        </p:style>
+        <p:txBody>
+          <a:bodyPr rtlCol="0" anchor="ctr"/>
+          <a:lstStyle/>
+          <a:p>
+            <a:pPr algn="ctr"/>
+          </a:p>
+        </p:txBody>
+      </p:sp>
+      <p:sp>
+        <p:nvSpPr>
+          <p:cNvPr id="3" name="TextBox 2"/>
+          <p:cNvSpPr txBox="1"/>
+          <p:nvPr/>
+        </p:nvSpPr>
+        <p:spPr>
+          <a:xfrm>
+            <a:off x="502920" y="292608"/>
+            <a:ext cx="11155680" cy="1188720"/>
+          </a:xfrm>
+          <a:prstGeom prst="rect">
+            <a:avLst/>
+          </a:prstGeom>
+          <a:noFill/>
+        </p:spPr>
+        <p:txBody>
+          <a:bodyPr wrap="square" lIns="0" rIns="0" tIns="0" bIns="0">
+            <a:spAutoFit/>
+          </a:bodyPr>
+          <a:lstStyle/>
+          <a:p>
+            <a:pPr algn="l">
+              <a:spcAft>
+                <a:spcPts val="400"/>
+              </a:spcAft>
+            </a:pPr>
+            <a:r>
+              <a:rPr sz="1200" b="1" i="0">
+                <a:solidFill>
+                  <a:srgbClr val="0F6E56"/>
+                </a:solidFill>
+                <a:latin typeface="Calibri"/>
+              </a:rPr>
+              <a:t>CLOSING THE RECONCILIATION LOOP</a:t>
+            </a:r>
+          </a:p>
+          <a:p>
+            <a:pPr algn="l">
+              <a:spcAft>
+                <a:spcPts val="200"/>
+              </a:spcAft>
+            </a:pPr>
+            <a:r>
+              <a:rPr sz="3100" b="1" i="0">
+                <a:solidFill>
+                  <a:srgbClr val="102A2E"/>
+                </a:solidFill>
+                <a:latin typeface="Cambria"/>
+              </a:rPr>
+              <a:t>Real driven paths fixed the plan's map lines</a:t>
+            </a:r>
+          </a:p>
+          <a:p>
+            <a:pPr algn="l">
+              <a:spcAft>
+                <a:spcPts val="0"/>
+              </a:spcAft>
+            </a:pPr>
+            <a:r>
+              <a:rPr sz="1300" b="0" i="0">
+                <a:solidFill>
+                  <a:srgbClr val="5B6B6B"/>
+                </a:solidFill>
+                <a:latin typeface="Calibri"/>
+              </a:rPr>
+              <a:t>The plan's distances were corrected earlier, but 18 route map lines still traced a path nobody certified — the endpoint pins were wrong.</a:t>
+            </a:r>
+          </a:p>
+        </p:txBody>
+      </p:sp>
+      <p:sp>
+        <p:nvSpPr>
+          <p:cNvPr id="4" name="Rounded Rectangle 3"/>
+          <p:cNvSpPr/>
+          <p:nvPr/>
+        </p:nvSpPr>
+        <p:spPr>
+          <a:xfrm>
+            <a:off x="502920" y="1737360"/>
+            <a:ext cx="3291840" cy="1481328"/>
+          </a:xfrm>
+          <a:prstGeom prst="roundRect">
+            <a:avLst>
+              <a:gd name="adj" fmla="val 6000"/>
+            </a:avLst>
+          </a:prstGeom>
+          <a:solidFill>
+            <a:srgbClr val="E9F2EE"/>
+          </a:solidFill>
+          <a:ln>
+            <a:noFill/>
+          </a:ln>
+          <a:effectLst/>
+        </p:spPr>
+        <p:style>
+          <a:lnRef idx="1">
+            <a:schemeClr val="accent1"/>
+          </a:lnRef>
+          <a:fillRef idx="3">
+            <a:schemeClr val="accent1"/>
+          </a:fillRef>
+          <a:effectRef idx="2">
+            <a:schemeClr val="accent1"/>
+          </a:effectRef>
+          <a:fontRef idx="minor">
+            <a:schemeClr val="lt1"/>
+          </a:fontRef>
+        </p:style>
+        <p:txBody>
+          <a:bodyPr rtlCol="0" anchor="ctr"/>
+          <a:lstStyle/>
+          <a:p>
+            <a:pPr algn="ctr"/>
+          </a:p>
+        </p:txBody>
+      </p:sp>
+      <p:sp>
+        <p:nvSpPr>
+          <p:cNvPr id="5" name="TextBox 4"/>
+          <p:cNvSpPr txBox="1"/>
+          <p:nvPr/>
+        </p:nvSpPr>
+        <p:spPr>
+          <a:xfrm>
+            <a:off x="667512" y="1865376"/>
+            <a:ext cx="2962656" cy="1243584"/>
+          </a:xfrm>
+          <a:prstGeom prst="rect">
+            <a:avLst/>
+          </a:prstGeom>
+          <a:noFill/>
+        </p:spPr>
+        <p:txBody>
+          <a:bodyPr wrap="square" lIns="0" rIns="0" tIns="0" bIns="0">
+            <a:spAutoFit/>
+          </a:bodyPr>
+          <a:lstStyle/>
+          <a:p>
+            <a:pPr algn="l">
+              <a:spcAft>
+                <a:spcPts val="400"/>
+              </a:spcAft>
+            </a:pPr>
+            <a:r>
+              <a:rPr sz="3000" b="1" i="0">
+                <a:solidFill>
+                  <a:srgbClr val="0F6E56"/>
+                </a:solidFill>
+                <a:latin typeface="Cambria"/>
+              </a:rPr>
+              <a:t>18</a:t>
+            </a:r>
+          </a:p>
+          <a:p>
+            <a:pPr algn="l">
+              <a:spcAft>
+                <a:spcPts val="400"/>
+              </a:spcAft>
+            </a:pPr>
+            <a:r>
+              <a:rPr sz="1250" b="1" i="0">
+                <a:solidFill>
+                  <a:srgbClr val="102A2E"/>
+                </a:solidFill>
+                <a:latin typeface="Calibri"/>
+              </a:rPr>
+              <a:t>stale map lines found</a:t>
+            </a:r>
+          </a:p>
+          <a:p>
+            <a:pPr algn="l">
+              <a:spcAft>
+                <a:spcPts val="0"/>
+              </a:spcAft>
+            </a:pPr>
+            <a:r>
+              <a:rPr sz="1000" b="0" i="0">
+                <a:solidFill>
+                  <a:srgbClr val="5B6B6B"/>
+                </a:solidFill>
+                <a:latin typeface="Calibri"/>
+              </a:rPr>
+              <a:t>drawn line &gt;25% longer than the corrected km</a:t>
+            </a:r>
+          </a:p>
+        </p:txBody>
+      </p:sp>
+      <p:sp>
+        <p:nvSpPr>
+          <p:cNvPr id="6" name="Rounded Rectangle 5"/>
+          <p:cNvSpPr/>
+          <p:nvPr/>
+        </p:nvSpPr>
+        <p:spPr>
+          <a:xfrm>
+            <a:off x="3977639" y="1737360"/>
+            <a:ext cx="3291840" cy="1481328"/>
+          </a:xfrm>
+          <a:prstGeom prst="roundRect">
+            <a:avLst>
+              <a:gd name="adj" fmla="val 6000"/>
+            </a:avLst>
+          </a:prstGeom>
+          <a:solidFill>
+            <a:srgbClr val="E9F2EE"/>
+          </a:solidFill>
+          <a:ln>
+            <a:noFill/>
+          </a:ln>
+          <a:effectLst/>
+        </p:spPr>
+        <p:style>
+          <a:lnRef idx="1">
+            <a:schemeClr val="accent1"/>
+          </a:lnRef>
+          <a:fillRef idx="3">
+            <a:schemeClr val="accent1"/>
+          </a:fillRef>
+          <a:effectRef idx="2">
+            <a:schemeClr val="accent1"/>
+          </a:effectRef>
+          <a:fontRef idx="minor">
+            <a:schemeClr val="lt1"/>
+          </a:fontRef>
+        </p:style>
+        <p:txBody>
+          <a:bodyPr rtlCol="0" anchor="ctr"/>
+          <a:lstStyle/>
+          <a:p>
+            <a:pPr algn="ctr"/>
+          </a:p>
+        </p:txBody>
+      </p:sp>
+      <p:sp>
+        <p:nvSpPr>
+          <p:cNvPr id="7" name="TextBox 6"/>
+          <p:cNvSpPr txBox="1"/>
+          <p:nvPr/>
+        </p:nvSpPr>
+        <p:spPr>
+          <a:xfrm>
+            <a:off x="4142231" y="1865376"/>
+            <a:ext cx="2962656" cy="1243584"/>
+          </a:xfrm>
+          <a:prstGeom prst="rect">
+            <a:avLst/>
+          </a:prstGeom>
+          <a:noFill/>
+        </p:spPr>
+        <p:txBody>
+          <a:bodyPr wrap="square" lIns="0" rIns="0" tIns="0" bIns="0">
+            <a:spAutoFit/>
+          </a:bodyPr>
+          <a:lstStyle/>
+          <a:p>
+            <a:pPr algn="l">
+              <a:spcAft>
+                <a:spcPts val="400"/>
+              </a:spcAft>
+            </a:pPr>
+            <a:r>
+              <a:rPr sz="3000" b="1" i="0">
+                <a:solidFill>
+                  <a:srgbClr val="0F6E56"/>
+                </a:solidFill>
+                <a:latin typeface="Cambria"/>
+              </a:rPr>
+              <a:t>15</a:t>
+            </a:r>
+          </a:p>
+          <a:p>
+            <a:pPr algn="l">
+              <a:spcAft>
+                <a:spcPts val="400"/>
+              </a:spcAft>
+            </a:pPr>
+            <a:r>
+              <a:rPr sz="1250" b="1" i="0">
+                <a:solidFill>
+                  <a:srgbClr val="102A2E"/>
+                </a:solidFill>
+                <a:latin typeface="Calibri"/>
+              </a:rPr>
+              <a:t>geometries redrawn</a:t>
+            </a:r>
+          </a:p>
+          <a:p>
+            <a:pPr algn="l">
+              <a:spcAft>
+                <a:spcPts val="0"/>
+              </a:spcAft>
+            </a:pPr>
+            <a:r>
+              <a:rPr sz="1000" b="0" i="0">
+                <a:solidFill>
+                  <a:srgbClr val="5B6B6B"/>
+                </a:solidFill>
+                <a:latin typeface="Calibri"/>
+              </a:rPr>
+              <a:t>re-anchored termini → real road path, in km band</a:t>
+            </a:r>
+          </a:p>
+        </p:txBody>
+      </p:sp>
+      <p:sp>
+        <p:nvSpPr>
+          <p:cNvPr id="8" name="Rounded Rectangle 7"/>
+          <p:cNvSpPr/>
+          <p:nvPr/>
+        </p:nvSpPr>
+        <p:spPr>
+          <a:xfrm>
+            <a:off x="502920" y="3383280"/>
+            <a:ext cx="3291840" cy="1481328"/>
+          </a:xfrm>
+          <a:prstGeom prst="roundRect">
+            <a:avLst>
+              <a:gd name="adj" fmla="val 6000"/>
+            </a:avLst>
+          </a:prstGeom>
+          <a:solidFill>
+            <a:srgbClr val="E9F2EE"/>
+          </a:solidFill>
+          <a:ln>
+            <a:noFill/>
+          </a:ln>
+          <a:effectLst/>
+        </p:spPr>
+        <p:style>
+          <a:lnRef idx="1">
+            <a:schemeClr val="accent1"/>
+          </a:lnRef>
+          <a:fillRef idx="3">
+            <a:schemeClr val="accent1"/>
+          </a:fillRef>
+          <a:effectRef idx="2">
+            <a:schemeClr val="accent1"/>
+          </a:effectRef>
+          <a:fontRef idx="minor">
+            <a:schemeClr val="lt1"/>
+          </a:fontRef>
+        </p:style>
+        <p:txBody>
+          <a:bodyPr rtlCol="0" anchor="ctr"/>
+          <a:lstStyle/>
+          <a:p>
+            <a:pPr algn="ctr"/>
+          </a:p>
+        </p:txBody>
+      </p:sp>
+      <p:sp>
+        <p:nvSpPr>
+          <p:cNvPr id="9" name="TextBox 8"/>
+          <p:cNvSpPr txBox="1"/>
+          <p:nvPr/>
+        </p:nvSpPr>
+        <p:spPr>
+          <a:xfrm>
+            <a:off x="667512" y="3511296"/>
+            <a:ext cx="2962656" cy="1243584"/>
+          </a:xfrm>
+          <a:prstGeom prst="rect">
+            <a:avLst/>
+          </a:prstGeom>
+          <a:noFill/>
+        </p:spPr>
+        <p:txBody>
+          <a:bodyPr wrap="square" lIns="0" rIns="0" tIns="0" bIns="0">
+            <a:spAutoFit/>
+          </a:bodyPr>
+          <a:lstStyle/>
+          <a:p>
+            <a:pPr algn="l">
+              <a:spcAft>
+                <a:spcPts val="400"/>
+              </a:spcAft>
+            </a:pPr>
+            <a:r>
+              <a:rPr sz="3000" b="1" i="0">
+                <a:solidFill>
+                  <a:srgbClr val="0F6E56"/>
+                </a:solidFill>
+                <a:latin typeface="Cambria"/>
+              </a:rPr>
+              <a:t>3</a:t>
+            </a:r>
+          </a:p>
+          <a:p>
+            <a:pPr algn="l">
+              <a:spcAft>
+                <a:spcPts val="400"/>
+              </a:spcAft>
+            </a:pPr>
+            <a:r>
+              <a:rPr sz="1250" b="1" i="0">
+                <a:solidFill>
+                  <a:srgbClr val="102A2E"/>
+                </a:solidFill>
+                <a:latin typeface="Calibri"/>
+              </a:rPr>
+              <a:t>honest holdouts</a:t>
+            </a:r>
+          </a:p>
+          <a:p>
+            <a:pPr algn="l">
+              <a:spcAft>
+                <a:spcPts val="0"/>
+              </a:spcAft>
+            </a:pPr>
+            <a:r>
+              <a:rPr sz="1000" b="0" i="0">
+                <a:solidFill>
+                  <a:srgbClr val="5B6B6B"/>
+                </a:solidFill>
+                <a:latin typeface="Calibri"/>
+              </a:rPr>
+              <a:t>one-way systems — flagged, not guessed</a:t>
+            </a:r>
+          </a:p>
+        </p:txBody>
+      </p:sp>
+      <p:sp>
+        <p:nvSpPr>
+          <p:cNvPr id="10" name="Rounded Rectangle 9"/>
+          <p:cNvSpPr/>
+          <p:nvPr/>
+        </p:nvSpPr>
+        <p:spPr>
+          <a:xfrm>
+            <a:off x="3977639" y="3383280"/>
+            <a:ext cx="3291840" cy="1463040"/>
+          </a:xfrm>
+          <a:prstGeom prst="roundRect">
+            <a:avLst>
+              <a:gd name="adj" fmla="val 6000"/>
+            </a:avLst>
+          </a:prstGeom>
+          <a:solidFill>
+            <a:srgbClr val="E9F2EE"/>
+          </a:solidFill>
+          <a:ln>
+            <a:noFill/>
+          </a:ln>
+          <a:effectLst/>
+        </p:spPr>
+        <p:style>
+          <a:lnRef idx="1">
+            <a:schemeClr val="accent1"/>
+          </a:lnRef>
+          <a:fillRef idx="3">
+            <a:schemeClr val="accent1"/>
+          </a:fillRef>
+          <a:effectRef idx="2">
+            <a:schemeClr val="accent1"/>
+          </a:effectRef>
+          <a:fontRef idx="minor">
+            <a:schemeClr val="lt1"/>
+          </a:fontRef>
+        </p:style>
+        <p:txBody>
+          <a:bodyPr rtlCol="0" anchor="ctr"/>
+          <a:lstStyle/>
+          <a:p>
+            <a:pPr algn="ctr"/>
+          </a:p>
+        </p:txBody>
+      </p:sp>
+      <p:sp>
+        <p:nvSpPr>
+          <p:cNvPr id="11" name="TextBox 10"/>
+          <p:cNvSpPr txBox="1"/>
+          <p:nvPr/>
+        </p:nvSpPr>
+        <p:spPr>
+          <a:xfrm>
+            <a:off x="4206240" y="3547872"/>
+            <a:ext cx="2834640" cy="1188720"/>
+          </a:xfrm>
+          <a:prstGeom prst="rect">
+            <a:avLst/>
+          </a:prstGeom>
+          <a:noFill/>
+        </p:spPr>
+        <p:txBody>
+          <a:bodyPr wrap="square" lIns="0" rIns="0" tIns="0" bIns="0">
+            <a:spAutoFit/>
+          </a:bodyPr>
+          <a:lstStyle/>
+          <a:p>
+            <a:pPr algn="l">
+              <a:spcAft>
+                <a:spcPts val="200"/>
+              </a:spcAft>
+            </a:pPr>
+            <a:r>
+              <a:rPr sz="1250" b="1" i="0">
+                <a:solidFill>
+                  <a:srgbClr val="0F6E56"/>
+                </a:solidFill>
+                <a:latin typeface="Cambria"/>
+              </a:rPr>
+              <a:t>The tell</a:t>
+            </a:r>
+          </a:p>
+          <a:p>
+            <a:pPr algn="l">
+              <a:spcAft>
+                <a:spcPts val="0"/>
+              </a:spcAft>
+            </a:pPr>
+            <a:r>
+              <a:rPr sz="1100" b="0" i="0">
+                <a:solidFill>
+                  <a:srgbClr val="102A2E"/>
+                </a:solidFill>
+                <a:latin typeface="Calibri"/>
+              </a:rPr>
+              <a:t>Every stale line WAS OSRM's shortest path from its pins — so the pins were the defect, not the routing.</a:t>
+            </a:r>
+          </a:p>
+        </p:txBody>
+      </p:sp>
+      <p:sp>
+        <p:nvSpPr>
+          <p:cNvPr id="12" name="Rounded Rectangle 11"/>
+          <p:cNvSpPr/>
+          <p:nvPr/>
+        </p:nvSpPr>
+        <p:spPr>
+          <a:xfrm>
+            <a:off x="502920" y="5029200"/>
+            <a:ext cx="11155680" cy="1371600"/>
+          </a:xfrm>
+          <a:prstGeom prst="roundRect">
+            <a:avLst>
+              <a:gd name="adj" fmla="val 6000"/>
+            </a:avLst>
+          </a:prstGeom>
+          <a:solidFill>
             <a:srgbClr val="0A3D33"/>
           </a:solidFill>
           <a:ln>
@@ -6027,14 +6597,14 @@
       </p:sp>
       <p:sp>
         <p:nvSpPr>
-          <p:cNvPr id="3" name="TextBox 2"/>
+          <p:cNvPr id="13" name="TextBox 12"/>
           <p:cNvSpPr txBox="1"/>
           <p:nvPr/>
         </p:nvSpPr>
         <p:spPr>
           <a:xfrm>
-            <a:off x="502920" y="365760"/>
-            <a:ext cx="11155680" cy="1005840"/>
+            <a:off x="777240" y="5193792"/>
+            <a:ext cx="10607040" cy="1097280"/>
           </a:xfrm>
           <a:prstGeom prst="rect">
             <a:avLst/>
@@ -6049,118 +6619,17 @@
           <a:p>
             <a:pPr algn="l">
               <a:spcAft>
-                <a:spcPts val="400"/>
-              </a:spcAft>
-            </a:pPr>
-            <a:r>
-              <a:rPr sz="1200" b="1" i="0">
-                <a:solidFill>
-                  <a:srgbClr val="7FC8AF"/>
-                </a:solidFill>
-                <a:latin typeface="Calibri"/>
-              </a:rPr>
-              <a:t>READ BEFORE CITING</a:t>
-            </a:r>
-          </a:p>
-          <a:p>
-            <a:pPr algn="l">
-              <a:spcAft>
-                <a:spcPts val="200"/>
-              </a:spcAft>
-            </a:pPr>
-            <a:r>
-              <a:rPr sz="3100" b="1" i="0">
+                <a:spcPts val="300"/>
+              </a:spcAft>
+            </a:pPr>
+            <a:r>
+              <a:rPr sz="1250" b="1" i="0">
                 <a:solidFill>
                   <a:srgbClr val="FFFFFF"/>
                 </a:solidFill>
                 <a:latin typeface="Cambria"/>
               </a:rPr>
-              <a:t>What this data cannot tell us</a:t>
-            </a:r>
-          </a:p>
-        </p:txBody>
-      </p:sp>
-      <p:sp>
-        <p:nvSpPr>
-          <p:cNvPr id="4" name="Rounded Rectangle 3"/>
-          <p:cNvSpPr/>
-          <p:nvPr/>
-        </p:nvSpPr>
-        <p:spPr>
-          <a:xfrm>
-            <a:off x="502920" y="1600200"/>
-            <a:ext cx="11155680" cy="841248"/>
-          </a:xfrm>
-          <a:prstGeom prst="roundRect">
-            <a:avLst>
-              <a:gd name="adj" fmla="val 6000"/>
-            </a:avLst>
-          </a:prstGeom>
-          <a:solidFill>
-            <a:srgbClr val="0E4A3E"/>
-          </a:solidFill>
-          <a:ln>
-            <a:noFill/>
-          </a:ln>
-          <a:effectLst/>
-        </p:spPr>
-        <p:style>
-          <a:lnRef idx="1">
-            <a:schemeClr val="accent1"/>
-          </a:lnRef>
-          <a:fillRef idx="3">
-            <a:schemeClr val="accent1"/>
-          </a:fillRef>
-          <a:effectRef idx="2">
-            <a:schemeClr val="accent1"/>
-          </a:effectRef>
-          <a:fontRef idx="minor">
-            <a:schemeClr val="lt1"/>
-          </a:fontRef>
-        </p:style>
-        <p:txBody>
-          <a:bodyPr rtlCol="0" anchor="ctr"/>
-          <a:lstStyle/>
-          <a:p>
-            <a:pPr algn="ctr"/>
-          </a:p>
-        </p:txBody>
-      </p:sp>
-      <p:sp>
-        <p:nvSpPr>
-          <p:cNvPr id="5" name="TextBox 4"/>
-          <p:cNvSpPr txBox="1"/>
-          <p:nvPr/>
-        </p:nvSpPr>
-        <p:spPr>
-          <a:xfrm>
-            <a:off x="777240" y="1691640"/>
-            <a:ext cx="10607040" cy="676656"/>
-          </a:xfrm>
-          <a:prstGeom prst="rect">
-            <a:avLst/>
-          </a:prstGeom>
-          <a:noFill/>
-        </p:spPr>
-        <p:txBody>
-          <a:bodyPr wrap="square" lIns="0" rIns="0" tIns="0" bIns="0">
-            <a:spAutoFit/>
-          </a:bodyPr>
-          <a:lstStyle/>
-          <a:p>
-            <a:pPr algn="l">
-              <a:spcAft>
-                <a:spcPts val="100"/>
-              </a:spcAft>
-            </a:pPr>
-            <a:r>
-              <a:rPr sz="1350" b="1" i="0">
-                <a:solidFill>
-                  <a:srgbClr val="FFFFFF"/>
-                </a:solidFill>
-                <a:latin typeface="Calibri"/>
-              </a:rPr>
-              <a:t>Partial, self-selected adoption</a:t>
+              <a:t>How each fix was accepted</a:t>
             </a:r>
           </a:p>
           <a:p>
@@ -6172,415 +6641,11 @@
             <a:r>
               <a:rPr sz="1150" b="0" i="0">
                 <a:solidFill>
-                  <a:srgbClr val="C9E2D8"/>
-                </a:solidFill>
-                <a:latin typeface="Calibri"/>
-              </a:rPr>
-              <a:t>~157 active drivers, Srinagar-concentrated. “No app data on a route” does NOT mean “no service”.</a:t>
-            </a:r>
-          </a:p>
-        </p:txBody>
-      </p:sp>
-      <p:sp>
-        <p:nvSpPr>
-          <p:cNvPr id="6" name="Rounded Rectangle 5"/>
-          <p:cNvSpPr/>
-          <p:nvPr/>
-        </p:nvSpPr>
-        <p:spPr>
-          <a:xfrm>
-            <a:off x="502920" y="2569464"/>
-            <a:ext cx="11155680" cy="841248"/>
-          </a:xfrm>
-          <a:prstGeom prst="roundRect">
-            <a:avLst>
-              <a:gd name="adj" fmla="val 6000"/>
-            </a:avLst>
-          </a:prstGeom>
-          <a:solidFill>
-            <a:srgbClr val="0E4A3E"/>
-          </a:solidFill>
-          <a:ln>
-            <a:noFill/>
-          </a:ln>
-          <a:effectLst/>
-        </p:spPr>
-        <p:style>
-          <a:lnRef idx="1">
-            <a:schemeClr val="accent1"/>
-          </a:lnRef>
-          <a:fillRef idx="3">
-            <a:schemeClr val="accent1"/>
-          </a:fillRef>
-          <a:effectRef idx="2">
-            <a:schemeClr val="accent1"/>
-          </a:effectRef>
-          <a:fontRef idx="minor">
-            <a:schemeClr val="lt1"/>
-          </a:fontRef>
-        </p:style>
-        <p:txBody>
-          <a:bodyPr rtlCol="0" anchor="ctr"/>
-          <a:lstStyle/>
-          <a:p>
-            <a:pPr algn="ctr"/>
-          </a:p>
-        </p:txBody>
-      </p:sp>
-      <p:sp>
-        <p:nvSpPr>
-          <p:cNvPr id="7" name="TextBox 6"/>
-          <p:cNvSpPr txBox="1"/>
-          <p:nvPr/>
-        </p:nvSpPr>
-        <p:spPr>
-          <a:xfrm>
-            <a:off x="777240" y="2660904"/>
-            <a:ext cx="10607040" cy="676656"/>
-          </a:xfrm>
-          <a:prstGeom prst="rect">
-            <a:avLst/>
-          </a:prstGeom>
-          <a:noFill/>
-        </p:spPr>
-        <p:txBody>
-          <a:bodyPr wrap="square" lIns="0" rIns="0" tIns="0" bIns="0">
-            <a:spAutoFit/>
-          </a:bodyPr>
-          <a:lstStyle/>
-          <a:p>
-            <a:pPr algn="l">
-              <a:spcAft>
-                <a:spcPts val="100"/>
-              </a:spcAft>
-            </a:pPr>
-            <a:r>
-              <a:rPr sz="1350" b="1" i="0">
-                <a:solidFill>
-                  <a:srgbClr val="FFFFFF"/>
-                </a:solidFill>
-                <a:latin typeface="Calibri"/>
-              </a:rPr>
-              <a:t>No demand, no ridership, no frequency</a:t>
-            </a:r>
-          </a:p>
-          <a:p>
-            <a:pPr algn="l">
-              <a:spcAft>
-                <a:spcPts val="0"/>
-              </a:spcAft>
-            </a:pPr>
-            <a:r>
-              <a:rPr sz="1150" b="0" i="0">
-                <a:solidFill>
-                  <a:srgbClr val="C9E2D8"/>
-                </a:solidFill>
-                <a:latin typeface="Calibri"/>
-              </a:rPr>
-              <a:t>The app sees vehicles, not passengers. Observed run counts reflect who installed the app — never cited as service frequency.</a:t>
-            </a:r>
-          </a:p>
-        </p:txBody>
-      </p:sp>
-      <p:sp>
-        <p:nvSpPr>
-          <p:cNvPr id="8" name="Rounded Rectangle 7"/>
-          <p:cNvSpPr/>
-          <p:nvPr/>
-        </p:nvSpPr>
-        <p:spPr>
-          <a:xfrm>
-            <a:off x="502920" y="3538728"/>
-            <a:ext cx="11155680" cy="841248"/>
-          </a:xfrm>
-          <a:prstGeom prst="roundRect">
-            <a:avLst>
-              <a:gd name="adj" fmla="val 6000"/>
-            </a:avLst>
-          </a:prstGeom>
-          <a:solidFill>
-            <a:srgbClr val="0E4A3E"/>
-          </a:solidFill>
-          <a:ln>
-            <a:noFill/>
-          </a:ln>
-          <a:effectLst/>
-        </p:spPr>
-        <p:style>
-          <a:lnRef idx="1">
-            <a:schemeClr val="accent1"/>
-          </a:lnRef>
-          <a:fillRef idx="3">
-            <a:schemeClr val="accent1"/>
-          </a:fillRef>
-          <a:effectRef idx="2">
-            <a:schemeClr val="accent1"/>
-          </a:effectRef>
-          <a:fontRef idx="minor">
-            <a:schemeClr val="lt1"/>
-          </a:fontRef>
-        </p:style>
-        <p:txBody>
-          <a:bodyPr rtlCol="0" anchor="ctr"/>
-          <a:lstStyle/>
-          <a:p>
-            <a:pPr algn="ctr"/>
-          </a:p>
-        </p:txBody>
-      </p:sp>
-      <p:sp>
-        <p:nvSpPr>
-          <p:cNvPr id="9" name="TextBox 8"/>
-          <p:cNvSpPr txBox="1"/>
-          <p:nvPr/>
-        </p:nvSpPr>
-        <p:spPr>
-          <a:xfrm>
-            <a:off x="777240" y="3630168"/>
-            <a:ext cx="10607040" cy="676656"/>
-          </a:xfrm>
-          <a:prstGeom prst="rect">
-            <a:avLst/>
-          </a:prstGeom>
-          <a:noFill/>
-        </p:spPr>
-        <p:txBody>
-          <a:bodyPr wrap="square" lIns="0" rIns="0" tIns="0" bIns="0">
-            <a:spAutoFit/>
-          </a:bodyPr>
-          <a:lstStyle/>
-          <a:p>
-            <a:pPr algn="l">
-              <a:spcAft>
-                <a:spcPts val="100"/>
-              </a:spcAft>
-            </a:pPr>
-            <a:r>
-              <a:rPr sz="1350" b="1" i="0">
-                <a:solidFill>
-                  <a:srgbClr val="FFFFFF"/>
-                </a:solidFill>
-                <a:latin typeface="Calibri"/>
-              </a:rPr>
-              <a:t>Corridors cover 41% of clean runs</a:t>
-            </a:r>
-          </a:p>
-          <a:p>
-            <a:pPr algn="l">
-              <a:spcAft>
-                <a:spcPts val="0"/>
-              </a:spcAft>
-            </a:pPr>
-            <a:r>
-              <a:rPr sz="1150" b="0" i="0">
-                <a:solidFill>
-                  <a:srgbClr val="C9E2D8"/>
-                </a:solidFill>
-                <a:latin typeface="Calibri"/>
-              </a:rPr>
-              <a:t>The other 59% was decomposed and shown to be noise, loops and out-of-division traffic — but the corridor findings describe the frequently-driven core only.</a:t>
-            </a:r>
-          </a:p>
-        </p:txBody>
-      </p:sp>
-      <p:sp>
-        <p:nvSpPr>
-          <p:cNvPr id="10" name="Rounded Rectangle 9"/>
-          <p:cNvSpPr/>
-          <p:nvPr/>
-        </p:nvSpPr>
-        <p:spPr>
-          <a:xfrm>
-            <a:off x="502920" y="4507992"/>
-            <a:ext cx="11155680" cy="841248"/>
-          </a:xfrm>
-          <a:prstGeom prst="roundRect">
-            <a:avLst>
-              <a:gd name="adj" fmla="val 6000"/>
-            </a:avLst>
-          </a:prstGeom>
-          <a:solidFill>
-            <a:srgbClr val="0E4A3E"/>
-          </a:solidFill>
-          <a:ln>
-            <a:noFill/>
-          </a:ln>
-          <a:effectLst/>
-        </p:spPr>
-        <p:style>
-          <a:lnRef idx="1">
-            <a:schemeClr val="accent1"/>
-          </a:lnRef>
-          <a:fillRef idx="3">
-            <a:schemeClr val="accent1"/>
-          </a:fillRef>
-          <a:effectRef idx="2">
-            <a:schemeClr val="accent1"/>
-          </a:effectRef>
-          <a:fontRef idx="minor">
-            <a:schemeClr val="lt1"/>
-          </a:fontRef>
-        </p:style>
-        <p:txBody>
-          <a:bodyPr rtlCol="0" anchor="ctr"/>
-          <a:lstStyle/>
-          <a:p>
-            <a:pPr algn="ctr"/>
-          </a:p>
-        </p:txBody>
-      </p:sp>
-      <p:sp>
-        <p:nvSpPr>
-          <p:cNvPr id="11" name="TextBox 10"/>
-          <p:cNvSpPr txBox="1"/>
-          <p:nvPr/>
-        </p:nvSpPr>
-        <p:spPr>
-          <a:xfrm>
-            <a:off x="777240" y="4599431"/>
-            <a:ext cx="10607040" cy="676656"/>
-          </a:xfrm>
-          <a:prstGeom prst="rect">
-            <a:avLst/>
-          </a:prstGeom>
-          <a:noFill/>
-        </p:spPr>
-        <p:txBody>
-          <a:bodyPr wrap="square" lIns="0" rIns="0" tIns="0" bIns="0">
-            <a:spAutoFit/>
-          </a:bodyPr>
-          <a:lstStyle/>
-          <a:p>
-            <a:pPr algn="l">
-              <a:spcAft>
-                <a:spcPts val="100"/>
-              </a:spcAft>
-            </a:pPr>
-            <a:r>
-              <a:rPr sz="1350" b="1" i="0">
-                <a:solidFill>
-                  <a:srgbClr val="FFFFFF"/>
-                </a:solidFill>
-                <a:latin typeface="Calibri"/>
-              </a:rPr>
-              <a:t>Observed times are an upper bound</a:t>
-            </a:r>
-          </a:p>
-          <a:p>
-            <a:pPr algn="l">
-              <a:spcAft>
-                <a:spcPts val="0"/>
-              </a:spcAft>
-            </a:pPr>
-            <a:r>
-              <a:rPr sz="1150" b="0" i="0">
-                <a:solidFill>
-                  <a:srgbClr val="C9E2D8"/>
-                </a:solidFill>
-                <a:latin typeface="Calibri"/>
-              </a:rPr>
-              <a:t>They embody informal wait-to-fill practice; a scheduled, headway-enforced service should beat them.</a:t>
-            </a:r>
-          </a:p>
-        </p:txBody>
-      </p:sp>
-      <p:sp>
-        <p:nvSpPr>
-          <p:cNvPr id="12" name="Rounded Rectangle 11"/>
-          <p:cNvSpPr/>
-          <p:nvPr/>
-        </p:nvSpPr>
-        <p:spPr>
-          <a:xfrm>
-            <a:off x="502920" y="5477256"/>
-            <a:ext cx="11155680" cy="841248"/>
-          </a:xfrm>
-          <a:prstGeom prst="roundRect">
-            <a:avLst>
-              <a:gd name="adj" fmla="val 6000"/>
-            </a:avLst>
-          </a:prstGeom>
-          <a:solidFill>
-            <a:srgbClr val="0E4A3E"/>
-          </a:solidFill>
-          <a:ln>
-            <a:noFill/>
-          </a:ln>
-          <a:effectLst/>
-        </p:spPr>
-        <p:style>
-          <a:lnRef idx="1">
-            <a:schemeClr val="accent1"/>
-          </a:lnRef>
-          <a:fillRef idx="3">
-            <a:schemeClr val="accent1"/>
-          </a:fillRef>
-          <a:effectRef idx="2">
-            <a:schemeClr val="accent1"/>
-          </a:effectRef>
-          <a:fontRef idx="minor">
-            <a:schemeClr val="lt1"/>
-          </a:fontRef>
-        </p:style>
-        <p:txBody>
-          <a:bodyPr rtlCol="0" anchor="ctr"/>
-          <a:lstStyle/>
-          <a:p>
-            <a:pPr algn="ctr"/>
-          </a:p>
-        </p:txBody>
-      </p:sp>
-      <p:sp>
-        <p:nvSpPr>
-          <p:cNvPr id="13" name="TextBox 12"/>
-          <p:cNvSpPr txBox="1"/>
-          <p:nvPr/>
-        </p:nvSpPr>
-        <p:spPr>
-          <a:xfrm>
-            <a:off x="777240" y="5568696"/>
-            <a:ext cx="10607040" cy="676656"/>
-          </a:xfrm>
-          <a:prstGeom prst="rect">
-            <a:avLst/>
-          </a:prstGeom>
-          <a:noFill/>
-        </p:spPr>
-        <p:txBody>
-          <a:bodyPr wrap="square" lIns="0" rIns="0" tIns="0" bIns="0">
-            <a:spAutoFit/>
-          </a:bodyPr>
-          <a:lstStyle/>
-          <a:p>
-            <a:pPr algn="l">
-              <a:spcAft>
-                <a:spcPts val="100"/>
-              </a:spcAft>
-            </a:pPr>
-            <a:r>
-              <a:rPr sz="1350" b="1" i="0">
-                <a:solidFill>
-                  <a:srgbClr val="FFFFFF"/>
-                </a:solidFill>
-                <a:latin typeface="Calibri"/>
-              </a:rPr>
-              <a:t>Rural routes remain unvalidated</a:t>
-            </a:r>
-          </a:p>
-          <a:p>
-            <a:pPr algn="l">
-              <a:spcAft>
-                <a:spcPts val="0"/>
-              </a:spcAft>
-            </a:pPr>
-            <a:r>
-              <a:rPr sz="1150" b="0" i="0">
-                <a:solidFill>
-                  <a:srgbClr val="C9E2D8"/>
-                </a:solidFill>
-                <a:latin typeface="Calibri"/>
-              </a:rPr>
-              <a:t>Measured corrections touch 5 Srinagar-core corridors; long rural lifeline cycle times still rest on the model.</a:t>
+                  <a:srgbClr val="D5E8DF"/>
+                </a:solidFill>
+                <a:latin typeface="Calibri"/>
+              </a:rPr>
+              <a:t>Re-anchor the termini (stops register · observed GPS stop clusters · researched pins — JVC = SKIMS Bemina; Iskanderpora &amp; Badran = Beerwah-belt Budgam villages) → OSRM re-route → accept ONLY inside the route's web-verified km band → prefer a real observed run between the pins. Numbers unchanged; only the geometry.</a:t>
             </a:r>
           </a:p>
         </p:txBody>
@@ -6594,6 +6659,628 @@
 </file>
 
 <file path=ppt/slides/slide14.xml><?xml version="1.0" encoding="utf-8"?>
+<p:sld xmlns:a="http://schemas.openxmlformats.org/drawingml/2006/main" xmlns:p="http://schemas.openxmlformats.org/presentationml/2006/main" xmlns:r="http://schemas.openxmlformats.org/officeDocument/2006/relationships">
+  <p:cSld>
+    <p:spTree>
+      <p:nvGrpSpPr>
+        <p:cNvPr id="1" name=""/>
+        <p:cNvGrpSpPr/>
+        <p:nvPr/>
+      </p:nvGrpSpPr>
+      <p:grpSpPr/>
+      <p:sp>
+        <p:nvSpPr>
+          <p:cNvPr id="2" name="Rectangle 1"/>
+          <p:cNvSpPr/>
+          <p:nvPr/>
+        </p:nvSpPr>
+        <p:spPr>
+          <a:xfrm>
+            <a:off x="0" y="0"/>
+            <a:ext cx="12191695" cy="6858000"/>
+          </a:xfrm>
+          <a:prstGeom prst="rect">
+            <a:avLst/>
+          </a:prstGeom>
+          <a:solidFill>
+            <a:srgbClr val="0A3D33"/>
+          </a:solidFill>
+          <a:ln>
+            <a:noFill/>
+          </a:ln>
+          <a:effectLst/>
+        </p:spPr>
+        <p:style>
+          <a:lnRef idx="1">
+            <a:schemeClr val="accent1"/>
+          </a:lnRef>
+          <a:fillRef idx="3">
+            <a:schemeClr val="accent1"/>
+          </a:fillRef>
+          <a:effectRef idx="2">
+            <a:schemeClr val="accent1"/>
+          </a:effectRef>
+          <a:fontRef idx="minor">
+            <a:schemeClr val="lt1"/>
+          </a:fontRef>
+        </p:style>
+        <p:txBody>
+          <a:bodyPr rtlCol="0" anchor="ctr"/>
+          <a:lstStyle/>
+          <a:p>
+            <a:pPr algn="ctr"/>
+          </a:p>
+        </p:txBody>
+      </p:sp>
+      <p:sp>
+        <p:nvSpPr>
+          <p:cNvPr id="3" name="TextBox 2"/>
+          <p:cNvSpPr txBox="1"/>
+          <p:nvPr/>
+        </p:nvSpPr>
+        <p:spPr>
+          <a:xfrm>
+            <a:off x="502920" y="365760"/>
+            <a:ext cx="11155680" cy="1005840"/>
+          </a:xfrm>
+          <a:prstGeom prst="rect">
+            <a:avLst/>
+          </a:prstGeom>
+          <a:noFill/>
+        </p:spPr>
+        <p:txBody>
+          <a:bodyPr wrap="square" lIns="0" rIns="0" tIns="0" bIns="0">
+            <a:spAutoFit/>
+          </a:bodyPr>
+          <a:lstStyle/>
+          <a:p>
+            <a:pPr algn="l">
+              <a:spcAft>
+                <a:spcPts val="400"/>
+              </a:spcAft>
+            </a:pPr>
+            <a:r>
+              <a:rPr sz="1200" b="1" i="0">
+                <a:solidFill>
+                  <a:srgbClr val="7FC8AF"/>
+                </a:solidFill>
+                <a:latin typeface="Calibri"/>
+              </a:rPr>
+              <a:t>READ BEFORE CITING</a:t>
+            </a:r>
+          </a:p>
+          <a:p>
+            <a:pPr algn="l">
+              <a:spcAft>
+                <a:spcPts val="200"/>
+              </a:spcAft>
+            </a:pPr>
+            <a:r>
+              <a:rPr sz="3100" b="1" i="0">
+                <a:solidFill>
+                  <a:srgbClr val="FFFFFF"/>
+                </a:solidFill>
+                <a:latin typeface="Cambria"/>
+              </a:rPr>
+              <a:t>What this data cannot tell us</a:t>
+            </a:r>
+          </a:p>
+        </p:txBody>
+      </p:sp>
+      <p:sp>
+        <p:nvSpPr>
+          <p:cNvPr id="4" name="Rounded Rectangle 3"/>
+          <p:cNvSpPr/>
+          <p:nvPr/>
+        </p:nvSpPr>
+        <p:spPr>
+          <a:xfrm>
+            <a:off x="502920" y="1600200"/>
+            <a:ext cx="11155680" cy="841248"/>
+          </a:xfrm>
+          <a:prstGeom prst="roundRect">
+            <a:avLst>
+              <a:gd name="adj" fmla="val 6000"/>
+            </a:avLst>
+          </a:prstGeom>
+          <a:solidFill>
+            <a:srgbClr val="0E4A3E"/>
+          </a:solidFill>
+          <a:ln>
+            <a:noFill/>
+          </a:ln>
+          <a:effectLst/>
+        </p:spPr>
+        <p:style>
+          <a:lnRef idx="1">
+            <a:schemeClr val="accent1"/>
+          </a:lnRef>
+          <a:fillRef idx="3">
+            <a:schemeClr val="accent1"/>
+          </a:fillRef>
+          <a:effectRef idx="2">
+            <a:schemeClr val="accent1"/>
+          </a:effectRef>
+          <a:fontRef idx="minor">
+            <a:schemeClr val="lt1"/>
+          </a:fontRef>
+        </p:style>
+        <p:txBody>
+          <a:bodyPr rtlCol="0" anchor="ctr"/>
+          <a:lstStyle/>
+          <a:p>
+            <a:pPr algn="ctr"/>
+          </a:p>
+        </p:txBody>
+      </p:sp>
+      <p:sp>
+        <p:nvSpPr>
+          <p:cNvPr id="5" name="TextBox 4"/>
+          <p:cNvSpPr txBox="1"/>
+          <p:nvPr/>
+        </p:nvSpPr>
+        <p:spPr>
+          <a:xfrm>
+            <a:off x="777240" y="1691640"/>
+            <a:ext cx="10607040" cy="676656"/>
+          </a:xfrm>
+          <a:prstGeom prst="rect">
+            <a:avLst/>
+          </a:prstGeom>
+          <a:noFill/>
+        </p:spPr>
+        <p:txBody>
+          <a:bodyPr wrap="square" lIns="0" rIns="0" tIns="0" bIns="0">
+            <a:spAutoFit/>
+          </a:bodyPr>
+          <a:lstStyle/>
+          <a:p>
+            <a:pPr algn="l">
+              <a:spcAft>
+                <a:spcPts val="100"/>
+              </a:spcAft>
+            </a:pPr>
+            <a:r>
+              <a:rPr sz="1350" b="1" i="0">
+                <a:solidFill>
+                  <a:srgbClr val="FFFFFF"/>
+                </a:solidFill>
+                <a:latin typeface="Calibri"/>
+              </a:rPr>
+              <a:t>Partial, self-selected adoption</a:t>
+            </a:r>
+          </a:p>
+          <a:p>
+            <a:pPr algn="l">
+              <a:spcAft>
+                <a:spcPts val="0"/>
+              </a:spcAft>
+            </a:pPr>
+            <a:r>
+              <a:rPr sz="1150" b="0" i="0">
+                <a:solidFill>
+                  <a:srgbClr val="C9E2D8"/>
+                </a:solidFill>
+                <a:latin typeface="Calibri"/>
+              </a:rPr>
+              <a:t>~157 active drivers, Srinagar-concentrated. “No app data on a route” does NOT mean “no service”.</a:t>
+            </a:r>
+          </a:p>
+        </p:txBody>
+      </p:sp>
+      <p:sp>
+        <p:nvSpPr>
+          <p:cNvPr id="6" name="Rounded Rectangle 5"/>
+          <p:cNvSpPr/>
+          <p:nvPr/>
+        </p:nvSpPr>
+        <p:spPr>
+          <a:xfrm>
+            <a:off x="502920" y="2569464"/>
+            <a:ext cx="11155680" cy="841248"/>
+          </a:xfrm>
+          <a:prstGeom prst="roundRect">
+            <a:avLst>
+              <a:gd name="adj" fmla="val 6000"/>
+            </a:avLst>
+          </a:prstGeom>
+          <a:solidFill>
+            <a:srgbClr val="0E4A3E"/>
+          </a:solidFill>
+          <a:ln>
+            <a:noFill/>
+          </a:ln>
+          <a:effectLst/>
+        </p:spPr>
+        <p:style>
+          <a:lnRef idx="1">
+            <a:schemeClr val="accent1"/>
+          </a:lnRef>
+          <a:fillRef idx="3">
+            <a:schemeClr val="accent1"/>
+          </a:fillRef>
+          <a:effectRef idx="2">
+            <a:schemeClr val="accent1"/>
+          </a:effectRef>
+          <a:fontRef idx="minor">
+            <a:schemeClr val="lt1"/>
+          </a:fontRef>
+        </p:style>
+        <p:txBody>
+          <a:bodyPr rtlCol="0" anchor="ctr"/>
+          <a:lstStyle/>
+          <a:p>
+            <a:pPr algn="ctr"/>
+          </a:p>
+        </p:txBody>
+      </p:sp>
+      <p:sp>
+        <p:nvSpPr>
+          <p:cNvPr id="7" name="TextBox 6"/>
+          <p:cNvSpPr txBox="1"/>
+          <p:nvPr/>
+        </p:nvSpPr>
+        <p:spPr>
+          <a:xfrm>
+            <a:off x="777240" y="2660904"/>
+            <a:ext cx="10607040" cy="676656"/>
+          </a:xfrm>
+          <a:prstGeom prst="rect">
+            <a:avLst/>
+          </a:prstGeom>
+          <a:noFill/>
+        </p:spPr>
+        <p:txBody>
+          <a:bodyPr wrap="square" lIns="0" rIns="0" tIns="0" bIns="0">
+            <a:spAutoFit/>
+          </a:bodyPr>
+          <a:lstStyle/>
+          <a:p>
+            <a:pPr algn="l">
+              <a:spcAft>
+                <a:spcPts val="100"/>
+              </a:spcAft>
+            </a:pPr>
+            <a:r>
+              <a:rPr sz="1350" b="1" i="0">
+                <a:solidFill>
+                  <a:srgbClr val="FFFFFF"/>
+                </a:solidFill>
+                <a:latin typeface="Calibri"/>
+              </a:rPr>
+              <a:t>No demand, no ridership, no frequency</a:t>
+            </a:r>
+          </a:p>
+          <a:p>
+            <a:pPr algn="l">
+              <a:spcAft>
+                <a:spcPts val="0"/>
+              </a:spcAft>
+            </a:pPr>
+            <a:r>
+              <a:rPr sz="1150" b="0" i="0">
+                <a:solidFill>
+                  <a:srgbClr val="C9E2D8"/>
+                </a:solidFill>
+                <a:latin typeface="Calibri"/>
+              </a:rPr>
+              <a:t>The app sees vehicles, not passengers. Observed run counts reflect who installed the app — never cited as service frequency.</a:t>
+            </a:r>
+          </a:p>
+        </p:txBody>
+      </p:sp>
+      <p:sp>
+        <p:nvSpPr>
+          <p:cNvPr id="8" name="Rounded Rectangle 7"/>
+          <p:cNvSpPr/>
+          <p:nvPr/>
+        </p:nvSpPr>
+        <p:spPr>
+          <a:xfrm>
+            <a:off x="502920" y="3538728"/>
+            <a:ext cx="11155680" cy="841248"/>
+          </a:xfrm>
+          <a:prstGeom prst="roundRect">
+            <a:avLst>
+              <a:gd name="adj" fmla="val 6000"/>
+            </a:avLst>
+          </a:prstGeom>
+          <a:solidFill>
+            <a:srgbClr val="0E4A3E"/>
+          </a:solidFill>
+          <a:ln>
+            <a:noFill/>
+          </a:ln>
+          <a:effectLst/>
+        </p:spPr>
+        <p:style>
+          <a:lnRef idx="1">
+            <a:schemeClr val="accent1"/>
+          </a:lnRef>
+          <a:fillRef idx="3">
+            <a:schemeClr val="accent1"/>
+          </a:fillRef>
+          <a:effectRef idx="2">
+            <a:schemeClr val="accent1"/>
+          </a:effectRef>
+          <a:fontRef idx="minor">
+            <a:schemeClr val="lt1"/>
+          </a:fontRef>
+        </p:style>
+        <p:txBody>
+          <a:bodyPr rtlCol="0" anchor="ctr"/>
+          <a:lstStyle/>
+          <a:p>
+            <a:pPr algn="ctr"/>
+          </a:p>
+        </p:txBody>
+      </p:sp>
+      <p:sp>
+        <p:nvSpPr>
+          <p:cNvPr id="9" name="TextBox 8"/>
+          <p:cNvSpPr txBox="1"/>
+          <p:nvPr/>
+        </p:nvSpPr>
+        <p:spPr>
+          <a:xfrm>
+            <a:off x="777240" y="3630168"/>
+            <a:ext cx="10607040" cy="676656"/>
+          </a:xfrm>
+          <a:prstGeom prst="rect">
+            <a:avLst/>
+          </a:prstGeom>
+          <a:noFill/>
+        </p:spPr>
+        <p:txBody>
+          <a:bodyPr wrap="square" lIns="0" rIns="0" tIns="0" bIns="0">
+            <a:spAutoFit/>
+          </a:bodyPr>
+          <a:lstStyle/>
+          <a:p>
+            <a:pPr algn="l">
+              <a:spcAft>
+                <a:spcPts val="100"/>
+              </a:spcAft>
+            </a:pPr>
+            <a:r>
+              <a:rPr sz="1350" b="1" i="0">
+                <a:solidFill>
+                  <a:srgbClr val="FFFFFF"/>
+                </a:solidFill>
+                <a:latin typeface="Calibri"/>
+              </a:rPr>
+              <a:t>Corridors cover 41% of clean runs</a:t>
+            </a:r>
+          </a:p>
+          <a:p>
+            <a:pPr algn="l">
+              <a:spcAft>
+                <a:spcPts val="0"/>
+              </a:spcAft>
+            </a:pPr>
+            <a:r>
+              <a:rPr sz="1150" b="0" i="0">
+                <a:solidFill>
+                  <a:srgbClr val="C9E2D8"/>
+                </a:solidFill>
+                <a:latin typeface="Calibri"/>
+              </a:rPr>
+              <a:t>The other 59% was decomposed and shown to be noise, loops and out-of-division traffic — but the corridor findings describe the frequently-driven core only.</a:t>
+            </a:r>
+          </a:p>
+        </p:txBody>
+      </p:sp>
+      <p:sp>
+        <p:nvSpPr>
+          <p:cNvPr id="10" name="Rounded Rectangle 9"/>
+          <p:cNvSpPr/>
+          <p:nvPr/>
+        </p:nvSpPr>
+        <p:spPr>
+          <a:xfrm>
+            <a:off x="502920" y="4507992"/>
+            <a:ext cx="11155680" cy="841248"/>
+          </a:xfrm>
+          <a:prstGeom prst="roundRect">
+            <a:avLst>
+              <a:gd name="adj" fmla="val 6000"/>
+            </a:avLst>
+          </a:prstGeom>
+          <a:solidFill>
+            <a:srgbClr val="0E4A3E"/>
+          </a:solidFill>
+          <a:ln>
+            <a:noFill/>
+          </a:ln>
+          <a:effectLst/>
+        </p:spPr>
+        <p:style>
+          <a:lnRef idx="1">
+            <a:schemeClr val="accent1"/>
+          </a:lnRef>
+          <a:fillRef idx="3">
+            <a:schemeClr val="accent1"/>
+          </a:fillRef>
+          <a:effectRef idx="2">
+            <a:schemeClr val="accent1"/>
+          </a:effectRef>
+          <a:fontRef idx="minor">
+            <a:schemeClr val="lt1"/>
+          </a:fontRef>
+        </p:style>
+        <p:txBody>
+          <a:bodyPr rtlCol="0" anchor="ctr"/>
+          <a:lstStyle/>
+          <a:p>
+            <a:pPr algn="ctr"/>
+          </a:p>
+        </p:txBody>
+      </p:sp>
+      <p:sp>
+        <p:nvSpPr>
+          <p:cNvPr id="11" name="TextBox 10"/>
+          <p:cNvSpPr txBox="1"/>
+          <p:nvPr/>
+        </p:nvSpPr>
+        <p:spPr>
+          <a:xfrm>
+            <a:off x="777240" y="4599431"/>
+            <a:ext cx="10607040" cy="676656"/>
+          </a:xfrm>
+          <a:prstGeom prst="rect">
+            <a:avLst/>
+          </a:prstGeom>
+          <a:noFill/>
+        </p:spPr>
+        <p:txBody>
+          <a:bodyPr wrap="square" lIns="0" rIns="0" tIns="0" bIns="0">
+            <a:spAutoFit/>
+          </a:bodyPr>
+          <a:lstStyle/>
+          <a:p>
+            <a:pPr algn="l">
+              <a:spcAft>
+                <a:spcPts val="100"/>
+              </a:spcAft>
+            </a:pPr>
+            <a:r>
+              <a:rPr sz="1350" b="1" i="0">
+                <a:solidFill>
+                  <a:srgbClr val="FFFFFF"/>
+                </a:solidFill>
+                <a:latin typeface="Calibri"/>
+              </a:rPr>
+              <a:t>Observed times are an upper bound</a:t>
+            </a:r>
+          </a:p>
+          <a:p>
+            <a:pPr algn="l">
+              <a:spcAft>
+                <a:spcPts val="0"/>
+              </a:spcAft>
+            </a:pPr>
+            <a:r>
+              <a:rPr sz="1150" b="0" i="0">
+                <a:solidFill>
+                  <a:srgbClr val="C9E2D8"/>
+                </a:solidFill>
+                <a:latin typeface="Calibri"/>
+              </a:rPr>
+              <a:t>They embody informal wait-to-fill practice; a scheduled, headway-enforced service should beat them.</a:t>
+            </a:r>
+          </a:p>
+        </p:txBody>
+      </p:sp>
+      <p:sp>
+        <p:nvSpPr>
+          <p:cNvPr id="12" name="Rounded Rectangle 11"/>
+          <p:cNvSpPr/>
+          <p:nvPr/>
+        </p:nvSpPr>
+        <p:spPr>
+          <a:xfrm>
+            <a:off x="502920" y="5477256"/>
+            <a:ext cx="11155680" cy="841248"/>
+          </a:xfrm>
+          <a:prstGeom prst="roundRect">
+            <a:avLst>
+              <a:gd name="adj" fmla="val 6000"/>
+            </a:avLst>
+          </a:prstGeom>
+          <a:solidFill>
+            <a:srgbClr val="0E4A3E"/>
+          </a:solidFill>
+          <a:ln>
+            <a:noFill/>
+          </a:ln>
+          <a:effectLst/>
+        </p:spPr>
+        <p:style>
+          <a:lnRef idx="1">
+            <a:schemeClr val="accent1"/>
+          </a:lnRef>
+          <a:fillRef idx="3">
+            <a:schemeClr val="accent1"/>
+          </a:fillRef>
+          <a:effectRef idx="2">
+            <a:schemeClr val="accent1"/>
+          </a:effectRef>
+          <a:fontRef idx="minor">
+            <a:schemeClr val="lt1"/>
+          </a:fontRef>
+        </p:style>
+        <p:txBody>
+          <a:bodyPr rtlCol="0" anchor="ctr"/>
+          <a:lstStyle/>
+          <a:p>
+            <a:pPr algn="ctr"/>
+          </a:p>
+        </p:txBody>
+      </p:sp>
+      <p:sp>
+        <p:nvSpPr>
+          <p:cNvPr id="13" name="TextBox 12"/>
+          <p:cNvSpPr txBox="1"/>
+          <p:nvPr/>
+        </p:nvSpPr>
+        <p:spPr>
+          <a:xfrm>
+            <a:off x="777240" y="5568696"/>
+            <a:ext cx="10607040" cy="676656"/>
+          </a:xfrm>
+          <a:prstGeom prst="rect">
+            <a:avLst/>
+          </a:prstGeom>
+          <a:noFill/>
+        </p:spPr>
+        <p:txBody>
+          <a:bodyPr wrap="square" lIns="0" rIns="0" tIns="0" bIns="0">
+            <a:spAutoFit/>
+          </a:bodyPr>
+          <a:lstStyle/>
+          <a:p>
+            <a:pPr algn="l">
+              <a:spcAft>
+                <a:spcPts val="100"/>
+              </a:spcAft>
+            </a:pPr>
+            <a:r>
+              <a:rPr sz="1350" b="1" i="0">
+                <a:solidFill>
+                  <a:srgbClr val="FFFFFF"/>
+                </a:solidFill>
+                <a:latin typeface="Calibri"/>
+              </a:rPr>
+              <a:t>Rural routes remain unvalidated</a:t>
+            </a:r>
+          </a:p>
+          <a:p>
+            <a:pPr algn="l">
+              <a:spcAft>
+                <a:spcPts val="0"/>
+              </a:spcAft>
+            </a:pPr>
+            <a:r>
+              <a:rPr sz="1150" b="0" i="0">
+                <a:solidFill>
+                  <a:srgbClr val="C9E2D8"/>
+                </a:solidFill>
+                <a:latin typeface="Calibri"/>
+              </a:rPr>
+              <a:t>Measured corrections touch 5 Srinagar-core corridors; long rural lifeline cycle times still rest on the model.</a:t>
+            </a:r>
+          </a:p>
+        </p:txBody>
+      </p:sp>
+    </p:spTree>
+  </p:cSld>
+  <p:clrMapOvr>
+    <a:masterClrMapping/>
+  </p:clrMapOvr>
+</p:sld>
+</file>
+
+<file path=ppt/slides/slide15.xml><?xml version="1.0" encoding="utf-8"?>
 <p:sld xmlns:a="http://schemas.openxmlformats.org/drawingml/2006/main" xmlns:p="http://schemas.openxmlformats.org/presentationml/2006/main" xmlns:r="http://schemas.openxmlformats.org/officeDocument/2006/relationships">
   <p:cSld>
     <p:spTree>
